--- a/templates/en/cv_template.pptx
+++ b/templates/en/cv_template.pptx
@@ -14,6 +14,2778 @@
 </file>
 
 <file path=ppt/slideLayouts/slideLayout1.xml><?xml version="1.0" encoding="utf-8"?>
+<p:sldLayout xmlns:a="http://schemas.openxmlformats.org/drawingml/2006/main" xmlns:p="http://schemas.openxmlformats.org/presentationml/2006/main" xmlns:r="http://schemas.openxmlformats.org/officeDocument/2006/relationships" xmlns:p14="http://schemas.microsoft.com/office/powerpoint/2010/main" xmlns:p15="http://schemas.microsoft.com/office/powerpoint/2012/main" xmlns:mc="http://schemas.openxmlformats.org/markup-compatibility/2006" type="titleOnly" preserve="1">
+  <p:cSld name="Nur Titel">
+    <p:bg>
+      <p:bgPr>
+        <a:solidFill>
+          <a:srgbClr val="ffffff"/>
+        </a:solidFill>
+      </p:bgPr>
+    </p:bg>
+    <p:spTree>
+      <p:nvGrpSpPr>
+        <p:cNvPr id="1" name=""/>
+        <p:cNvGrpSpPr/>
+        <p:nvPr/>
+      </p:nvGrpSpPr>
+      <p:grpSpPr>
+        <a:xfrm>
+          <a:off x="0" y="0"/>
+          <a:ext cx="0" cy="0"/>
+          <a:chOff x="0" y="0"/>
+          <a:chExt cx="0" cy="0"/>
+        </a:xfrm>
+      </p:grpSpPr>
+      <p:sp>
+        <p:nvSpPr>
+          <p:cNvPr id="2" name="PlaceHolder 1"/>
+          <p:cNvSpPr>
+            <a:spLocks noGrp="1"/>
+          </p:cNvSpPr>
+          <p:nvPr>
+            <p:ph type="title"/>
+          </p:nvPr>
+        </p:nvSpPr>
+        <p:spPr>
+          <a:xfrm>
+            <a:off x="471600" y="527400"/>
+            <a:ext cx="5913000" cy="1912680"/>
+          </a:xfrm>
+          <a:prstGeom prst="rect">
+            <a:avLst/>
+          </a:prstGeom>
+          <a:noFill/>
+          <a:ln w="0">
+            <a:noFill/>
+          </a:ln>
+        </p:spPr>
+        <p:txBody>
+          <a:bodyPr lIns="91440" rIns="91440" tIns="45720" bIns="45720" anchor="ctr">
+            <a:noAutofit/>
+          </a:bodyPr>
+          <a:p>
+            <a:pPr indent="0" defTabSz="685800">
+              <a:lnSpc>
+                <a:spcPct val="90000"/>
+              </a:lnSpc>
+              <a:buNone/>
+              <a:tabLst>
+                <a:tab algn="l" pos="0"/>
+              </a:tabLst>
+            </a:pPr>
+            <a:r>
+              <a:rPr lang="de-DE" sz="3300" b="0" u="none" strike="noStrike">
+                <a:solidFill>
+                  <a:schemeClr val="dk1"/>
+                </a:solidFill>
+                <a:effectLst/>
+                <a:uFillTx/>
+                <a:latin typeface="Calibri Light"/>
+              </a:rPr>
+              <a:t>Mastertitelformat bearbeiten</a:t>
+            </a:r>
+            <a:endParaRPr lang="de-DE" sz="3300" b="0" u="none" strike="noStrike">
+              <a:solidFill>
+                <a:srgbClr val="000000"/>
+              </a:solidFill>
+              <a:effectLst/>
+              <a:uFillTx/>
+              <a:latin typeface="Arial"/>
+            </a:endParaRPr>
+          </a:p>
+        </p:txBody>
+      </p:sp>
+      <p:sp>
+        <p:nvSpPr>
+          <p:cNvPr id="3" name="PlaceHolder 2"/>
+          <p:cNvSpPr>
+            <a:spLocks noGrp="1"/>
+          </p:cNvSpPr>
+          <p:nvPr>
+            <p:ph type="dt" idx="1"/>
+          </p:nvPr>
+        </p:nvSpPr>
+        <p:spPr>
+          <a:xfrm>
+            <a:off x="471600" y="9181440"/>
+            <a:ext cx="1540800" cy="525240"/>
+          </a:xfrm>
+          <a:prstGeom prst="rect">
+            <a:avLst/>
+          </a:prstGeom>
+          <a:noFill/>
+          <a:ln w="0">
+            <a:noFill/>
+          </a:ln>
+        </p:spPr>
+        <p:txBody>
+          <a:bodyPr lIns="91440" rIns="91440" tIns="45720" bIns="45720" anchor="ctr">
+            <a:noAutofit/>
+          </a:bodyPr>
+          <a:lstStyle>
+            <a:lvl1pPr indent="0" defTabSz="457200">
+              <a:lnSpc>
+                <a:spcPct val="100000"/>
+              </a:lnSpc>
+              <a:buNone/>
+              <a:tabLst>
+                <a:tab algn="l" pos="0"/>
+              </a:tabLst>
+              <a:defRPr lang="de-DE" sz="900" b="0" u="none" strike="noStrike">
+                <a:solidFill>
+                  <a:schemeClr val="dk1">
+                    <a:tint val="75000"/>
+                  </a:schemeClr>
+                </a:solidFill>
+                <a:effectLst/>
+                <a:uFillTx/>
+                <a:latin typeface="Calibri"/>
+              </a:defRPr>
+            </a:lvl1pPr>
+          </a:lstStyle>
+          <a:p>
+            <a:pPr indent="0" defTabSz="457200">
+              <a:lnSpc>
+                <a:spcPct val="100000"/>
+              </a:lnSpc>
+              <a:buNone/>
+              <a:tabLst>
+                <a:tab algn="l" pos="0"/>
+              </a:tabLst>
+            </a:pPr>
+            <a:r>
+              <a:rPr lang="de-DE" sz="900" b="0" u="none" strike="noStrike">
+                <a:solidFill>
+                  <a:schemeClr val="dk1">
+                    <a:tint val="75000"/>
+                  </a:schemeClr>
+                </a:solidFill>
+                <a:effectLst/>
+                <a:uFillTx/>
+                <a:latin typeface="Calibri"/>
+              </a:rPr>
+              <a:t>&lt;Datum/Uhrzeit&gt;</a:t>
+            </a:r>
+            <a:endParaRPr lang="de-DE" sz="900" b="0" u="none" strike="noStrike">
+              <a:solidFill>
+                <a:srgbClr val="000000"/>
+              </a:solidFill>
+              <a:effectLst/>
+              <a:uFillTx/>
+              <a:latin typeface="Times New Roman"/>
+            </a:endParaRPr>
+          </a:p>
+        </p:txBody>
+      </p:sp>
+      <p:sp>
+        <p:nvSpPr>
+          <p:cNvPr id="4" name="PlaceHolder 3"/>
+          <p:cNvSpPr>
+            <a:spLocks noGrp="1"/>
+          </p:cNvSpPr>
+          <p:nvPr>
+            <p:ph type="ftr" idx="2"/>
+          </p:nvPr>
+        </p:nvSpPr>
+        <p:spPr>
+          <a:xfrm>
+            <a:off x="2271600" y="9181440"/>
+            <a:ext cx="2312280" cy="525240"/>
+          </a:xfrm>
+          <a:prstGeom prst="rect">
+            <a:avLst/>
+          </a:prstGeom>
+          <a:noFill/>
+          <a:ln w="0">
+            <a:noFill/>
+          </a:ln>
+        </p:spPr>
+        <p:txBody>
+          <a:bodyPr lIns="91440" rIns="91440" tIns="45720" bIns="45720" anchor="ctr">
+            <a:noAutofit/>
+          </a:bodyPr>
+          <a:lstStyle>
+            <a:lvl1pPr indent="0" algn="ctr">
+              <a:lnSpc>
+                <a:spcPct val="100000"/>
+              </a:lnSpc>
+              <a:buNone/>
+              <a:tabLst>
+                <a:tab algn="l" pos="0"/>
+              </a:tabLst>
+              <a:defRPr lang="de-DE" sz="1400" b="0" u="none" strike="noStrike">
+                <a:solidFill>
+                  <a:srgbClr val="000000"/>
+                </a:solidFill>
+                <a:effectLst/>
+                <a:uFillTx/>
+                <a:latin typeface="Times New Roman"/>
+              </a:defRPr>
+            </a:lvl1pPr>
+          </a:lstStyle>
+          <a:p>
+            <a:pPr indent="0" algn="ctr">
+              <a:lnSpc>
+                <a:spcPct val="100000"/>
+              </a:lnSpc>
+              <a:buNone/>
+              <a:tabLst>
+                <a:tab algn="l" pos="0"/>
+              </a:tabLst>
+            </a:pPr>
+            <a:r>
+              <a:rPr lang="de-DE" sz="1400" b="0" u="none" strike="noStrike">
+                <a:solidFill>
+                  <a:srgbClr val="000000"/>
+                </a:solidFill>
+                <a:effectLst/>
+                <a:uFillTx/>
+                <a:latin typeface="Times New Roman"/>
+              </a:rPr>
+              <a:t>&lt;Fußzeile&gt;</a:t>
+            </a:r>
+            <a:endParaRPr lang="de-DE" sz="1400" b="0" u="none" strike="noStrike">
+              <a:solidFill>
+                <a:srgbClr val="000000"/>
+              </a:solidFill>
+              <a:effectLst/>
+              <a:uFillTx/>
+              <a:latin typeface="Times New Roman"/>
+            </a:endParaRPr>
+          </a:p>
+        </p:txBody>
+      </p:sp>
+      <p:sp>
+        <p:nvSpPr>
+          <p:cNvPr id="5" name="PlaceHolder 4"/>
+          <p:cNvSpPr>
+            <a:spLocks noGrp="1"/>
+          </p:cNvSpPr>
+          <p:nvPr>
+            <p:ph type="sldNum" idx="3"/>
+          </p:nvPr>
+        </p:nvSpPr>
+        <p:spPr>
+          <a:xfrm>
+            <a:off x="4843440" y="9181440"/>
+            <a:ext cx="1540800" cy="525240"/>
+          </a:xfrm>
+          <a:prstGeom prst="rect">
+            <a:avLst/>
+          </a:prstGeom>
+          <a:noFill/>
+          <a:ln w="0">
+            <a:noFill/>
+          </a:ln>
+        </p:spPr>
+        <p:txBody>
+          <a:bodyPr lIns="91440" rIns="91440" tIns="45720" bIns="45720" anchor="ctr">
+            <a:noAutofit/>
+          </a:bodyPr>
+          <a:lstStyle>
+            <a:lvl1pPr indent="0" algn="r" defTabSz="457200">
+              <a:lnSpc>
+                <a:spcPct val="100000"/>
+              </a:lnSpc>
+              <a:buNone/>
+              <a:tabLst>
+                <a:tab algn="l" pos="0"/>
+              </a:tabLst>
+              <a:defRPr lang="de-DE" sz="900" b="0" u="none" strike="noStrike">
+                <a:solidFill>
+                  <a:schemeClr val="dk1">
+                    <a:tint val="75000"/>
+                  </a:schemeClr>
+                </a:solidFill>
+                <a:effectLst/>
+                <a:uFillTx/>
+                <a:latin typeface="Calibri"/>
+              </a:defRPr>
+            </a:lvl1pPr>
+          </a:lstStyle>
+          <a:p>
+            <a:pPr indent="0" algn="r" defTabSz="457200">
+              <a:lnSpc>
+                <a:spcPct val="100000"/>
+              </a:lnSpc>
+              <a:buNone/>
+              <a:tabLst>
+                <a:tab algn="l" pos="0"/>
+              </a:tabLst>
+            </a:pPr>
+            <a:fld id="{5DBF25AA-C460-41D4-8390-823267E5772A}" type="slidenum">
+              <a:rPr lang="de-DE" sz="900" b="0" u="none" strike="noStrike">
+                <a:solidFill>
+                  <a:schemeClr val="dk1">
+                    <a:tint val="75000"/>
+                  </a:schemeClr>
+                </a:solidFill>
+                <a:effectLst/>
+                <a:uFillTx/>
+                <a:latin typeface="Calibri"/>
+              </a:rPr>
+              <a:t>&lt;Foliennummer&gt;</a:t>
+            </a:fld>
+            <a:endParaRPr lang="de-DE" sz="900" b="0" u="none" strike="noStrike">
+              <a:solidFill>
+                <a:srgbClr val="000000"/>
+              </a:solidFill>
+              <a:effectLst/>
+              <a:uFillTx/>
+              <a:latin typeface="Times New Roman"/>
+            </a:endParaRPr>
+          </a:p>
+        </p:txBody>
+      </p:sp>
+    </p:spTree>
+  </p:cSld>
+</p:sldLayout>
+</file>
+
+<file path=ppt/slideLayouts/slideLayout10.xml><?xml version="1.0" encoding="utf-8"?>
+<p:sldLayout xmlns:a="http://schemas.openxmlformats.org/drawingml/2006/main" xmlns:p="http://schemas.openxmlformats.org/presentationml/2006/main" xmlns:r="http://schemas.openxmlformats.org/officeDocument/2006/relationships" xmlns:p14="http://schemas.microsoft.com/office/powerpoint/2010/main" xmlns:p15="http://schemas.microsoft.com/office/powerpoint/2012/main" xmlns:mc="http://schemas.openxmlformats.org/markup-compatibility/2006" type="twoObj" preserve="1">
+  <p:cSld name="Zwei Inhalte">
+    <p:bg>
+      <p:bgPr>
+        <a:solidFill>
+          <a:srgbClr val="ffffff"/>
+        </a:solidFill>
+      </p:bgPr>
+    </p:bg>
+    <p:spTree>
+      <p:nvGrpSpPr>
+        <p:cNvPr id="1" name=""/>
+        <p:cNvGrpSpPr/>
+        <p:nvPr/>
+      </p:nvGrpSpPr>
+      <p:grpSpPr>
+        <a:xfrm>
+          <a:off x="0" y="0"/>
+          <a:ext cx="0" cy="0"/>
+          <a:chOff x="0" y="0"/>
+          <a:chExt cx="0" cy="0"/>
+        </a:xfrm>
+      </p:grpSpPr>
+      <p:sp>
+        <p:nvSpPr>
+          <p:cNvPr id="46" name="PlaceHolder 1"/>
+          <p:cNvSpPr>
+            <a:spLocks noGrp="1"/>
+          </p:cNvSpPr>
+          <p:nvPr>
+            <p:ph type="title"/>
+          </p:nvPr>
+        </p:nvSpPr>
+        <p:spPr>
+          <a:xfrm>
+            <a:off x="471600" y="527400"/>
+            <a:ext cx="5913000" cy="1912680"/>
+          </a:xfrm>
+          <a:prstGeom prst="rect">
+            <a:avLst/>
+          </a:prstGeom>
+          <a:noFill/>
+          <a:ln w="0">
+            <a:noFill/>
+          </a:ln>
+        </p:spPr>
+        <p:txBody>
+          <a:bodyPr lIns="91440" rIns="91440" tIns="45720" bIns="45720" anchor="ctr">
+            <a:noAutofit/>
+          </a:bodyPr>
+          <a:p>
+            <a:pPr indent="0" defTabSz="685800">
+              <a:lnSpc>
+                <a:spcPct val="90000"/>
+              </a:lnSpc>
+              <a:buNone/>
+              <a:tabLst>
+                <a:tab algn="l" pos="0"/>
+              </a:tabLst>
+            </a:pPr>
+            <a:r>
+              <a:rPr lang="de-DE" sz="3300" b="0" u="none" strike="noStrike">
+                <a:solidFill>
+                  <a:schemeClr val="dk1"/>
+                </a:solidFill>
+                <a:effectLst/>
+                <a:uFillTx/>
+                <a:latin typeface="Calibri Light"/>
+              </a:rPr>
+              <a:t>Mastertitelformat bearbeiten</a:t>
+            </a:r>
+            <a:endParaRPr lang="de-DE" sz="3300" b="0" u="none" strike="noStrike">
+              <a:solidFill>
+                <a:srgbClr val="000000"/>
+              </a:solidFill>
+              <a:effectLst/>
+              <a:uFillTx/>
+              <a:latin typeface="Arial"/>
+            </a:endParaRPr>
+          </a:p>
+        </p:txBody>
+      </p:sp>
+      <p:sp>
+        <p:nvSpPr>
+          <p:cNvPr id="47" name="PlaceHolder 2"/>
+          <p:cNvSpPr>
+            <a:spLocks noGrp="1"/>
+          </p:cNvSpPr>
+          <p:nvPr>
+            <p:ph type="body"/>
+          </p:nvPr>
+        </p:nvSpPr>
+        <p:spPr>
+          <a:xfrm>
+            <a:off x="471600" y="2637000"/>
+            <a:ext cx="2912400" cy="6283080"/>
+          </a:xfrm>
+          <a:prstGeom prst="rect">
+            <a:avLst/>
+          </a:prstGeom>
+          <a:noFill/>
+          <a:ln w="0">
+            <a:noFill/>
+          </a:ln>
+        </p:spPr>
+        <p:txBody>
+          <a:bodyPr lIns="91440" rIns="91440" tIns="45720" bIns="45720" anchor="t">
+            <a:noAutofit/>
+          </a:bodyPr>
+          <a:p>
+            <a:pPr marL="171360" indent="-171360" defTabSz="685800">
+              <a:lnSpc>
+                <a:spcPct val="90000"/>
+              </a:lnSpc>
+              <a:spcBef>
+                <a:spcPts val="751"/>
+              </a:spcBef>
+              <a:buClr>
+                <a:srgbClr val="000000"/>
+              </a:buClr>
+              <a:buFont typeface="Arial"/>
+              <a:buChar char="•"/>
+            </a:pPr>
+            <a:r>
+              <a:rPr lang="de-DE" sz="2100" b="0" u="none" strike="noStrike">
+                <a:solidFill>
+                  <a:schemeClr val="dk1"/>
+                </a:solidFill>
+                <a:effectLst/>
+                <a:uFillTx/>
+                <a:latin typeface="Calibri"/>
+              </a:rPr>
+              <a:t>Mastertextformat bearbeiten</a:t>
+            </a:r>
+            <a:endParaRPr lang="de-DE" sz="2100" b="0" u="none" strike="noStrike">
+              <a:solidFill>
+                <a:srgbClr val="000000"/>
+              </a:solidFill>
+              <a:effectLst/>
+              <a:uFillTx/>
+              <a:latin typeface="Arial"/>
+            </a:endParaRPr>
+          </a:p>
+          <a:p>
+            <a:pPr marL="514440" lvl="1" indent="-171360" defTabSz="685800">
+              <a:lnSpc>
+                <a:spcPct val="90000"/>
+              </a:lnSpc>
+              <a:spcBef>
+                <a:spcPts val="374"/>
+              </a:spcBef>
+              <a:buClr>
+                <a:srgbClr val="000000"/>
+              </a:buClr>
+              <a:buFont typeface="Arial"/>
+              <a:buChar char="•"/>
+            </a:pPr>
+            <a:r>
+              <a:rPr lang="de-DE" sz="1800" b="0" u="none" strike="noStrike">
+                <a:solidFill>
+                  <a:schemeClr val="dk1"/>
+                </a:solidFill>
+                <a:effectLst/>
+                <a:uFillTx/>
+                <a:latin typeface="Calibri"/>
+              </a:rPr>
+              <a:t>Zweite Ebene</a:t>
+            </a:r>
+            <a:endParaRPr lang="de-DE" sz="1800" b="0" u="none" strike="noStrike">
+              <a:solidFill>
+                <a:srgbClr val="000000"/>
+              </a:solidFill>
+              <a:effectLst/>
+              <a:uFillTx/>
+              <a:latin typeface="Arial"/>
+            </a:endParaRPr>
+          </a:p>
+          <a:p>
+            <a:pPr marL="857160" lvl="2" indent="-171360" defTabSz="685800">
+              <a:lnSpc>
+                <a:spcPct val="90000"/>
+              </a:lnSpc>
+              <a:spcBef>
+                <a:spcPts val="374"/>
+              </a:spcBef>
+              <a:buClr>
+                <a:srgbClr val="000000"/>
+              </a:buClr>
+              <a:buFont typeface="Arial"/>
+              <a:buChar char="•"/>
+            </a:pPr>
+            <a:r>
+              <a:rPr lang="de-DE" sz="1500" b="0" u="none" strike="noStrike">
+                <a:solidFill>
+                  <a:schemeClr val="dk1"/>
+                </a:solidFill>
+                <a:effectLst/>
+                <a:uFillTx/>
+                <a:latin typeface="Calibri"/>
+              </a:rPr>
+              <a:t>Dritte Ebene</a:t>
+            </a:r>
+            <a:endParaRPr lang="de-DE" sz="1500" b="0" u="none" strike="noStrike">
+              <a:solidFill>
+                <a:srgbClr val="000000"/>
+              </a:solidFill>
+              <a:effectLst/>
+              <a:uFillTx/>
+              <a:latin typeface="Arial"/>
+            </a:endParaRPr>
+          </a:p>
+          <a:p>
+            <a:pPr marL="1200240" lvl="3" indent="-171360" defTabSz="685800">
+              <a:lnSpc>
+                <a:spcPct val="90000"/>
+              </a:lnSpc>
+              <a:spcBef>
+                <a:spcPts val="374"/>
+              </a:spcBef>
+              <a:buClr>
+                <a:srgbClr val="000000"/>
+              </a:buClr>
+              <a:buFont typeface="Arial"/>
+              <a:buChar char="•"/>
+            </a:pPr>
+            <a:r>
+              <a:rPr lang="de-DE" sz="1350" b="0" u="none" strike="noStrike">
+                <a:solidFill>
+                  <a:schemeClr val="dk1"/>
+                </a:solidFill>
+                <a:effectLst/>
+                <a:uFillTx/>
+                <a:latin typeface="Calibri"/>
+              </a:rPr>
+              <a:t>Vierte Ebene</a:t>
+            </a:r>
+            <a:endParaRPr lang="de-DE" sz="1350" b="0" u="none" strike="noStrike">
+              <a:solidFill>
+                <a:srgbClr val="000000"/>
+              </a:solidFill>
+              <a:effectLst/>
+              <a:uFillTx/>
+              <a:latin typeface="Arial"/>
+            </a:endParaRPr>
+          </a:p>
+          <a:p>
+            <a:pPr marL="1542960" lvl="4" indent="-171360" defTabSz="685800">
+              <a:lnSpc>
+                <a:spcPct val="90000"/>
+              </a:lnSpc>
+              <a:spcBef>
+                <a:spcPts val="374"/>
+              </a:spcBef>
+              <a:buClr>
+                <a:srgbClr val="000000"/>
+              </a:buClr>
+              <a:buFont typeface="Arial"/>
+              <a:buChar char="•"/>
+            </a:pPr>
+            <a:r>
+              <a:rPr lang="de-DE" sz="1350" b="0" u="none" strike="noStrike">
+                <a:solidFill>
+                  <a:schemeClr val="dk1"/>
+                </a:solidFill>
+                <a:effectLst/>
+                <a:uFillTx/>
+                <a:latin typeface="Calibri"/>
+              </a:rPr>
+              <a:t>Fünfte Ebene</a:t>
+            </a:r>
+            <a:endParaRPr lang="de-DE" sz="1350" b="0" u="none" strike="noStrike">
+              <a:solidFill>
+                <a:srgbClr val="000000"/>
+              </a:solidFill>
+              <a:effectLst/>
+              <a:uFillTx/>
+              <a:latin typeface="Arial"/>
+            </a:endParaRPr>
+          </a:p>
+        </p:txBody>
+      </p:sp>
+      <p:sp>
+        <p:nvSpPr>
+          <p:cNvPr id="48" name="PlaceHolder 3"/>
+          <p:cNvSpPr>
+            <a:spLocks noGrp="1"/>
+          </p:cNvSpPr>
+          <p:nvPr>
+            <p:ph type="body"/>
+          </p:nvPr>
+        </p:nvSpPr>
+        <p:spPr>
+          <a:xfrm>
+            <a:off x="3471840" y="2637000"/>
+            <a:ext cx="2912400" cy="6283080"/>
+          </a:xfrm>
+          <a:prstGeom prst="rect">
+            <a:avLst/>
+          </a:prstGeom>
+          <a:noFill/>
+          <a:ln w="0">
+            <a:noFill/>
+          </a:ln>
+        </p:spPr>
+        <p:txBody>
+          <a:bodyPr lIns="91440" rIns="91440" tIns="45720" bIns="45720" anchor="t">
+            <a:noAutofit/>
+          </a:bodyPr>
+          <a:p>
+            <a:pPr marL="171360" indent="-171360" defTabSz="685800">
+              <a:lnSpc>
+                <a:spcPct val="90000"/>
+              </a:lnSpc>
+              <a:spcBef>
+                <a:spcPts val="751"/>
+              </a:spcBef>
+              <a:buClr>
+                <a:srgbClr val="000000"/>
+              </a:buClr>
+              <a:buFont typeface="Arial"/>
+              <a:buChar char="•"/>
+            </a:pPr>
+            <a:r>
+              <a:rPr lang="de-DE" sz="2100" b="0" u="none" strike="noStrike">
+                <a:solidFill>
+                  <a:schemeClr val="dk1"/>
+                </a:solidFill>
+                <a:effectLst/>
+                <a:uFillTx/>
+                <a:latin typeface="Calibri"/>
+              </a:rPr>
+              <a:t>Mastertextformat bearbeiten</a:t>
+            </a:r>
+            <a:endParaRPr lang="de-DE" sz="2100" b="0" u="none" strike="noStrike">
+              <a:solidFill>
+                <a:srgbClr val="000000"/>
+              </a:solidFill>
+              <a:effectLst/>
+              <a:uFillTx/>
+              <a:latin typeface="Arial"/>
+            </a:endParaRPr>
+          </a:p>
+          <a:p>
+            <a:pPr marL="514440" lvl="1" indent="-171360" defTabSz="685800">
+              <a:lnSpc>
+                <a:spcPct val="90000"/>
+              </a:lnSpc>
+              <a:spcBef>
+                <a:spcPts val="374"/>
+              </a:spcBef>
+              <a:buClr>
+                <a:srgbClr val="000000"/>
+              </a:buClr>
+              <a:buFont typeface="Arial"/>
+              <a:buChar char="•"/>
+            </a:pPr>
+            <a:r>
+              <a:rPr lang="de-DE" sz="1800" b="0" u="none" strike="noStrike">
+                <a:solidFill>
+                  <a:schemeClr val="dk1"/>
+                </a:solidFill>
+                <a:effectLst/>
+                <a:uFillTx/>
+                <a:latin typeface="Calibri"/>
+              </a:rPr>
+              <a:t>Zweite Ebene</a:t>
+            </a:r>
+            <a:endParaRPr lang="de-DE" sz="1800" b="0" u="none" strike="noStrike">
+              <a:solidFill>
+                <a:srgbClr val="000000"/>
+              </a:solidFill>
+              <a:effectLst/>
+              <a:uFillTx/>
+              <a:latin typeface="Arial"/>
+            </a:endParaRPr>
+          </a:p>
+          <a:p>
+            <a:pPr marL="857160" lvl="2" indent="-171360" defTabSz="685800">
+              <a:lnSpc>
+                <a:spcPct val="90000"/>
+              </a:lnSpc>
+              <a:spcBef>
+                <a:spcPts val="374"/>
+              </a:spcBef>
+              <a:buClr>
+                <a:srgbClr val="000000"/>
+              </a:buClr>
+              <a:buFont typeface="Arial"/>
+              <a:buChar char="•"/>
+            </a:pPr>
+            <a:r>
+              <a:rPr lang="de-DE" sz="1500" b="0" u="none" strike="noStrike">
+                <a:solidFill>
+                  <a:schemeClr val="dk1"/>
+                </a:solidFill>
+                <a:effectLst/>
+                <a:uFillTx/>
+                <a:latin typeface="Calibri"/>
+              </a:rPr>
+              <a:t>Dritte Ebene</a:t>
+            </a:r>
+            <a:endParaRPr lang="de-DE" sz="1500" b="0" u="none" strike="noStrike">
+              <a:solidFill>
+                <a:srgbClr val="000000"/>
+              </a:solidFill>
+              <a:effectLst/>
+              <a:uFillTx/>
+              <a:latin typeface="Arial"/>
+            </a:endParaRPr>
+          </a:p>
+          <a:p>
+            <a:pPr marL="1200240" lvl="3" indent="-171360" defTabSz="685800">
+              <a:lnSpc>
+                <a:spcPct val="90000"/>
+              </a:lnSpc>
+              <a:spcBef>
+                <a:spcPts val="374"/>
+              </a:spcBef>
+              <a:buClr>
+                <a:srgbClr val="000000"/>
+              </a:buClr>
+              <a:buFont typeface="Arial"/>
+              <a:buChar char="•"/>
+            </a:pPr>
+            <a:r>
+              <a:rPr lang="de-DE" sz="1350" b="0" u="none" strike="noStrike">
+                <a:solidFill>
+                  <a:schemeClr val="dk1"/>
+                </a:solidFill>
+                <a:effectLst/>
+                <a:uFillTx/>
+                <a:latin typeface="Calibri"/>
+              </a:rPr>
+              <a:t>Vierte Ebene</a:t>
+            </a:r>
+            <a:endParaRPr lang="de-DE" sz="1350" b="0" u="none" strike="noStrike">
+              <a:solidFill>
+                <a:srgbClr val="000000"/>
+              </a:solidFill>
+              <a:effectLst/>
+              <a:uFillTx/>
+              <a:latin typeface="Arial"/>
+            </a:endParaRPr>
+          </a:p>
+          <a:p>
+            <a:pPr marL="1542960" lvl="4" indent="-171360" defTabSz="685800">
+              <a:lnSpc>
+                <a:spcPct val="90000"/>
+              </a:lnSpc>
+              <a:spcBef>
+                <a:spcPts val="374"/>
+              </a:spcBef>
+              <a:buClr>
+                <a:srgbClr val="000000"/>
+              </a:buClr>
+              <a:buFont typeface="Arial"/>
+              <a:buChar char="•"/>
+            </a:pPr>
+            <a:r>
+              <a:rPr lang="de-DE" sz="1350" b="0" u="none" strike="noStrike">
+                <a:solidFill>
+                  <a:schemeClr val="dk1"/>
+                </a:solidFill>
+                <a:effectLst/>
+                <a:uFillTx/>
+                <a:latin typeface="Calibri"/>
+              </a:rPr>
+              <a:t>Fünfte Ebene</a:t>
+            </a:r>
+            <a:endParaRPr lang="de-DE" sz="1350" b="0" u="none" strike="noStrike">
+              <a:solidFill>
+                <a:srgbClr val="000000"/>
+              </a:solidFill>
+              <a:effectLst/>
+              <a:uFillTx/>
+              <a:latin typeface="Arial"/>
+            </a:endParaRPr>
+          </a:p>
+        </p:txBody>
+      </p:sp>
+      <p:sp>
+        <p:nvSpPr>
+          <p:cNvPr id="49" name="PlaceHolder 4"/>
+          <p:cNvSpPr>
+            <a:spLocks noGrp="1"/>
+          </p:cNvSpPr>
+          <p:nvPr>
+            <p:ph type="dt" idx="28"/>
+          </p:nvPr>
+        </p:nvSpPr>
+        <p:spPr>
+          <a:xfrm>
+            <a:off x="471600" y="9181440"/>
+            <a:ext cx="1540800" cy="525240"/>
+          </a:xfrm>
+          <a:prstGeom prst="rect">
+            <a:avLst/>
+          </a:prstGeom>
+          <a:noFill/>
+          <a:ln w="0">
+            <a:noFill/>
+          </a:ln>
+        </p:spPr>
+        <p:txBody>
+          <a:bodyPr lIns="91440" rIns="91440" tIns="45720" bIns="45720" anchor="ctr">
+            <a:noAutofit/>
+          </a:bodyPr>
+          <a:lstStyle>
+            <a:lvl1pPr indent="0" defTabSz="457200">
+              <a:lnSpc>
+                <a:spcPct val="100000"/>
+              </a:lnSpc>
+              <a:buNone/>
+              <a:tabLst>
+                <a:tab algn="l" pos="0"/>
+              </a:tabLst>
+              <a:defRPr lang="de-DE" sz="900" b="0" u="none" strike="noStrike">
+                <a:solidFill>
+                  <a:schemeClr val="dk1">
+                    <a:tint val="75000"/>
+                  </a:schemeClr>
+                </a:solidFill>
+                <a:effectLst/>
+                <a:uFillTx/>
+                <a:latin typeface="Calibri"/>
+              </a:defRPr>
+            </a:lvl1pPr>
+          </a:lstStyle>
+          <a:p>
+            <a:pPr indent="0" defTabSz="457200">
+              <a:lnSpc>
+                <a:spcPct val="100000"/>
+              </a:lnSpc>
+              <a:buNone/>
+              <a:tabLst>
+                <a:tab algn="l" pos="0"/>
+              </a:tabLst>
+            </a:pPr>
+            <a:r>
+              <a:rPr lang="de-DE" sz="900" b="0" u="none" strike="noStrike">
+                <a:solidFill>
+                  <a:schemeClr val="dk1">
+                    <a:tint val="75000"/>
+                  </a:schemeClr>
+                </a:solidFill>
+                <a:effectLst/>
+                <a:uFillTx/>
+                <a:latin typeface="Calibri"/>
+              </a:rPr>
+              <a:t>&lt;Datum/Uhrzeit&gt;</a:t>
+            </a:r>
+            <a:endParaRPr lang="de-DE" sz="900" b="0" u="none" strike="noStrike">
+              <a:solidFill>
+                <a:srgbClr val="000000"/>
+              </a:solidFill>
+              <a:effectLst/>
+              <a:uFillTx/>
+              <a:latin typeface="Times New Roman"/>
+            </a:endParaRPr>
+          </a:p>
+        </p:txBody>
+      </p:sp>
+      <p:sp>
+        <p:nvSpPr>
+          <p:cNvPr id="50" name="PlaceHolder 5"/>
+          <p:cNvSpPr>
+            <a:spLocks noGrp="1"/>
+          </p:cNvSpPr>
+          <p:nvPr>
+            <p:ph type="ftr" idx="29"/>
+          </p:nvPr>
+        </p:nvSpPr>
+        <p:spPr>
+          <a:xfrm>
+            <a:off x="2271600" y="9181440"/>
+            <a:ext cx="2312280" cy="525240"/>
+          </a:xfrm>
+          <a:prstGeom prst="rect">
+            <a:avLst/>
+          </a:prstGeom>
+          <a:noFill/>
+          <a:ln w="0">
+            <a:noFill/>
+          </a:ln>
+        </p:spPr>
+        <p:txBody>
+          <a:bodyPr lIns="91440" rIns="91440" tIns="45720" bIns="45720" anchor="ctr">
+            <a:noAutofit/>
+          </a:bodyPr>
+          <a:lstStyle>
+            <a:lvl1pPr indent="0" algn="ctr">
+              <a:lnSpc>
+                <a:spcPct val="100000"/>
+              </a:lnSpc>
+              <a:buNone/>
+              <a:tabLst>
+                <a:tab algn="l" pos="0"/>
+              </a:tabLst>
+              <a:defRPr lang="de-DE" sz="1400" b="0" u="none" strike="noStrike">
+                <a:solidFill>
+                  <a:srgbClr val="000000"/>
+                </a:solidFill>
+                <a:effectLst/>
+                <a:uFillTx/>
+                <a:latin typeface="Times New Roman"/>
+              </a:defRPr>
+            </a:lvl1pPr>
+          </a:lstStyle>
+          <a:p>
+            <a:pPr indent="0" algn="ctr">
+              <a:lnSpc>
+                <a:spcPct val="100000"/>
+              </a:lnSpc>
+              <a:buNone/>
+              <a:tabLst>
+                <a:tab algn="l" pos="0"/>
+              </a:tabLst>
+            </a:pPr>
+            <a:r>
+              <a:rPr lang="de-DE" sz="1400" b="0" u="none" strike="noStrike">
+                <a:solidFill>
+                  <a:srgbClr val="000000"/>
+                </a:solidFill>
+                <a:effectLst/>
+                <a:uFillTx/>
+                <a:latin typeface="Times New Roman"/>
+              </a:rPr>
+              <a:t>&lt;Fußzeile&gt;</a:t>
+            </a:r>
+            <a:endParaRPr lang="de-DE" sz="1400" b="0" u="none" strike="noStrike">
+              <a:solidFill>
+                <a:srgbClr val="000000"/>
+              </a:solidFill>
+              <a:effectLst/>
+              <a:uFillTx/>
+              <a:latin typeface="Times New Roman"/>
+            </a:endParaRPr>
+          </a:p>
+        </p:txBody>
+      </p:sp>
+      <p:sp>
+        <p:nvSpPr>
+          <p:cNvPr id="51" name="PlaceHolder 6"/>
+          <p:cNvSpPr>
+            <a:spLocks noGrp="1"/>
+          </p:cNvSpPr>
+          <p:nvPr>
+            <p:ph type="sldNum" idx="30"/>
+          </p:nvPr>
+        </p:nvSpPr>
+        <p:spPr>
+          <a:xfrm>
+            <a:off x="4843440" y="9181440"/>
+            <a:ext cx="1540800" cy="525240"/>
+          </a:xfrm>
+          <a:prstGeom prst="rect">
+            <a:avLst/>
+          </a:prstGeom>
+          <a:noFill/>
+          <a:ln w="0">
+            <a:noFill/>
+          </a:ln>
+        </p:spPr>
+        <p:txBody>
+          <a:bodyPr lIns="91440" rIns="91440" tIns="45720" bIns="45720" anchor="ctr">
+            <a:noAutofit/>
+          </a:bodyPr>
+          <a:lstStyle>
+            <a:lvl1pPr indent="0" algn="r" defTabSz="457200">
+              <a:lnSpc>
+                <a:spcPct val="100000"/>
+              </a:lnSpc>
+              <a:buNone/>
+              <a:tabLst>
+                <a:tab algn="l" pos="0"/>
+              </a:tabLst>
+              <a:defRPr lang="de-DE" sz="900" b="0" u="none" strike="noStrike">
+                <a:solidFill>
+                  <a:schemeClr val="dk1">
+                    <a:tint val="75000"/>
+                  </a:schemeClr>
+                </a:solidFill>
+                <a:effectLst/>
+                <a:uFillTx/>
+                <a:latin typeface="Calibri"/>
+              </a:defRPr>
+            </a:lvl1pPr>
+          </a:lstStyle>
+          <a:p>
+            <a:pPr indent="0" algn="r" defTabSz="457200">
+              <a:lnSpc>
+                <a:spcPct val="100000"/>
+              </a:lnSpc>
+              <a:buNone/>
+              <a:tabLst>
+                <a:tab algn="l" pos="0"/>
+              </a:tabLst>
+            </a:pPr>
+            <a:fld id="{2A6243B7-B273-4790-AA1F-FE1D65E0FECD}" type="slidenum">
+              <a:rPr lang="de-DE" sz="900" b="0" u="none" strike="noStrike">
+                <a:solidFill>
+                  <a:schemeClr val="dk1">
+                    <a:tint val="75000"/>
+                  </a:schemeClr>
+                </a:solidFill>
+                <a:effectLst/>
+                <a:uFillTx/>
+                <a:latin typeface="Calibri"/>
+              </a:rPr>
+              <a:t>&lt;Foliennummer&gt;</a:t>
+            </a:fld>
+            <a:endParaRPr lang="de-DE" sz="900" b="0" u="none" strike="noStrike">
+              <a:solidFill>
+                <a:srgbClr val="000000"/>
+              </a:solidFill>
+              <a:effectLst/>
+              <a:uFillTx/>
+              <a:latin typeface="Times New Roman"/>
+            </a:endParaRPr>
+          </a:p>
+        </p:txBody>
+      </p:sp>
+    </p:spTree>
+  </p:cSld>
+</p:sldLayout>
+</file>
+
+<file path=ppt/slideLayouts/slideLayout11.xml><?xml version="1.0" encoding="utf-8"?>
+<p:sldLayout xmlns:a="http://schemas.openxmlformats.org/drawingml/2006/main" xmlns:p="http://schemas.openxmlformats.org/presentationml/2006/main" xmlns:r="http://schemas.openxmlformats.org/officeDocument/2006/relationships" xmlns:p14="http://schemas.microsoft.com/office/powerpoint/2010/main" xmlns:p15="http://schemas.microsoft.com/office/powerpoint/2012/main" xmlns:mc="http://schemas.openxmlformats.org/markup-compatibility/2006" type="blank" preserve="1">
+  <p:cSld name="Vergleich">
+    <p:bg>
+      <p:bgPr>
+        <a:solidFill>
+          <a:srgbClr val="ffffff"/>
+        </a:solidFill>
+      </p:bgPr>
+    </p:bg>
+    <p:spTree>
+      <p:nvGrpSpPr>
+        <p:cNvPr id="1" name=""/>
+        <p:cNvGrpSpPr/>
+        <p:nvPr/>
+      </p:nvGrpSpPr>
+      <p:grpSpPr>
+        <a:xfrm>
+          <a:off x="0" y="0"/>
+          <a:ext cx="0" cy="0"/>
+          <a:chOff x="0" y="0"/>
+          <a:chExt cx="0" cy="0"/>
+        </a:xfrm>
+      </p:grpSpPr>
+      <p:sp>
+        <p:nvSpPr>
+          <p:cNvPr id="52" name="PlaceHolder 1"/>
+          <p:cNvSpPr>
+            <a:spLocks noGrp="1"/>
+          </p:cNvSpPr>
+          <p:nvPr>
+            <p:ph type="title"/>
+          </p:nvPr>
+        </p:nvSpPr>
+        <p:spPr>
+          <a:xfrm>
+            <a:off x="472320" y="527400"/>
+            <a:ext cx="5913000" cy="1912680"/>
+          </a:xfrm>
+          <a:prstGeom prst="rect">
+            <a:avLst/>
+          </a:prstGeom>
+          <a:noFill/>
+          <a:ln w="0">
+            <a:noFill/>
+          </a:ln>
+        </p:spPr>
+        <p:txBody>
+          <a:bodyPr lIns="91440" rIns="91440" tIns="45720" bIns="45720" anchor="ctr">
+            <a:noAutofit/>
+          </a:bodyPr>
+          <a:p>
+            <a:pPr indent="0" defTabSz="685800">
+              <a:lnSpc>
+                <a:spcPct val="90000"/>
+              </a:lnSpc>
+              <a:buNone/>
+              <a:tabLst>
+                <a:tab algn="l" pos="0"/>
+              </a:tabLst>
+            </a:pPr>
+            <a:r>
+              <a:rPr lang="de-DE" sz="3300" b="0" u="none" strike="noStrike">
+                <a:solidFill>
+                  <a:schemeClr val="dk1"/>
+                </a:solidFill>
+                <a:effectLst/>
+                <a:uFillTx/>
+                <a:latin typeface="Calibri Light"/>
+              </a:rPr>
+              <a:t>Mastertitelformat bearbeiten</a:t>
+            </a:r>
+            <a:endParaRPr lang="de-DE" sz="3300" b="0" u="none" strike="noStrike">
+              <a:solidFill>
+                <a:srgbClr val="000000"/>
+              </a:solidFill>
+              <a:effectLst/>
+              <a:uFillTx/>
+              <a:latin typeface="Arial"/>
+            </a:endParaRPr>
+          </a:p>
+        </p:txBody>
+      </p:sp>
+      <p:sp>
+        <p:nvSpPr>
+          <p:cNvPr id="53" name="PlaceHolder 2"/>
+          <p:cNvSpPr>
+            <a:spLocks noGrp="1"/>
+          </p:cNvSpPr>
+          <p:nvPr>
+            <p:ph type="body"/>
+          </p:nvPr>
+        </p:nvSpPr>
+        <p:spPr>
+          <a:xfrm>
+            <a:off x="472320" y="2428200"/>
+            <a:ext cx="2899080" cy="1188000"/>
+          </a:xfrm>
+          <a:prstGeom prst="rect">
+            <a:avLst/>
+          </a:prstGeom>
+          <a:noFill/>
+          <a:ln w="0">
+            <a:noFill/>
+          </a:ln>
+        </p:spPr>
+        <p:txBody>
+          <a:bodyPr lIns="91440" rIns="91440" tIns="45720" bIns="45720" anchor="b">
+            <a:noAutofit/>
+          </a:bodyPr>
+          <a:p>
+            <a:pPr indent="0" defTabSz="685800">
+              <a:lnSpc>
+                <a:spcPct val="90000"/>
+              </a:lnSpc>
+              <a:spcBef>
+                <a:spcPts val="751"/>
+              </a:spcBef>
+              <a:buNone/>
+              <a:tabLst>
+                <a:tab algn="l" pos="0"/>
+              </a:tabLst>
+            </a:pPr>
+            <a:r>
+              <a:rPr lang="de-DE" sz="1800" b="1" u="none" strike="noStrike">
+                <a:solidFill>
+                  <a:schemeClr val="dk1"/>
+                </a:solidFill>
+                <a:effectLst/>
+                <a:uFillTx/>
+                <a:latin typeface="Calibri"/>
+              </a:rPr>
+              <a:t>Mastertextformat bearbeiten</a:t>
+            </a:r>
+            <a:endParaRPr lang="de-DE" sz="1800" b="0" u="none" strike="noStrike">
+              <a:solidFill>
+                <a:srgbClr val="000000"/>
+              </a:solidFill>
+              <a:effectLst/>
+              <a:uFillTx/>
+              <a:latin typeface="Arial"/>
+            </a:endParaRPr>
+          </a:p>
+        </p:txBody>
+      </p:sp>
+      <p:sp>
+        <p:nvSpPr>
+          <p:cNvPr id="54" name="PlaceHolder 3"/>
+          <p:cNvSpPr>
+            <a:spLocks noGrp="1"/>
+          </p:cNvSpPr>
+          <p:nvPr>
+            <p:ph type="body"/>
+          </p:nvPr>
+        </p:nvSpPr>
+        <p:spPr>
+          <a:xfrm>
+            <a:off x="472320" y="3618360"/>
+            <a:ext cx="2899080" cy="5320080"/>
+          </a:xfrm>
+          <a:prstGeom prst="rect">
+            <a:avLst/>
+          </a:prstGeom>
+          <a:noFill/>
+          <a:ln w="0">
+            <a:noFill/>
+          </a:ln>
+        </p:spPr>
+        <p:txBody>
+          <a:bodyPr lIns="91440" rIns="91440" tIns="45720" bIns="45720" anchor="t">
+            <a:noAutofit/>
+          </a:bodyPr>
+          <a:p>
+            <a:pPr marL="171360" indent="-171360" defTabSz="685800">
+              <a:lnSpc>
+                <a:spcPct val="90000"/>
+              </a:lnSpc>
+              <a:spcBef>
+                <a:spcPts val="751"/>
+              </a:spcBef>
+              <a:buClr>
+                <a:srgbClr val="000000"/>
+              </a:buClr>
+              <a:buFont typeface="Arial"/>
+              <a:buChar char="•"/>
+            </a:pPr>
+            <a:r>
+              <a:rPr lang="de-DE" sz="2100" b="0" u="none" strike="noStrike">
+                <a:solidFill>
+                  <a:schemeClr val="dk1"/>
+                </a:solidFill>
+                <a:effectLst/>
+                <a:uFillTx/>
+                <a:latin typeface="Calibri"/>
+              </a:rPr>
+              <a:t>Mastertextformat bearbeiten</a:t>
+            </a:r>
+            <a:endParaRPr lang="de-DE" sz="2100" b="0" u="none" strike="noStrike">
+              <a:solidFill>
+                <a:srgbClr val="000000"/>
+              </a:solidFill>
+              <a:effectLst/>
+              <a:uFillTx/>
+              <a:latin typeface="Arial"/>
+            </a:endParaRPr>
+          </a:p>
+          <a:p>
+            <a:pPr marL="514440" lvl="1" indent="-171360" defTabSz="685800">
+              <a:lnSpc>
+                <a:spcPct val="90000"/>
+              </a:lnSpc>
+              <a:spcBef>
+                <a:spcPts val="374"/>
+              </a:spcBef>
+              <a:buClr>
+                <a:srgbClr val="000000"/>
+              </a:buClr>
+              <a:buFont typeface="Arial"/>
+              <a:buChar char="•"/>
+            </a:pPr>
+            <a:r>
+              <a:rPr lang="de-DE" sz="1800" b="0" u="none" strike="noStrike">
+                <a:solidFill>
+                  <a:schemeClr val="dk1"/>
+                </a:solidFill>
+                <a:effectLst/>
+                <a:uFillTx/>
+                <a:latin typeface="Calibri"/>
+              </a:rPr>
+              <a:t>Zweite Ebene</a:t>
+            </a:r>
+            <a:endParaRPr lang="de-DE" sz="1800" b="0" u="none" strike="noStrike">
+              <a:solidFill>
+                <a:srgbClr val="000000"/>
+              </a:solidFill>
+              <a:effectLst/>
+              <a:uFillTx/>
+              <a:latin typeface="Arial"/>
+            </a:endParaRPr>
+          </a:p>
+          <a:p>
+            <a:pPr marL="857160" lvl="2" indent="-171360" defTabSz="685800">
+              <a:lnSpc>
+                <a:spcPct val="90000"/>
+              </a:lnSpc>
+              <a:spcBef>
+                <a:spcPts val="374"/>
+              </a:spcBef>
+              <a:buClr>
+                <a:srgbClr val="000000"/>
+              </a:buClr>
+              <a:buFont typeface="Arial"/>
+              <a:buChar char="•"/>
+            </a:pPr>
+            <a:r>
+              <a:rPr lang="de-DE" sz="1500" b="0" u="none" strike="noStrike">
+                <a:solidFill>
+                  <a:schemeClr val="dk1"/>
+                </a:solidFill>
+                <a:effectLst/>
+                <a:uFillTx/>
+                <a:latin typeface="Calibri"/>
+              </a:rPr>
+              <a:t>Dritte Ebene</a:t>
+            </a:r>
+            <a:endParaRPr lang="de-DE" sz="1500" b="0" u="none" strike="noStrike">
+              <a:solidFill>
+                <a:srgbClr val="000000"/>
+              </a:solidFill>
+              <a:effectLst/>
+              <a:uFillTx/>
+              <a:latin typeface="Arial"/>
+            </a:endParaRPr>
+          </a:p>
+          <a:p>
+            <a:pPr marL="1200240" lvl="3" indent="-171360" defTabSz="685800">
+              <a:lnSpc>
+                <a:spcPct val="90000"/>
+              </a:lnSpc>
+              <a:spcBef>
+                <a:spcPts val="374"/>
+              </a:spcBef>
+              <a:buClr>
+                <a:srgbClr val="000000"/>
+              </a:buClr>
+              <a:buFont typeface="Arial"/>
+              <a:buChar char="•"/>
+            </a:pPr>
+            <a:r>
+              <a:rPr lang="de-DE" sz="1350" b="0" u="none" strike="noStrike">
+                <a:solidFill>
+                  <a:schemeClr val="dk1"/>
+                </a:solidFill>
+                <a:effectLst/>
+                <a:uFillTx/>
+                <a:latin typeface="Calibri"/>
+              </a:rPr>
+              <a:t>Vierte Ebene</a:t>
+            </a:r>
+            <a:endParaRPr lang="de-DE" sz="1350" b="0" u="none" strike="noStrike">
+              <a:solidFill>
+                <a:srgbClr val="000000"/>
+              </a:solidFill>
+              <a:effectLst/>
+              <a:uFillTx/>
+              <a:latin typeface="Arial"/>
+            </a:endParaRPr>
+          </a:p>
+          <a:p>
+            <a:pPr marL="1542960" lvl="4" indent="-171360" defTabSz="685800">
+              <a:lnSpc>
+                <a:spcPct val="90000"/>
+              </a:lnSpc>
+              <a:spcBef>
+                <a:spcPts val="374"/>
+              </a:spcBef>
+              <a:buClr>
+                <a:srgbClr val="000000"/>
+              </a:buClr>
+              <a:buFont typeface="Arial"/>
+              <a:buChar char="•"/>
+            </a:pPr>
+            <a:r>
+              <a:rPr lang="de-DE" sz="1350" b="0" u="none" strike="noStrike">
+                <a:solidFill>
+                  <a:schemeClr val="dk1"/>
+                </a:solidFill>
+                <a:effectLst/>
+                <a:uFillTx/>
+                <a:latin typeface="Calibri"/>
+              </a:rPr>
+              <a:t>Fünfte Ebene</a:t>
+            </a:r>
+            <a:endParaRPr lang="de-DE" sz="1350" b="0" u="none" strike="noStrike">
+              <a:solidFill>
+                <a:srgbClr val="000000"/>
+              </a:solidFill>
+              <a:effectLst/>
+              <a:uFillTx/>
+              <a:latin typeface="Arial"/>
+            </a:endParaRPr>
+          </a:p>
+        </p:txBody>
+      </p:sp>
+      <p:sp>
+        <p:nvSpPr>
+          <p:cNvPr id="55" name="PlaceHolder 4"/>
+          <p:cNvSpPr>
+            <a:spLocks noGrp="1"/>
+          </p:cNvSpPr>
+          <p:nvPr>
+            <p:ph type="body"/>
+          </p:nvPr>
+        </p:nvSpPr>
+        <p:spPr>
+          <a:xfrm>
+            <a:off x="3471840" y="2428200"/>
+            <a:ext cx="2913480" cy="1188000"/>
+          </a:xfrm>
+          <a:prstGeom prst="rect">
+            <a:avLst/>
+          </a:prstGeom>
+          <a:noFill/>
+          <a:ln w="0">
+            <a:noFill/>
+          </a:ln>
+        </p:spPr>
+        <p:txBody>
+          <a:bodyPr lIns="91440" rIns="91440" tIns="45720" bIns="45720" anchor="b">
+            <a:noAutofit/>
+          </a:bodyPr>
+          <a:p>
+            <a:pPr indent="0" defTabSz="685800">
+              <a:lnSpc>
+                <a:spcPct val="90000"/>
+              </a:lnSpc>
+              <a:spcBef>
+                <a:spcPts val="751"/>
+              </a:spcBef>
+              <a:buNone/>
+              <a:tabLst>
+                <a:tab algn="l" pos="0"/>
+              </a:tabLst>
+            </a:pPr>
+            <a:r>
+              <a:rPr lang="de-DE" sz="1800" b="1" u="none" strike="noStrike">
+                <a:solidFill>
+                  <a:schemeClr val="dk1"/>
+                </a:solidFill>
+                <a:effectLst/>
+                <a:uFillTx/>
+                <a:latin typeface="Calibri"/>
+              </a:rPr>
+              <a:t>Mastertextformat bearbeiten</a:t>
+            </a:r>
+            <a:endParaRPr lang="de-DE" sz="1800" b="0" u="none" strike="noStrike">
+              <a:solidFill>
+                <a:srgbClr val="000000"/>
+              </a:solidFill>
+              <a:effectLst/>
+              <a:uFillTx/>
+              <a:latin typeface="Arial"/>
+            </a:endParaRPr>
+          </a:p>
+        </p:txBody>
+      </p:sp>
+      <p:sp>
+        <p:nvSpPr>
+          <p:cNvPr id="56" name="PlaceHolder 5"/>
+          <p:cNvSpPr>
+            <a:spLocks noGrp="1"/>
+          </p:cNvSpPr>
+          <p:nvPr>
+            <p:ph type="body"/>
+          </p:nvPr>
+        </p:nvSpPr>
+        <p:spPr>
+          <a:xfrm>
+            <a:off x="3471840" y="3618360"/>
+            <a:ext cx="2913480" cy="5320080"/>
+          </a:xfrm>
+          <a:prstGeom prst="rect">
+            <a:avLst/>
+          </a:prstGeom>
+          <a:noFill/>
+          <a:ln w="0">
+            <a:noFill/>
+          </a:ln>
+        </p:spPr>
+        <p:txBody>
+          <a:bodyPr lIns="91440" rIns="91440" tIns="45720" bIns="45720" anchor="t">
+            <a:noAutofit/>
+          </a:bodyPr>
+          <a:p>
+            <a:pPr marL="171360" indent="-171360" defTabSz="685800">
+              <a:lnSpc>
+                <a:spcPct val="90000"/>
+              </a:lnSpc>
+              <a:spcBef>
+                <a:spcPts val="751"/>
+              </a:spcBef>
+              <a:buClr>
+                <a:srgbClr val="000000"/>
+              </a:buClr>
+              <a:buFont typeface="Arial"/>
+              <a:buChar char="•"/>
+            </a:pPr>
+            <a:r>
+              <a:rPr lang="de-DE" sz="2100" b="0" u="none" strike="noStrike">
+                <a:solidFill>
+                  <a:schemeClr val="dk1"/>
+                </a:solidFill>
+                <a:effectLst/>
+                <a:uFillTx/>
+                <a:latin typeface="Calibri"/>
+              </a:rPr>
+              <a:t>Mastertextformat bearbeiten</a:t>
+            </a:r>
+            <a:endParaRPr lang="de-DE" sz="2100" b="0" u="none" strike="noStrike">
+              <a:solidFill>
+                <a:srgbClr val="000000"/>
+              </a:solidFill>
+              <a:effectLst/>
+              <a:uFillTx/>
+              <a:latin typeface="Arial"/>
+            </a:endParaRPr>
+          </a:p>
+          <a:p>
+            <a:pPr marL="514440" lvl="1" indent="-171360" defTabSz="685800">
+              <a:lnSpc>
+                <a:spcPct val="90000"/>
+              </a:lnSpc>
+              <a:spcBef>
+                <a:spcPts val="374"/>
+              </a:spcBef>
+              <a:buClr>
+                <a:srgbClr val="000000"/>
+              </a:buClr>
+              <a:buFont typeface="Arial"/>
+              <a:buChar char="•"/>
+            </a:pPr>
+            <a:r>
+              <a:rPr lang="de-DE" sz="1800" b="0" u="none" strike="noStrike">
+                <a:solidFill>
+                  <a:schemeClr val="dk1"/>
+                </a:solidFill>
+                <a:effectLst/>
+                <a:uFillTx/>
+                <a:latin typeface="Calibri"/>
+              </a:rPr>
+              <a:t>Zweite Ebene</a:t>
+            </a:r>
+            <a:endParaRPr lang="de-DE" sz="1800" b="0" u="none" strike="noStrike">
+              <a:solidFill>
+                <a:srgbClr val="000000"/>
+              </a:solidFill>
+              <a:effectLst/>
+              <a:uFillTx/>
+              <a:latin typeface="Arial"/>
+            </a:endParaRPr>
+          </a:p>
+          <a:p>
+            <a:pPr marL="857160" lvl="2" indent="-171360" defTabSz="685800">
+              <a:lnSpc>
+                <a:spcPct val="90000"/>
+              </a:lnSpc>
+              <a:spcBef>
+                <a:spcPts val="374"/>
+              </a:spcBef>
+              <a:buClr>
+                <a:srgbClr val="000000"/>
+              </a:buClr>
+              <a:buFont typeface="Arial"/>
+              <a:buChar char="•"/>
+            </a:pPr>
+            <a:r>
+              <a:rPr lang="de-DE" sz="1500" b="0" u="none" strike="noStrike">
+                <a:solidFill>
+                  <a:schemeClr val="dk1"/>
+                </a:solidFill>
+                <a:effectLst/>
+                <a:uFillTx/>
+                <a:latin typeface="Calibri"/>
+              </a:rPr>
+              <a:t>Dritte Ebene</a:t>
+            </a:r>
+            <a:endParaRPr lang="de-DE" sz="1500" b="0" u="none" strike="noStrike">
+              <a:solidFill>
+                <a:srgbClr val="000000"/>
+              </a:solidFill>
+              <a:effectLst/>
+              <a:uFillTx/>
+              <a:latin typeface="Arial"/>
+            </a:endParaRPr>
+          </a:p>
+          <a:p>
+            <a:pPr marL="1200240" lvl="3" indent="-171360" defTabSz="685800">
+              <a:lnSpc>
+                <a:spcPct val="90000"/>
+              </a:lnSpc>
+              <a:spcBef>
+                <a:spcPts val="374"/>
+              </a:spcBef>
+              <a:buClr>
+                <a:srgbClr val="000000"/>
+              </a:buClr>
+              <a:buFont typeface="Arial"/>
+              <a:buChar char="•"/>
+            </a:pPr>
+            <a:r>
+              <a:rPr lang="de-DE" sz="1350" b="0" u="none" strike="noStrike">
+                <a:solidFill>
+                  <a:schemeClr val="dk1"/>
+                </a:solidFill>
+                <a:effectLst/>
+                <a:uFillTx/>
+                <a:latin typeface="Calibri"/>
+              </a:rPr>
+              <a:t>Vierte Ebene</a:t>
+            </a:r>
+            <a:endParaRPr lang="de-DE" sz="1350" b="0" u="none" strike="noStrike">
+              <a:solidFill>
+                <a:srgbClr val="000000"/>
+              </a:solidFill>
+              <a:effectLst/>
+              <a:uFillTx/>
+              <a:latin typeface="Arial"/>
+            </a:endParaRPr>
+          </a:p>
+          <a:p>
+            <a:pPr marL="1542960" lvl="4" indent="-171360" defTabSz="685800">
+              <a:lnSpc>
+                <a:spcPct val="90000"/>
+              </a:lnSpc>
+              <a:spcBef>
+                <a:spcPts val="374"/>
+              </a:spcBef>
+              <a:buClr>
+                <a:srgbClr val="000000"/>
+              </a:buClr>
+              <a:buFont typeface="Arial"/>
+              <a:buChar char="•"/>
+            </a:pPr>
+            <a:r>
+              <a:rPr lang="de-DE" sz="1350" b="0" u="none" strike="noStrike">
+                <a:solidFill>
+                  <a:schemeClr val="dk1"/>
+                </a:solidFill>
+                <a:effectLst/>
+                <a:uFillTx/>
+                <a:latin typeface="Calibri"/>
+              </a:rPr>
+              <a:t>Fünfte Ebene</a:t>
+            </a:r>
+            <a:endParaRPr lang="de-DE" sz="1350" b="0" u="none" strike="noStrike">
+              <a:solidFill>
+                <a:srgbClr val="000000"/>
+              </a:solidFill>
+              <a:effectLst/>
+              <a:uFillTx/>
+              <a:latin typeface="Arial"/>
+            </a:endParaRPr>
+          </a:p>
+        </p:txBody>
+      </p:sp>
+      <p:sp>
+        <p:nvSpPr>
+          <p:cNvPr id="57" name="PlaceHolder 6"/>
+          <p:cNvSpPr>
+            <a:spLocks noGrp="1"/>
+          </p:cNvSpPr>
+          <p:nvPr>
+            <p:ph type="dt" idx="31"/>
+          </p:nvPr>
+        </p:nvSpPr>
+        <p:spPr>
+          <a:xfrm>
+            <a:off x="471600" y="9181440"/>
+            <a:ext cx="1540800" cy="525240"/>
+          </a:xfrm>
+          <a:prstGeom prst="rect">
+            <a:avLst/>
+          </a:prstGeom>
+          <a:noFill/>
+          <a:ln w="0">
+            <a:noFill/>
+          </a:ln>
+        </p:spPr>
+        <p:txBody>
+          <a:bodyPr lIns="91440" rIns="91440" tIns="45720" bIns="45720" anchor="ctr">
+            <a:noAutofit/>
+          </a:bodyPr>
+          <a:lstStyle>
+            <a:lvl1pPr indent="0" defTabSz="457200">
+              <a:lnSpc>
+                <a:spcPct val="100000"/>
+              </a:lnSpc>
+              <a:buNone/>
+              <a:tabLst>
+                <a:tab algn="l" pos="0"/>
+              </a:tabLst>
+              <a:defRPr lang="de-DE" sz="900" b="0" u="none" strike="noStrike">
+                <a:solidFill>
+                  <a:schemeClr val="dk1">
+                    <a:tint val="75000"/>
+                  </a:schemeClr>
+                </a:solidFill>
+                <a:effectLst/>
+                <a:uFillTx/>
+                <a:latin typeface="Calibri"/>
+              </a:defRPr>
+            </a:lvl1pPr>
+          </a:lstStyle>
+          <a:p>
+            <a:pPr indent="0" defTabSz="457200">
+              <a:lnSpc>
+                <a:spcPct val="100000"/>
+              </a:lnSpc>
+              <a:buNone/>
+              <a:tabLst>
+                <a:tab algn="l" pos="0"/>
+              </a:tabLst>
+            </a:pPr>
+            <a:r>
+              <a:rPr lang="de-DE" sz="900" b="0" u="none" strike="noStrike">
+                <a:solidFill>
+                  <a:schemeClr val="dk1">
+                    <a:tint val="75000"/>
+                  </a:schemeClr>
+                </a:solidFill>
+                <a:effectLst/>
+                <a:uFillTx/>
+                <a:latin typeface="Calibri"/>
+              </a:rPr>
+              <a:t>&lt;Datum/Uhrzeit&gt;</a:t>
+            </a:r>
+            <a:endParaRPr lang="de-DE" sz="900" b="0" u="none" strike="noStrike">
+              <a:solidFill>
+                <a:srgbClr val="000000"/>
+              </a:solidFill>
+              <a:effectLst/>
+              <a:uFillTx/>
+              <a:latin typeface="Times New Roman"/>
+            </a:endParaRPr>
+          </a:p>
+        </p:txBody>
+      </p:sp>
+      <p:sp>
+        <p:nvSpPr>
+          <p:cNvPr id="58" name="PlaceHolder 7"/>
+          <p:cNvSpPr>
+            <a:spLocks noGrp="1"/>
+          </p:cNvSpPr>
+          <p:nvPr>
+            <p:ph type="ftr" idx="32"/>
+          </p:nvPr>
+        </p:nvSpPr>
+        <p:spPr>
+          <a:xfrm>
+            <a:off x="2271600" y="9181440"/>
+            <a:ext cx="2312280" cy="525240"/>
+          </a:xfrm>
+          <a:prstGeom prst="rect">
+            <a:avLst/>
+          </a:prstGeom>
+          <a:noFill/>
+          <a:ln w="0">
+            <a:noFill/>
+          </a:ln>
+        </p:spPr>
+        <p:txBody>
+          <a:bodyPr lIns="91440" rIns="91440" tIns="45720" bIns="45720" anchor="ctr">
+            <a:noAutofit/>
+          </a:bodyPr>
+          <a:lstStyle>
+            <a:lvl1pPr indent="0" algn="ctr">
+              <a:lnSpc>
+                <a:spcPct val="100000"/>
+              </a:lnSpc>
+              <a:buNone/>
+              <a:tabLst>
+                <a:tab algn="l" pos="0"/>
+              </a:tabLst>
+              <a:defRPr lang="de-DE" sz="1400" b="0" u="none" strike="noStrike">
+                <a:solidFill>
+                  <a:srgbClr val="000000"/>
+                </a:solidFill>
+                <a:effectLst/>
+                <a:uFillTx/>
+                <a:latin typeface="Times New Roman"/>
+              </a:defRPr>
+            </a:lvl1pPr>
+          </a:lstStyle>
+          <a:p>
+            <a:pPr indent="0" algn="ctr">
+              <a:lnSpc>
+                <a:spcPct val="100000"/>
+              </a:lnSpc>
+              <a:buNone/>
+              <a:tabLst>
+                <a:tab algn="l" pos="0"/>
+              </a:tabLst>
+            </a:pPr>
+            <a:r>
+              <a:rPr lang="de-DE" sz="1400" b="0" u="none" strike="noStrike">
+                <a:solidFill>
+                  <a:srgbClr val="000000"/>
+                </a:solidFill>
+                <a:effectLst/>
+                <a:uFillTx/>
+                <a:latin typeface="Times New Roman"/>
+              </a:rPr>
+              <a:t>&lt;Fußzeile&gt;</a:t>
+            </a:r>
+            <a:endParaRPr lang="de-DE" sz="1400" b="0" u="none" strike="noStrike">
+              <a:solidFill>
+                <a:srgbClr val="000000"/>
+              </a:solidFill>
+              <a:effectLst/>
+              <a:uFillTx/>
+              <a:latin typeface="Times New Roman"/>
+            </a:endParaRPr>
+          </a:p>
+        </p:txBody>
+      </p:sp>
+      <p:sp>
+        <p:nvSpPr>
+          <p:cNvPr id="59" name="PlaceHolder 8"/>
+          <p:cNvSpPr>
+            <a:spLocks noGrp="1"/>
+          </p:cNvSpPr>
+          <p:nvPr>
+            <p:ph type="sldNum" idx="33"/>
+          </p:nvPr>
+        </p:nvSpPr>
+        <p:spPr>
+          <a:xfrm>
+            <a:off x="4843440" y="9181440"/>
+            <a:ext cx="1540800" cy="525240"/>
+          </a:xfrm>
+          <a:prstGeom prst="rect">
+            <a:avLst/>
+          </a:prstGeom>
+          <a:noFill/>
+          <a:ln w="0">
+            <a:noFill/>
+          </a:ln>
+        </p:spPr>
+        <p:txBody>
+          <a:bodyPr lIns="91440" rIns="91440" tIns="45720" bIns="45720" anchor="ctr">
+            <a:noAutofit/>
+          </a:bodyPr>
+          <a:lstStyle>
+            <a:lvl1pPr indent="0" algn="r" defTabSz="457200">
+              <a:lnSpc>
+                <a:spcPct val="100000"/>
+              </a:lnSpc>
+              <a:buNone/>
+              <a:tabLst>
+                <a:tab algn="l" pos="0"/>
+              </a:tabLst>
+              <a:defRPr lang="de-DE" sz="900" b="0" u="none" strike="noStrike">
+                <a:solidFill>
+                  <a:schemeClr val="dk1">
+                    <a:tint val="75000"/>
+                  </a:schemeClr>
+                </a:solidFill>
+                <a:effectLst/>
+                <a:uFillTx/>
+                <a:latin typeface="Calibri"/>
+              </a:defRPr>
+            </a:lvl1pPr>
+          </a:lstStyle>
+          <a:p>
+            <a:pPr indent="0" algn="r" defTabSz="457200">
+              <a:lnSpc>
+                <a:spcPct val="100000"/>
+              </a:lnSpc>
+              <a:buNone/>
+              <a:tabLst>
+                <a:tab algn="l" pos="0"/>
+              </a:tabLst>
+            </a:pPr>
+            <a:fld id="{A79C41DB-EBF0-47AA-B0E7-A56036FDF4C4}" type="slidenum">
+              <a:rPr lang="de-DE" sz="900" b="0" u="none" strike="noStrike">
+                <a:solidFill>
+                  <a:schemeClr val="dk1">
+                    <a:tint val="75000"/>
+                  </a:schemeClr>
+                </a:solidFill>
+                <a:effectLst/>
+                <a:uFillTx/>
+                <a:latin typeface="Calibri"/>
+              </a:rPr>
+              <a:t>&lt;Foliennummer&gt;</a:t>
+            </a:fld>
+            <a:endParaRPr lang="de-DE" sz="900" b="0" u="none" strike="noStrike">
+              <a:solidFill>
+                <a:srgbClr val="000000"/>
+              </a:solidFill>
+              <a:effectLst/>
+              <a:uFillTx/>
+              <a:latin typeface="Times New Roman"/>
+            </a:endParaRPr>
+          </a:p>
+        </p:txBody>
+      </p:sp>
+    </p:spTree>
+  </p:cSld>
+</p:sldLayout>
+</file>
+
+<file path=ppt/slideLayouts/slideLayout2.xml><?xml version="1.0" encoding="utf-8"?>
+<p:sldLayout xmlns:a="http://schemas.openxmlformats.org/drawingml/2006/main" xmlns:p="http://schemas.openxmlformats.org/presentationml/2006/main" xmlns:r="http://schemas.openxmlformats.org/officeDocument/2006/relationships" xmlns:p14="http://schemas.microsoft.com/office/powerpoint/2010/main" xmlns:p15="http://schemas.microsoft.com/office/powerpoint/2012/main" xmlns:mc="http://schemas.openxmlformats.org/markup-compatibility/2006" type="blank" preserve="1">
+  <p:cSld name="Leer">
+    <p:bg>
+      <p:bgPr>
+        <a:solidFill>
+          <a:srgbClr val="ffffff"/>
+        </a:solidFill>
+      </p:bgPr>
+    </p:bg>
+    <p:spTree>
+      <p:nvGrpSpPr>
+        <p:cNvPr id="1" name=""/>
+        <p:cNvGrpSpPr/>
+        <p:nvPr/>
+      </p:nvGrpSpPr>
+      <p:grpSpPr>
+        <a:xfrm>
+          <a:off x="0" y="0"/>
+          <a:ext cx="0" cy="0"/>
+          <a:chOff x="0" y="0"/>
+          <a:chExt cx="0" cy="0"/>
+        </a:xfrm>
+      </p:grpSpPr>
+      <p:sp>
+        <p:nvSpPr>
+          <p:cNvPr id="6" name="PlaceHolder 1"/>
+          <p:cNvSpPr>
+            <a:spLocks noGrp="1"/>
+          </p:cNvSpPr>
+          <p:nvPr>
+            <p:ph type="dt" idx="4"/>
+          </p:nvPr>
+        </p:nvSpPr>
+        <p:spPr>
+          <a:xfrm>
+            <a:off x="471600" y="9181440"/>
+            <a:ext cx="1540800" cy="525240"/>
+          </a:xfrm>
+          <a:prstGeom prst="rect">
+            <a:avLst/>
+          </a:prstGeom>
+          <a:noFill/>
+          <a:ln w="0">
+            <a:noFill/>
+          </a:ln>
+        </p:spPr>
+        <p:txBody>
+          <a:bodyPr lIns="91440" rIns="91440" tIns="45720" bIns="45720" anchor="ctr">
+            <a:noAutofit/>
+          </a:bodyPr>
+          <a:lstStyle>
+            <a:lvl1pPr indent="0" defTabSz="457200">
+              <a:lnSpc>
+                <a:spcPct val="100000"/>
+              </a:lnSpc>
+              <a:buNone/>
+              <a:tabLst>
+                <a:tab algn="l" pos="0"/>
+              </a:tabLst>
+              <a:defRPr lang="de-DE" sz="900" b="0" u="none" strike="noStrike">
+                <a:solidFill>
+                  <a:schemeClr val="dk1">
+                    <a:tint val="75000"/>
+                  </a:schemeClr>
+                </a:solidFill>
+                <a:effectLst/>
+                <a:uFillTx/>
+                <a:latin typeface="Calibri"/>
+              </a:defRPr>
+            </a:lvl1pPr>
+          </a:lstStyle>
+          <a:p>
+            <a:pPr indent="0" defTabSz="457200">
+              <a:lnSpc>
+                <a:spcPct val="100000"/>
+              </a:lnSpc>
+              <a:buNone/>
+              <a:tabLst>
+                <a:tab algn="l" pos="0"/>
+              </a:tabLst>
+            </a:pPr>
+            <a:r>
+              <a:rPr lang="de-DE" sz="900" b="0" u="none" strike="noStrike">
+                <a:solidFill>
+                  <a:schemeClr val="dk1">
+                    <a:tint val="75000"/>
+                  </a:schemeClr>
+                </a:solidFill>
+                <a:effectLst/>
+                <a:uFillTx/>
+                <a:latin typeface="Calibri"/>
+              </a:rPr>
+              <a:t>&lt;Datum/Uhrzeit&gt;</a:t>
+            </a:r>
+            <a:endParaRPr lang="de-DE" sz="900" b="0" u="none" strike="noStrike">
+              <a:solidFill>
+                <a:srgbClr val="000000"/>
+              </a:solidFill>
+              <a:effectLst/>
+              <a:uFillTx/>
+              <a:latin typeface="Times New Roman"/>
+            </a:endParaRPr>
+          </a:p>
+        </p:txBody>
+      </p:sp>
+      <p:sp>
+        <p:nvSpPr>
+          <p:cNvPr id="7" name="PlaceHolder 2"/>
+          <p:cNvSpPr>
+            <a:spLocks noGrp="1"/>
+          </p:cNvSpPr>
+          <p:nvPr>
+            <p:ph type="ftr" idx="5"/>
+          </p:nvPr>
+        </p:nvSpPr>
+        <p:spPr>
+          <a:xfrm>
+            <a:off x="2271600" y="9181440"/>
+            <a:ext cx="2312280" cy="525240"/>
+          </a:xfrm>
+          <a:prstGeom prst="rect">
+            <a:avLst/>
+          </a:prstGeom>
+          <a:noFill/>
+          <a:ln w="0">
+            <a:noFill/>
+          </a:ln>
+        </p:spPr>
+        <p:txBody>
+          <a:bodyPr lIns="91440" rIns="91440" tIns="45720" bIns="45720" anchor="ctr">
+            <a:noAutofit/>
+          </a:bodyPr>
+          <a:lstStyle>
+            <a:lvl1pPr indent="0" algn="ctr">
+              <a:lnSpc>
+                <a:spcPct val="100000"/>
+              </a:lnSpc>
+              <a:buNone/>
+              <a:tabLst>
+                <a:tab algn="l" pos="0"/>
+              </a:tabLst>
+              <a:defRPr lang="de-DE" sz="1400" b="0" u="none" strike="noStrike">
+                <a:solidFill>
+                  <a:srgbClr val="000000"/>
+                </a:solidFill>
+                <a:effectLst/>
+                <a:uFillTx/>
+                <a:latin typeface="Times New Roman"/>
+              </a:defRPr>
+            </a:lvl1pPr>
+          </a:lstStyle>
+          <a:p>
+            <a:pPr indent="0" algn="ctr">
+              <a:lnSpc>
+                <a:spcPct val="100000"/>
+              </a:lnSpc>
+              <a:buNone/>
+              <a:tabLst>
+                <a:tab algn="l" pos="0"/>
+              </a:tabLst>
+            </a:pPr>
+            <a:r>
+              <a:rPr lang="de-DE" sz="1400" b="0" u="none" strike="noStrike">
+                <a:solidFill>
+                  <a:srgbClr val="000000"/>
+                </a:solidFill>
+                <a:effectLst/>
+                <a:uFillTx/>
+                <a:latin typeface="Times New Roman"/>
+              </a:rPr>
+              <a:t>&lt;Fußzeile&gt;</a:t>
+            </a:r>
+            <a:endParaRPr lang="de-DE" sz="1400" b="0" u="none" strike="noStrike">
+              <a:solidFill>
+                <a:srgbClr val="000000"/>
+              </a:solidFill>
+              <a:effectLst/>
+              <a:uFillTx/>
+              <a:latin typeface="Times New Roman"/>
+            </a:endParaRPr>
+          </a:p>
+        </p:txBody>
+      </p:sp>
+      <p:sp>
+        <p:nvSpPr>
+          <p:cNvPr id="8" name="PlaceHolder 3"/>
+          <p:cNvSpPr>
+            <a:spLocks noGrp="1"/>
+          </p:cNvSpPr>
+          <p:nvPr>
+            <p:ph type="sldNum" idx="6"/>
+          </p:nvPr>
+        </p:nvSpPr>
+        <p:spPr>
+          <a:xfrm>
+            <a:off x="4843440" y="9181440"/>
+            <a:ext cx="1540800" cy="525240"/>
+          </a:xfrm>
+          <a:prstGeom prst="rect">
+            <a:avLst/>
+          </a:prstGeom>
+          <a:noFill/>
+          <a:ln w="0">
+            <a:noFill/>
+          </a:ln>
+        </p:spPr>
+        <p:txBody>
+          <a:bodyPr lIns="91440" rIns="91440" tIns="45720" bIns="45720" anchor="ctr">
+            <a:noAutofit/>
+          </a:bodyPr>
+          <a:lstStyle>
+            <a:lvl1pPr indent="0" algn="r" defTabSz="457200">
+              <a:lnSpc>
+                <a:spcPct val="100000"/>
+              </a:lnSpc>
+              <a:buNone/>
+              <a:tabLst>
+                <a:tab algn="l" pos="0"/>
+              </a:tabLst>
+              <a:defRPr lang="de-DE" sz="900" b="0" u="none" strike="noStrike">
+                <a:solidFill>
+                  <a:schemeClr val="dk1">
+                    <a:tint val="75000"/>
+                  </a:schemeClr>
+                </a:solidFill>
+                <a:effectLst/>
+                <a:uFillTx/>
+                <a:latin typeface="Calibri"/>
+              </a:defRPr>
+            </a:lvl1pPr>
+          </a:lstStyle>
+          <a:p>
+            <a:pPr indent="0" algn="r" defTabSz="457200">
+              <a:lnSpc>
+                <a:spcPct val="100000"/>
+              </a:lnSpc>
+              <a:buNone/>
+              <a:tabLst>
+                <a:tab algn="l" pos="0"/>
+              </a:tabLst>
+            </a:pPr>
+            <a:fld id="{60BE0117-5B5D-41AD-8A35-CD7E0328284B}" type="slidenum">
+              <a:rPr lang="de-DE" sz="900" b="0" u="none" strike="noStrike">
+                <a:solidFill>
+                  <a:schemeClr val="dk1">
+                    <a:tint val="75000"/>
+                  </a:schemeClr>
+                </a:solidFill>
+                <a:effectLst/>
+                <a:uFillTx/>
+                <a:latin typeface="Calibri"/>
+              </a:rPr>
+              <a:t>&lt;Foliennummer&gt;</a:t>
+            </a:fld>
+            <a:endParaRPr lang="de-DE" sz="900" b="0" u="none" strike="noStrike">
+              <a:solidFill>
+                <a:srgbClr val="000000"/>
+              </a:solidFill>
+              <a:effectLst/>
+              <a:uFillTx/>
+              <a:latin typeface="Times New Roman"/>
+            </a:endParaRPr>
+          </a:p>
+        </p:txBody>
+      </p:sp>
+    </p:spTree>
+  </p:cSld>
+</p:sldLayout>
+</file>
+
+<file path=ppt/slideLayouts/slideLayout3.xml><?xml version="1.0" encoding="utf-8"?>
+<p:sldLayout xmlns:a="http://schemas.openxmlformats.org/drawingml/2006/main" xmlns:p="http://schemas.openxmlformats.org/presentationml/2006/main" xmlns:r="http://schemas.openxmlformats.org/officeDocument/2006/relationships" xmlns:p14="http://schemas.microsoft.com/office/powerpoint/2010/main" xmlns:p15="http://schemas.microsoft.com/office/powerpoint/2012/main" xmlns:mc="http://schemas.openxmlformats.org/markup-compatibility/2006" type="blank" preserve="1">
+  <p:cSld name="Inhalt mit Überschrift">
+    <p:bg>
+      <p:bgPr>
+        <a:solidFill>
+          <a:srgbClr val="ffffff"/>
+        </a:solidFill>
+      </p:bgPr>
+    </p:bg>
+    <p:spTree>
+      <p:nvGrpSpPr>
+        <p:cNvPr id="1" name=""/>
+        <p:cNvGrpSpPr/>
+        <p:nvPr/>
+      </p:nvGrpSpPr>
+      <p:grpSpPr>
+        <a:xfrm>
+          <a:off x="0" y="0"/>
+          <a:ext cx="0" cy="0"/>
+          <a:chOff x="0" y="0"/>
+          <a:chExt cx="0" cy="0"/>
+        </a:xfrm>
+      </p:grpSpPr>
+      <p:sp>
+        <p:nvSpPr>
+          <p:cNvPr id="9" name="PlaceHolder 1"/>
+          <p:cNvSpPr>
+            <a:spLocks noGrp="1"/>
+          </p:cNvSpPr>
+          <p:nvPr>
+            <p:ph type="title"/>
+          </p:nvPr>
+        </p:nvSpPr>
+        <p:spPr>
+          <a:xfrm>
+            <a:off x="472320" y="660240"/>
+            <a:ext cx="2209680" cy="2309400"/>
+          </a:xfrm>
+          <a:prstGeom prst="rect">
+            <a:avLst/>
+          </a:prstGeom>
+          <a:noFill/>
+          <a:ln w="0">
+            <a:noFill/>
+          </a:ln>
+        </p:spPr>
+        <p:txBody>
+          <a:bodyPr lIns="91440" rIns="91440" tIns="45720" bIns="45720" anchor="b">
+            <a:noAutofit/>
+          </a:bodyPr>
+          <a:p>
+            <a:pPr indent="0" defTabSz="685800">
+              <a:lnSpc>
+                <a:spcPct val="90000"/>
+              </a:lnSpc>
+              <a:buNone/>
+              <a:tabLst>
+                <a:tab algn="l" pos="0"/>
+              </a:tabLst>
+            </a:pPr>
+            <a:r>
+              <a:rPr lang="de-DE" sz="2400" b="0" u="none" strike="noStrike">
+                <a:solidFill>
+                  <a:schemeClr val="dk1"/>
+                </a:solidFill>
+                <a:effectLst/>
+                <a:uFillTx/>
+                <a:latin typeface="Calibri Light"/>
+              </a:rPr>
+              <a:t>Mastertitelformat bearbeiten</a:t>
+            </a:r>
+            <a:endParaRPr lang="de-DE" sz="2400" b="0" u="none" strike="noStrike">
+              <a:solidFill>
+                <a:srgbClr val="000000"/>
+              </a:solidFill>
+              <a:effectLst/>
+              <a:uFillTx/>
+              <a:latin typeface="Arial"/>
+            </a:endParaRPr>
+          </a:p>
+        </p:txBody>
+      </p:sp>
+      <p:sp>
+        <p:nvSpPr>
+          <p:cNvPr id="10" name="PlaceHolder 2"/>
+          <p:cNvSpPr>
+            <a:spLocks noGrp="1"/>
+          </p:cNvSpPr>
+          <p:nvPr>
+            <p:ph type="body"/>
+          </p:nvPr>
+        </p:nvSpPr>
+        <p:spPr>
+          <a:xfrm>
+            <a:off x="2915640" y="1426320"/>
+            <a:ext cx="3469680" cy="7037640"/>
+          </a:xfrm>
+          <a:prstGeom prst="rect">
+            <a:avLst/>
+          </a:prstGeom>
+          <a:noFill/>
+          <a:ln w="0">
+            <a:noFill/>
+          </a:ln>
+        </p:spPr>
+        <p:txBody>
+          <a:bodyPr lIns="91440" rIns="91440" tIns="45720" bIns="45720" anchor="t">
+            <a:noAutofit/>
+          </a:bodyPr>
+          <a:p>
+            <a:pPr marL="171360" indent="-171360" defTabSz="685800">
+              <a:lnSpc>
+                <a:spcPct val="90000"/>
+              </a:lnSpc>
+              <a:spcBef>
+                <a:spcPts val="751"/>
+              </a:spcBef>
+              <a:buClr>
+                <a:srgbClr val="000000"/>
+              </a:buClr>
+              <a:buFont typeface="Arial"/>
+              <a:buChar char="•"/>
+            </a:pPr>
+            <a:r>
+              <a:rPr lang="de-DE" sz="2400" b="0" u="none" strike="noStrike">
+                <a:solidFill>
+                  <a:schemeClr val="dk1"/>
+                </a:solidFill>
+                <a:effectLst/>
+                <a:uFillTx/>
+                <a:latin typeface="Calibri"/>
+              </a:rPr>
+              <a:t>Mastertextformat bearbeiten</a:t>
+            </a:r>
+            <a:endParaRPr lang="de-DE" sz="2400" b="0" u="none" strike="noStrike">
+              <a:solidFill>
+                <a:srgbClr val="000000"/>
+              </a:solidFill>
+              <a:effectLst/>
+              <a:uFillTx/>
+              <a:latin typeface="Arial"/>
+            </a:endParaRPr>
+          </a:p>
+          <a:p>
+            <a:pPr marL="514440" lvl="1" indent="-171360" defTabSz="685800">
+              <a:lnSpc>
+                <a:spcPct val="90000"/>
+              </a:lnSpc>
+              <a:spcBef>
+                <a:spcPts val="374"/>
+              </a:spcBef>
+              <a:buClr>
+                <a:srgbClr val="000000"/>
+              </a:buClr>
+              <a:buFont typeface="Arial"/>
+              <a:buChar char="•"/>
+            </a:pPr>
+            <a:r>
+              <a:rPr lang="de-DE" sz="2100" b="0" u="none" strike="noStrike">
+                <a:solidFill>
+                  <a:schemeClr val="dk1"/>
+                </a:solidFill>
+                <a:effectLst/>
+                <a:uFillTx/>
+                <a:latin typeface="Calibri"/>
+              </a:rPr>
+              <a:t>Zweite Ebene</a:t>
+            </a:r>
+            <a:endParaRPr lang="de-DE" sz="2100" b="0" u="none" strike="noStrike">
+              <a:solidFill>
+                <a:srgbClr val="000000"/>
+              </a:solidFill>
+              <a:effectLst/>
+              <a:uFillTx/>
+              <a:latin typeface="Arial"/>
+            </a:endParaRPr>
+          </a:p>
+          <a:p>
+            <a:pPr marL="857160" lvl="2" indent="-171360" defTabSz="685800">
+              <a:lnSpc>
+                <a:spcPct val="90000"/>
+              </a:lnSpc>
+              <a:spcBef>
+                <a:spcPts val="374"/>
+              </a:spcBef>
+              <a:buClr>
+                <a:srgbClr val="000000"/>
+              </a:buClr>
+              <a:buFont typeface="Arial"/>
+              <a:buChar char="•"/>
+            </a:pPr>
+            <a:r>
+              <a:rPr lang="de-DE" sz="1800" b="0" u="none" strike="noStrike">
+                <a:solidFill>
+                  <a:schemeClr val="dk1"/>
+                </a:solidFill>
+                <a:effectLst/>
+                <a:uFillTx/>
+                <a:latin typeface="Calibri"/>
+              </a:rPr>
+              <a:t>Dritte Ebene</a:t>
+            </a:r>
+            <a:endParaRPr lang="de-DE" sz="1800" b="0" u="none" strike="noStrike">
+              <a:solidFill>
+                <a:srgbClr val="000000"/>
+              </a:solidFill>
+              <a:effectLst/>
+              <a:uFillTx/>
+              <a:latin typeface="Arial"/>
+            </a:endParaRPr>
+          </a:p>
+          <a:p>
+            <a:pPr marL="1200240" lvl="3" indent="-171360" defTabSz="685800">
+              <a:lnSpc>
+                <a:spcPct val="90000"/>
+              </a:lnSpc>
+              <a:spcBef>
+                <a:spcPts val="374"/>
+              </a:spcBef>
+              <a:buClr>
+                <a:srgbClr val="000000"/>
+              </a:buClr>
+              <a:buFont typeface="Arial"/>
+              <a:buChar char="•"/>
+            </a:pPr>
+            <a:r>
+              <a:rPr lang="de-DE" sz="1500" b="0" u="none" strike="noStrike">
+                <a:solidFill>
+                  <a:schemeClr val="dk1"/>
+                </a:solidFill>
+                <a:effectLst/>
+                <a:uFillTx/>
+                <a:latin typeface="Calibri"/>
+              </a:rPr>
+              <a:t>Vierte Ebene</a:t>
+            </a:r>
+            <a:endParaRPr lang="de-DE" sz="1500" b="0" u="none" strike="noStrike">
+              <a:solidFill>
+                <a:srgbClr val="000000"/>
+              </a:solidFill>
+              <a:effectLst/>
+              <a:uFillTx/>
+              <a:latin typeface="Arial"/>
+            </a:endParaRPr>
+          </a:p>
+          <a:p>
+            <a:pPr marL="1542960" lvl="4" indent="-171360" defTabSz="685800">
+              <a:lnSpc>
+                <a:spcPct val="90000"/>
+              </a:lnSpc>
+              <a:spcBef>
+                <a:spcPts val="374"/>
+              </a:spcBef>
+              <a:buClr>
+                <a:srgbClr val="000000"/>
+              </a:buClr>
+              <a:buFont typeface="Arial"/>
+              <a:buChar char="•"/>
+            </a:pPr>
+            <a:r>
+              <a:rPr lang="de-DE" sz="1500" b="0" u="none" strike="noStrike">
+                <a:solidFill>
+                  <a:schemeClr val="dk1"/>
+                </a:solidFill>
+                <a:effectLst/>
+                <a:uFillTx/>
+                <a:latin typeface="Calibri"/>
+              </a:rPr>
+              <a:t>Fünfte Ebene</a:t>
+            </a:r>
+            <a:endParaRPr lang="de-DE" sz="1500" b="0" u="none" strike="noStrike">
+              <a:solidFill>
+                <a:srgbClr val="000000"/>
+              </a:solidFill>
+              <a:effectLst/>
+              <a:uFillTx/>
+              <a:latin typeface="Arial"/>
+            </a:endParaRPr>
+          </a:p>
+        </p:txBody>
+      </p:sp>
+      <p:sp>
+        <p:nvSpPr>
+          <p:cNvPr id="11" name="PlaceHolder 3"/>
+          <p:cNvSpPr>
+            <a:spLocks noGrp="1"/>
+          </p:cNvSpPr>
+          <p:nvPr>
+            <p:ph type="body"/>
+          </p:nvPr>
+        </p:nvSpPr>
+        <p:spPr>
+          <a:xfrm>
+            <a:off x="472320" y="2971800"/>
+            <a:ext cx="2209680" cy="5503320"/>
+          </a:xfrm>
+          <a:prstGeom prst="rect">
+            <a:avLst/>
+          </a:prstGeom>
+          <a:noFill/>
+          <a:ln w="0">
+            <a:noFill/>
+          </a:ln>
+        </p:spPr>
+        <p:txBody>
+          <a:bodyPr lIns="91440" rIns="91440" tIns="45720" bIns="45720" anchor="t">
+            <a:noAutofit/>
+          </a:bodyPr>
+          <a:p>
+            <a:pPr indent="0" defTabSz="685800">
+              <a:lnSpc>
+                <a:spcPct val="90000"/>
+              </a:lnSpc>
+              <a:spcBef>
+                <a:spcPts val="751"/>
+              </a:spcBef>
+              <a:buNone/>
+              <a:tabLst>
+                <a:tab algn="l" pos="0"/>
+              </a:tabLst>
+            </a:pPr>
+            <a:r>
+              <a:rPr lang="de-DE" sz="1200" b="0" u="none" strike="noStrike">
+                <a:solidFill>
+                  <a:schemeClr val="dk1"/>
+                </a:solidFill>
+                <a:effectLst/>
+                <a:uFillTx/>
+                <a:latin typeface="Calibri"/>
+              </a:rPr>
+              <a:t>Mastertextformat bearbeiten</a:t>
+            </a:r>
+            <a:endParaRPr lang="de-DE" sz="1200" b="0" u="none" strike="noStrike">
+              <a:solidFill>
+                <a:srgbClr val="000000"/>
+              </a:solidFill>
+              <a:effectLst/>
+              <a:uFillTx/>
+              <a:latin typeface="Arial"/>
+            </a:endParaRPr>
+          </a:p>
+        </p:txBody>
+      </p:sp>
+      <p:sp>
+        <p:nvSpPr>
+          <p:cNvPr id="12" name="PlaceHolder 4"/>
+          <p:cNvSpPr>
+            <a:spLocks noGrp="1"/>
+          </p:cNvSpPr>
+          <p:nvPr>
+            <p:ph type="dt" idx="7"/>
+          </p:nvPr>
+        </p:nvSpPr>
+        <p:spPr>
+          <a:xfrm>
+            <a:off x="471600" y="9181440"/>
+            <a:ext cx="1540800" cy="525240"/>
+          </a:xfrm>
+          <a:prstGeom prst="rect">
+            <a:avLst/>
+          </a:prstGeom>
+          <a:noFill/>
+          <a:ln w="0">
+            <a:noFill/>
+          </a:ln>
+        </p:spPr>
+        <p:txBody>
+          <a:bodyPr lIns="91440" rIns="91440" tIns="45720" bIns="45720" anchor="ctr">
+            <a:noAutofit/>
+          </a:bodyPr>
+          <a:lstStyle>
+            <a:lvl1pPr indent="0" defTabSz="457200">
+              <a:lnSpc>
+                <a:spcPct val="100000"/>
+              </a:lnSpc>
+              <a:buNone/>
+              <a:tabLst>
+                <a:tab algn="l" pos="0"/>
+              </a:tabLst>
+              <a:defRPr lang="de-DE" sz="900" b="0" u="none" strike="noStrike">
+                <a:solidFill>
+                  <a:schemeClr val="dk1">
+                    <a:tint val="75000"/>
+                  </a:schemeClr>
+                </a:solidFill>
+                <a:effectLst/>
+                <a:uFillTx/>
+                <a:latin typeface="Calibri"/>
+              </a:defRPr>
+            </a:lvl1pPr>
+          </a:lstStyle>
+          <a:p>
+            <a:pPr indent="0" defTabSz="457200">
+              <a:lnSpc>
+                <a:spcPct val="100000"/>
+              </a:lnSpc>
+              <a:buNone/>
+              <a:tabLst>
+                <a:tab algn="l" pos="0"/>
+              </a:tabLst>
+            </a:pPr>
+            <a:r>
+              <a:rPr lang="de-DE" sz="900" b="0" u="none" strike="noStrike">
+                <a:solidFill>
+                  <a:schemeClr val="dk1">
+                    <a:tint val="75000"/>
+                  </a:schemeClr>
+                </a:solidFill>
+                <a:effectLst/>
+                <a:uFillTx/>
+                <a:latin typeface="Calibri"/>
+              </a:rPr>
+              <a:t>&lt;Datum/Uhrzeit&gt;</a:t>
+            </a:r>
+            <a:endParaRPr lang="de-DE" sz="900" b="0" u="none" strike="noStrike">
+              <a:solidFill>
+                <a:srgbClr val="000000"/>
+              </a:solidFill>
+              <a:effectLst/>
+              <a:uFillTx/>
+              <a:latin typeface="Times New Roman"/>
+            </a:endParaRPr>
+          </a:p>
+        </p:txBody>
+      </p:sp>
+      <p:sp>
+        <p:nvSpPr>
+          <p:cNvPr id="13" name="PlaceHolder 5"/>
+          <p:cNvSpPr>
+            <a:spLocks noGrp="1"/>
+          </p:cNvSpPr>
+          <p:nvPr>
+            <p:ph type="ftr" idx="8"/>
+          </p:nvPr>
+        </p:nvSpPr>
+        <p:spPr>
+          <a:xfrm>
+            <a:off x="2271600" y="9181440"/>
+            <a:ext cx="2312280" cy="525240"/>
+          </a:xfrm>
+          <a:prstGeom prst="rect">
+            <a:avLst/>
+          </a:prstGeom>
+          <a:noFill/>
+          <a:ln w="0">
+            <a:noFill/>
+          </a:ln>
+        </p:spPr>
+        <p:txBody>
+          <a:bodyPr lIns="91440" rIns="91440" tIns="45720" bIns="45720" anchor="ctr">
+            <a:noAutofit/>
+          </a:bodyPr>
+          <a:lstStyle>
+            <a:lvl1pPr indent="0" algn="ctr">
+              <a:lnSpc>
+                <a:spcPct val="100000"/>
+              </a:lnSpc>
+              <a:buNone/>
+              <a:tabLst>
+                <a:tab algn="l" pos="0"/>
+              </a:tabLst>
+              <a:defRPr lang="de-DE" sz="1400" b="0" u="none" strike="noStrike">
+                <a:solidFill>
+                  <a:srgbClr val="000000"/>
+                </a:solidFill>
+                <a:effectLst/>
+                <a:uFillTx/>
+                <a:latin typeface="Times New Roman"/>
+              </a:defRPr>
+            </a:lvl1pPr>
+          </a:lstStyle>
+          <a:p>
+            <a:pPr indent="0" algn="ctr">
+              <a:lnSpc>
+                <a:spcPct val="100000"/>
+              </a:lnSpc>
+              <a:buNone/>
+              <a:tabLst>
+                <a:tab algn="l" pos="0"/>
+              </a:tabLst>
+            </a:pPr>
+            <a:r>
+              <a:rPr lang="de-DE" sz="1400" b="0" u="none" strike="noStrike">
+                <a:solidFill>
+                  <a:srgbClr val="000000"/>
+                </a:solidFill>
+                <a:effectLst/>
+                <a:uFillTx/>
+                <a:latin typeface="Times New Roman"/>
+              </a:rPr>
+              <a:t>&lt;Fußzeile&gt;</a:t>
+            </a:r>
+            <a:endParaRPr lang="de-DE" sz="1400" b="0" u="none" strike="noStrike">
+              <a:solidFill>
+                <a:srgbClr val="000000"/>
+              </a:solidFill>
+              <a:effectLst/>
+              <a:uFillTx/>
+              <a:latin typeface="Times New Roman"/>
+            </a:endParaRPr>
+          </a:p>
+        </p:txBody>
+      </p:sp>
+      <p:sp>
+        <p:nvSpPr>
+          <p:cNvPr id="14" name="PlaceHolder 6"/>
+          <p:cNvSpPr>
+            <a:spLocks noGrp="1"/>
+          </p:cNvSpPr>
+          <p:nvPr>
+            <p:ph type="sldNum" idx="9"/>
+          </p:nvPr>
+        </p:nvSpPr>
+        <p:spPr>
+          <a:xfrm>
+            <a:off x="4843440" y="9181440"/>
+            <a:ext cx="1540800" cy="525240"/>
+          </a:xfrm>
+          <a:prstGeom prst="rect">
+            <a:avLst/>
+          </a:prstGeom>
+          <a:noFill/>
+          <a:ln w="0">
+            <a:noFill/>
+          </a:ln>
+        </p:spPr>
+        <p:txBody>
+          <a:bodyPr lIns="91440" rIns="91440" tIns="45720" bIns="45720" anchor="ctr">
+            <a:noAutofit/>
+          </a:bodyPr>
+          <a:lstStyle>
+            <a:lvl1pPr indent="0" algn="r" defTabSz="457200">
+              <a:lnSpc>
+                <a:spcPct val="100000"/>
+              </a:lnSpc>
+              <a:buNone/>
+              <a:tabLst>
+                <a:tab algn="l" pos="0"/>
+              </a:tabLst>
+              <a:defRPr lang="de-DE" sz="900" b="0" u="none" strike="noStrike">
+                <a:solidFill>
+                  <a:schemeClr val="dk1">
+                    <a:tint val="75000"/>
+                  </a:schemeClr>
+                </a:solidFill>
+                <a:effectLst/>
+                <a:uFillTx/>
+                <a:latin typeface="Calibri"/>
+              </a:defRPr>
+            </a:lvl1pPr>
+          </a:lstStyle>
+          <a:p>
+            <a:pPr indent="0" algn="r" defTabSz="457200">
+              <a:lnSpc>
+                <a:spcPct val="100000"/>
+              </a:lnSpc>
+              <a:buNone/>
+              <a:tabLst>
+                <a:tab algn="l" pos="0"/>
+              </a:tabLst>
+            </a:pPr>
+            <a:fld id="{1F093157-8A86-4F6F-BA16-CE790B9FEF29}" type="slidenum">
+              <a:rPr lang="de-DE" sz="900" b="0" u="none" strike="noStrike">
+                <a:solidFill>
+                  <a:schemeClr val="dk1">
+                    <a:tint val="75000"/>
+                  </a:schemeClr>
+                </a:solidFill>
+                <a:effectLst/>
+                <a:uFillTx/>
+                <a:latin typeface="Calibri"/>
+              </a:rPr>
+              <a:t>&lt;Foliennummer&gt;</a:t>
+            </a:fld>
+            <a:endParaRPr lang="de-DE" sz="900" b="0" u="none" strike="noStrike">
+              <a:solidFill>
+                <a:srgbClr val="000000"/>
+              </a:solidFill>
+              <a:effectLst/>
+              <a:uFillTx/>
+              <a:latin typeface="Times New Roman"/>
+            </a:endParaRPr>
+          </a:p>
+        </p:txBody>
+      </p:sp>
+    </p:spTree>
+  </p:cSld>
+</p:sldLayout>
+</file>
+
+<file path=ppt/slideLayouts/slideLayout4.xml><?xml version="1.0" encoding="utf-8"?>
 <p:sldLayout xmlns:a="http://schemas.openxmlformats.org/drawingml/2006/main" xmlns:p="http://schemas.openxmlformats.org/presentationml/2006/main" xmlns:r="http://schemas.openxmlformats.org/officeDocument/2006/relationships" xmlns:p14="http://schemas.microsoft.com/office/powerpoint/2010/main" xmlns:p15="http://schemas.microsoft.com/office/powerpoint/2012/main" xmlns:mc="http://schemas.openxmlformats.org/markup-compatibility/2006" type="blank" preserve="1">
   <p:cSld name="Bild mit Überschrift">
     <p:bg>
@@ -39,7 +2811,7 @@
       </p:grpSpPr>
       <p:sp>
         <p:nvSpPr>
-          <p:cNvPr id="2" name="PlaceHolder 1"/>
+          <p:cNvPr id="15" name="PlaceHolder 1"/>
           <p:cNvSpPr>
             <a:spLocks noGrp="1"/>
           </p:cNvSpPr>
@@ -50,7 +2822,7 @@
         <p:spPr>
           <a:xfrm>
             <a:off x="472320" y="660240"/>
-            <a:ext cx="2210040" cy="2309760"/>
+            <a:ext cx="2209680" cy="2309400"/>
           </a:xfrm>
           <a:prstGeom prst="rect">
             <a:avLst/>
@@ -98,7 +2870,7 @@
       </p:sp>
       <p:sp>
         <p:nvSpPr>
-          <p:cNvPr id="3" name="PlaceHolder 2"/>
+          <p:cNvPr id="16" name="PlaceHolder 2"/>
           <p:cNvSpPr>
             <a:spLocks noGrp="1"/>
           </p:cNvSpPr>
@@ -109,7 +2881,7 @@
         <p:spPr>
           <a:xfrm>
             <a:off x="2915640" y="1426320"/>
-            <a:ext cx="3470040" cy="7038000"/>
+            <a:ext cx="3469680" cy="7037640"/>
           </a:xfrm>
           <a:prstGeom prst="rect">
             <a:avLst/>
@@ -157,7 +2929,7 @@
       </p:sp>
       <p:sp>
         <p:nvSpPr>
-          <p:cNvPr id="4" name="PlaceHolder 3"/>
+          <p:cNvPr id="17" name="PlaceHolder 3"/>
           <p:cNvSpPr>
             <a:spLocks noGrp="1"/>
           </p:cNvSpPr>
@@ -168,7 +2940,7 @@
         <p:spPr>
           <a:xfrm>
             <a:off x="472320" y="2971800"/>
-            <a:ext cx="2210040" cy="5503680"/>
+            <a:ext cx="2209680" cy="5503320"/>
           </a:xfrm>
           <a:prstGeom prst="rect">
             <a:avLst/>
@@ -219,18 +2991,18 @@
       </p:sp>
       <p:sp>
         <p:nvSpPr>
-          <p:cNvPr id="5" name="PlaceHolder 4"/>
+          <p:cNvPr id="18" name="PlaceHolder 4"/>
           <p:cNvSpPr>
             <a:spLocks noGrp="1"/>
           </p:cNvSpPr>
           <p:nvPr>
-            <p:ph type="dt" idx="1"/>
+            <p:ph type="dt" idx="10"/>
           </p:nvPr>
         </p:nvSpPr>
         <p:spPr>
           <a:xfrm>
             <a:off x="471600" y="9181440"/>
-            <a:ext cx="1541160" cy="525600"/>
+            <a:ext cx="1540800" cy="525240"/>
           </a:xfrm>
           <a:prstGeom prst="rect">
             <a:avLst/>
@@ -301,18 +3073,18 @@
       </p:sp>
       <p:sp>
         <p:nvSpPr>
-          <p:cNvPr id="6" name="PlaceHolder 5"/>
+          <p:cNvPr id="19" name="PlaceHolder 5"/>
           <p:cNvSpPr>
             <a:spLocks noGrp="1"/>
           </p:cNvSpPr>
           <p:nvPr>
-            <p:ph type="ftr" idx="2"/>
+            <p:ph type="ftr" idx="11"/>
           </p:nvPr>
         </p:nvSpPr>
         <p:spPr>
           <a:xfrm>
             <a:off x="2271600" y="9181440"/>
-            <a:ext cx="2312640" cy="525600"/>
+            <a:ext cx="2312280" cy="525240"/>
           </a:xfrm>
           <a:prstGeom prst="rect">
             <a:avLst/>
@@ -379,18 +3151,18 @@
       </p:sp>
       <p:sp>
         <p:nvSpPr>
-          <p:cNvPr id="7" name="PlaceHolder 6"/>
+          <p:cNvPr id="20" name="PlaceHolder 6"/>
           <p:cNvSpPr>
             <a:spLocks noGrp="1"/>
           </p:cNvSpPr>
           <p:nvPr>
-            <p:ph type="sldNum" idx="3"/>
+            <p:ph type="sldNum" idx="12"/>
           </p:nvPr>
         </p:nvSpPr>
         <p:spPr>
           <a:xfrm>
             <a:off x="4843440" y="9181440"/>
-            <a:ext cx="1541160" cy="525600"/>
+            <a:ext cx="1540800" cy="525240"/>
           </a:xfrm>
           <a:prstGeom prst="rect">
             <a:avLst/>
@@ -435,7 +3207,7 @@
                 <a:tab algn="l" pos="0"/>
               </a:tabLst>
             </a:pPr>
-            <a:fld id="{8A1173FD-A535-49D6-8E3B-5D9248C2A8D0}" type="slidenum">
+            <a:fld id="{2F415223-33AF-44CC-8F68-BE759EAE2862}" type="slidenum">
               <a:rPr lang="de-DE" sz="900" b="0" u="none" strike="noStrike">
                 <a:solidFill>
                   <a:schemeClr val="dk1">
@@ -464,869 +3236,7 @@
 </p:sldLayout>
 </file>
 
-<file path=ppt/slideLayouts/slideLayout10.xml><?xml version="1.0" encoding="utf-8"?>
-<p:sldLayout xmlns:a="http://schemas.openxmlformats.org/drawingml/2006/main" xmlns:p="http://schemas.openxmlformats.org/presentationml/2006/main" xmlns:r="http://schemas.openxmlformats.org/officeDocument/2006/relationships" xmlns:p14="http://schemas.microsoft.com/office/powerpoint/2010/main" xmlns:p15="http://schemas.microsoft.com/office/powerpoint/2012/main" xmlns:mc="http://schemas.openxmlformats.org/markup-compatibility/2006" type="blank" preserve="1">
-  <p:cSld name="Leer">
-    <p:bg>
-      <p:bgPr>
-        <a:solidFill>
-          <a:srgbClr val="ffffff"/>
-        </a:solidFill>
-      </p:bgPr>
-    </p:bg>
-    <p:spTree>
-      <p:nvGrpSpPr>
-        <p:cNvPr id="1" name=""/>
-        <p:cNvGrpSpPr/>
-        <p:nvPr/>
-      </p:nvGrpSpPr>
-      <p:grpSpPr>
-        <a:xfrm>
-          <a:off x="0" y="0"/>
-          <a:ext cx="0" cy="0"/>
-          <a:chOff x="0" y="0"/>
-          <a:chExt cx="0" cy="0"/>
-        </a:xfrm>
-      </p:grpSpPr>
-      <p:sp>
-        <p:nvSpPr>
-          <p:cNvPr id="51" name="PlaceHolder 1"/>
-          <p:cNvSpPr>
-            <a:spLocks noGrp="1"/>
-          </p:cNvSpPr>
-          <p:nvPr>
-            <p:ph type="dt" idx="28"/>
-          </p:nvPr>
-        </p:nvSpPr>
-        <p:spPr>
-          <a:xfrm>
-            <a:off x="471600" y="9181440"/>
-            <a:ext cx="1541160" cy="525600"/>
-          </a:xfrm>
-          <a:prstGeom prst="rect">
-            <a:avLst/>
-          </a:prstGeom>
-          <a:noFill/>
-          <a:ln w="0">
-            <a:noFill/>
-          </a:ln>
-        </p:spPr>
-        <p:txBody>
-          <a:bodyPr lIns="91440" rIns="91440" tIns="45720" bIns="45720" anchor="ctr">
-            <a:noAutofit/>
-          </a:bodyPr>
-          <a:lstStyle>
-            <a:lvl1pPr indent="0" defTabSz="457200">
-              <a:lnSpc>
-                <a:spcPct val="100000"/>
-              </a:lnSpc>
-              <a:buNone/>
-              <a:tabLst>
-                <a:tab algn="l" pos="0"/>
-              </a:tabLst>
-              <a:defRPr lang="de-DE" sz="900" b="0" u="none" strike="noStrike">
-                <a:solidFill>
-                  <a:schemeClr val="dk1">
-                    <a:tint val="75000"/>
-                  </a:schemeClr>
-                </a:solidFill>
-                <a:effectLst/>
-                <a:uFillTx/>
-                <a:latin typeface="Calibri"/>
-              </a:defRPr>
-            </a:lvl1pPr>
-          </a:lstStyle>
-          <a:p>
-            <a:pPr indent="0" defTabSz="457200">
-              <a:lnSpc>
-                <a:spcPct val="100000"/>
-              </a:lnSpc>
-              <a:buNone/>
-              <a:tabLst>
-                <a:tab algn="l" pos="0"/>
-              </a:tabLst>
-            </a:pPr>
-            <a:r>
-              <a:rPr lang="de-DE" sz="900" b="0" u="none" strike="noStrike">
-                <a:solidFill>
-                  <a:schemeClr val="dk1">
-                    <a:tint val="75000"/>
-                  </a:schemeClr>
-                </a:solidFill>
-                <a:effectLst/>
-                <a:uFillTx/>
-                <a:latin typeface="Calibri"/>
-              </a:rPr>
-              <a:t>&lt;Datum/Uhrzeit&gt;</a:t>
-            </a:r>
-            <a:endParaRPr lang="de-DE" sz="900" b="0" u="none" strike="noStrike">
-              <a:solidFill>
-                <a:srgbClr val="000000"/>
-              </a:solidFill>
-              <a:effectLst/>
-              <a:uFillTx/>
-              <a:latin typeface="Times New Roman"/>
-            </a:endParaRPr>
-          </a:p>
-        </p:txBody>
-      </p:sp>
-      <p:sp>
-        <p:nvSpPr>
-          <p:cNvPr id="52" name="PlaceHolder 2"/>
-          <p:cNvSpPr>
-            <a:spLocks noGrp="1"/>
-          </p:cNvSpPr>
-          <p:nvPr>
-            <p:ph type="ftr" idx="29"/>
-          </p:nvPr>
-        </p:nvSpPr>
-        <p:spPr>
-          <a:xfrm>
-            <a:off x="2271600" y="9181440"/>
-            <a:ext cx="2312640" cy="525600"/>
-          </a:xfrm>
-          <a:prstGeom prst="rect">
-            <a:avLst/>
-          </a:prstGeom>
-          <a:noFill/>
-          <a:ln w="0">
-            <a:noFill/>
-          </a:ln>
-        </p:spPr>
-        <p:txBody>
-          <a:bodyPr lIns="91440" rIns="91440" tIns="45720" bIns="45720" anchor="ctr">
-            <a:noAutofit/>
-          </a:bodyPr>
-          <a:lstStyle>
-            <a:lvl1pPr indent="0" algn="ctr">
-              <a:lnSpc>
-                <a:spcPct val="100000"/>
-              </a:lnSpc>
-              <a:buNone/>
-              <a:tabLst>
-                <a:tab algn="l" pos="0"/>
-              </a:tabLst>
-              <a:defRPr lang="de-DE" sz="1400" b="0" u="none" strike="noStrike">
-                <a:solidFill>
-                  <a:srgbClr val="000000"/>
-                </a:solidFill>
-                <a:effectLst/>
-                <a:uFillTx/>
-                <a:latin typeface="Times New Roman"/>
-              </a:defRPr>
-            </a:lvl1pPr>
-          </a:lstStyle>
-          <a:p>
-            <a:pPr indent="0" algn="ctr">
-              <a:lnSpc>
-                <a:spcPct val="100000"/>
-              </a:lnSpc>
-              <a:buNone/>
-              <a:tabLst>
-                <a:tab algn="l" pos="0"/>
-              </a:tabLst>
-            </a:pPr>
-            <a:r>
-              <a:rPr lang="de-DE" sz="1400" b="0" u="none" strike="noStrike">
-                <a:solidFill>
-                  <a:srgbClr val="000000"/>
-                </a:solidFill>
-                <a:effectLst/>
-                <a:uFillTx/>
-                <a:latin typeface="Times New Roman"/>
-              </a:rPr>
-              <a:t>&lt;Fußzeile&gt;</a:t>
-            </a:r>
-            <a:endParaRPr lang="de-DE" sz="1400" b="0" u="none" strike="noStrike">
-              <a:solidFill>
-                <a:srgbClr val="000000"/>
-              </a:solidFill>
-              <a:effectLst/>
-              <a:uFillTx/>
-              <a:latin typeface="Times New Roman"/>
-            </a:endParaRPr>
-          </a:p>
-        </p:txBody>
-      </p:sp>
-      <p:sp>
-        <p:nvSpPr>
-          <p:cNvPr id="53" name="PlaceHolder 3"/>
-          <p:cNvSpPr>
-            <a:spLocks noGrp="1"/>
-          </p:cNvSpPr>
-          <p:nvPr>
-            <p:ph type="sldNum" idx="30"/>
-          </p:nvPr>
-        </p:nvSpPr>
-        <p:spPr>
-          <a:xfrm>
-            <a:off x="4843440" y="9181440"/>
-            <a:ext cx="1541160" cy="525600"/>
-          </a:xfrm>
-          <a:prstGeom prst="rect">
-            <a:avLst/>
-          </a:prstGeom>
-          <a:noFill/>
-          <a:ln w="0">
-            <a:noFill/>
-          </a:ln>
-        </p:spPr>
-        <p:txBody>
-          <a:bodyPr lIns="91440" rIns="91440" tIns="45720" bIns="45720" anchor="ctr">
-            <a:noAutofit/>
-          </a:bodyPr>
-          <a:lstStyle>
-            <a:lvl1pPr indent="0" algn="r" defTabSz="457200">
-              <a:lnSpc>
-                <a:spcPct val="100000"/>
-              </a:lnSpc>
-              <a:buNone/>
-              <a:tabLst>
-                <a:tab algn="l" pos="0"/>
-              </a:tabLst>
-              <a:defRPr lang="de-DE" sz="900" b="0" u="none" strike="noStrike">
-                <a:solidFill>
-                  <a:schemeClr val="dk1">
-                    <a:tint val="75000"/>
-                  </a:schemeClr>
-                </a:solidFill>
-                <a:effectLst/>
-                <a:uFillTx/>
-                <a:latin typeface="Calibri"/>
-              </a:defRPr>
-            </a:lvl1pPr>
-          </a:lstStyle>
-          <a:p>
-            <a:pPr indent="0" algn="r" defTabSz="457200">
-              <a:lnSpc>
-                <a:spcPct val="100000"/>
-              </a:lnSpc>
-              <a:buNone/>
-              <a:tabLst>
-                <a:tab algn="l" pos="0"/>
-              </a:tabLst>
-            </a:pPr>
-            <a:fld id="{26241B08-87F7-400E-B172-268304A40D87}" type="slidenum">
-              <a:rPr lang="de-DE" sz="900" b="0" u="none" strike="noStrike">
-                <a:solidFill>
-                  <a:schemeClr val="dk1">
-                    <a:tint val="75000"/>
-                  </a:schemeClr>
-                </a:solidFill>
-                <a:effectLst/>
-                <a:uFillTx/>
-                <a:latin typeface="Calibri"/>
-              </a:rPr>
-              <a:t>&lt;Foliennummer&gt;</a:t>
-            </a:fld>
-            <a:endParaRPr lang="de-DE" sz="900" b="0" u="none" strike="noStrike">
-              <a:solidFill>
-                <a:srgbClr val="000000"/>
-              </a:solidFill>
-              <a:effectLst/>
-              <a:uFillTx/>
-              <a:latin typeface="Times New Roman"/>
-            </a:endParaRPr>
-          </a:p>
-        </p:txBody>
-      </p:sp>
-    </p:spTree>
-  </p:cSld>
-</p:sldLayout>
-</file>
-
-<file path=ppt/slideLayouts/slideLayout11.xml><?xml version="1.0" encoding="utf-8"?>
-<p:sldLayout xmlns:a="http://schemas.openxmlformats.org/drawingml/2006/main" xmlns:p="http://schemas.openxmlformats.org/presentationml/2006/main" xmlns:r="http://schemas.openxmlformats.org/officeDocument/2006/relationships" xmlns:p14="http://schemas.microsoft.com/office/powerpoint/2010/main" xmlns:p15="http://schemas.microsoft.com/office/powerpoint/2012/main" xmlns:mc="http://schemas.openxmlformats.org/markup-compatibility/2006" type="blank" preserve="1">
-  <p:cSld name="Inhalt mit Überschrift">
-    <p:bg>
-      <p:bgPr>
-        <a:solidFill>
-          <a:srgbClr val="ffffff"/>
-        </a:solidFill>
-      </p:bgPr>
-    </p:bg>
-    <p:spTree>
-      <p:nvGrpSpPr>
-        <p:cNvPr id="1" name=""/>
-        <p:cNvGrpSpPr/>
-        <p:nvPr/>
-      </p:nvGrpSpPr>
-      <p:grpSpPr>
-        <a:xfrm>
-          <a:off x="0" y="0"/>
-          <a:ext cx="0" cy="0"/>
-          <a:chOff x="0" y="0"/>
-          <a:chExt cx="0" cy="0"/>
-        </a:xfrm>
-      </p:grpSpPr>
-      <p:sp>
-        <p:nvSpPr>
-          <p:cNvPr id="54" name="PlaceHolder 1"/>
-          <p:cNvSpPr>
-            <a:spLocks noGrp="1"/>
-          </p:cNvSpPr>
-          <p:nvPr>
-            <p:ph type="title"/>
-          </p:nvPr>
-        </p:nvSpPr>
-        <p:spPr>
-          <a:xfrm>
-            <a:off x="472320" y="660240"/>
-            <a:ext cx="2210040" cy="2309760"/>
-          </a:xfrm>
-          <a:prstGeom prst="rect">
-            <a:avLst/>
-          </a:prstGeom>
-          <a:noFill/>
-          <a:ln w="0">
-            <a:noFill/>
-          </a:ln>
-        </p:spPr>
-        <p:txBody>
-          <a:bodyPr lIns="91440" rIns="91440" tIns="45720" bIns="45720" anchor="b">
-            <a:noAutofit/>
-          </a:bodyPr>
-          <a:p>
-            <a:pPr indent="0" defTabSz="685800">
-              <a:lnSpc>
-                <a:spcPct val="90000"/>
-              </a:lnSpc>
-              <a:buNone/>
-              <a:tabLst>
-                <a:tab algn="l" pos="0"/>
-              </a:tabLst>
-            </a:pPr>
-            <a:r>
-              <a:rPr lang="de-DE" sz="2400" b="0" u="none" strike="noStrike">
-                <a:solidFill>
-                  <a:schemeClr val="dk1"/>
-                </a:solidFill>
-                <a:effectLst/>
-                <a:uFillTx/>
-                <a:latin typeface="Calibri Light"/>
-              </a:rPr>
-              <a:t>Mastertitelformat bearbeiten</a:t>
-            </a:r>
-            <a:endParaRPr lang="de-DE" sz="2400" b="0" u="none" strike="noStrike">
-              <a:solidFill>
-                <a:srgbClr val="000000"/>
-              </a:solidFill>
-              <a:effectLst/>
-              <a:uFillTx/>
-              <a:latin typeface="Arial"/>
-            </a:endParaRPr>
-          </a:p>
-        </p:txBody>
-      </p:sp>
-      <p:sp>
-        <p:nvSpPr>
-          <p:cNvPr id="55" name="PlaceHolder 2"/>
-          <p:cNvSpPr>
-            <a:spLocks noGrp="1"/>
-          </p:cNvSpPr>
-          <p:nvPr>
-            <p:ph type="body"/>
-          </p:nvPr>
-        </p:nvSpPr>
-        <p:spPr>
-          <a:xfrm>
-            <a:off x="2915640" y="1426320"/>
-            <a:ext cx="3470040" cy="7038000"/>
-          </a:xfrm>
-          <a:prstGeom prst="rect">
-            <a:avLst/>
-          </a:prstGeom>
-          <a:noFill/>
-          <a:ln w="0">
-            <a:noFill/>
-          </a:ln>
-        </p:spPr>
-        <p:txBody>
-          <a:bodyPr lIns="91440" rIns="91440" tIns="45720" bIns="45720" anchor="t">
-            <a:noAutofit/>
-          </a:bodyPr>
-          <a:p>
-            <a:pPr marL="171360" indent="-171360" defTabSz="685800">
-              <a:lnSpc>
-                <a:spcPct val="90000"/>
-              </a:lnSpc>
-              <a:spcBef>
-                <a:spcPts val="751"/>
-              </a:spcBef>
-              <a:buClr>
-                <a:srgbClr val="000000"/>
-              </a:buClr>
-              <a:buFont typeface="Arial"/>
-              <a:buChar char="•"/>
-            </a:pPr>
-            <a:r>
-              <a:rPr lang="de-DE" sz="2400" b="0" u="none" strike="noStrike">
-                <a:solidFill>
-                  <a:schemeClr val="dk1"/>
-                </a:solidFill>
-                <a:effectLst/>
-                <a:uFillTx/>
-                <a:latin typeface="Calibri"/>
-              </a:rPr>
-              <a:t>Mastertextformat bearbeiten</a:t>
-            </a:r>
-            <a:endParaRPr lang="de-DE" sz="2400" b="0" u="none" strike="noStrike">
-              <a:solidFill>
-                <a:srgbClr val="000000"/>
-              </a:solidFill>
-              <a:effectLst/>
-              <a:uFillTx/>
-              <a:latin typeface="Arial"/>
-            </a:endParaRPr>
-          </a:p>
-          <a:p>
-            <a:pPr marL="514440" lvl="1" indent="-171360" defTabSz="685800">
-              <a:lnSpc>
-                <a:spcPct val="90000"/>
-              </a:lnSpc>
-              <a:spcBef>
-                <a:spcPts val="374"/>
-              </a:spcBef>
-              <a:buClr>
-                <a:srgbClr val="000000"/>
-              </a:buClr>
-              <a:buFont typeface="Arial"/>
-              <a:buChar char="•"/>
-            </a:pPr>
-            <a:r>
-              <a:rPr lang="de-DE" sz="2100" b="0" u="none" strike="noStrike">
-                <a:solidFill>
-                  <a:schemeClr val="dk1"/>
-                </a:solidFill>
-                <a:effectLst/>
-                <a:uFillTx/>
-                <a:latin typeface="Calibri"/>
-              </a:rPr>
-              <a:t>Zweite Ebene</a:t>
-            </a:r>
-            <a:endParaRPr lang="de-DE" sz="2100" b="0" u="none" strike="noStrike">
-              <a:solidFill>
-                <a:srgbClr val="000000"/>
-              </a:solidFill>
-              <a:effectLst/>
-              <a:uFillTx/>
-              <a:latin typeface="Arial"/>
-            </a:endParaRPr>
-          </a:p>
-          <a:p>
-            <a:pPr marL="857160" lvl="2" indent="-171360" defTabSz="685800">
-              <a:lnSpc>
-                <a:spcPct val="90000"/>
-              </a:lnSpc>
-              <a:spcBef>
-                <a:spcPts val="374"/>
-              </a:spcBef>
-              <a:buClr>
-                <a:srgbClr val="000000"/>
-              </a:buClr>
-              <a:buFont typeface="Arial"/>
-              <a:buChar char="•"/>
-            </a:pPr>
-            <a:r>
-              <a:rPr lang="de-DE" sz="1800" b="0" u="none" strike="noStrike">
-                <a:solidFill>
-                  <a:schemeClr val="dk1"/>
-                </a:solidFill>
-                <a:effectLst/>
-                <a:uFillTx/>
-                <a:latin typeface="Calibri"/>
-              </a:rPr>
-              <a:t>Dritte Ebene</a:t>
-            </a:r>
-            <a:endParaRPr lang="de-DE" sz="1800" b="0" u="none" strike="noStrike">
-              <a:solidFill>
-                <a:srgbClr val="000000"/>
-              </a:solidFill>
-              <a:effectLst/>
-              <a:uFillTx/>
-              <a:latin typeface="Arial"/>
-            </a:endParaRPr>
-          </a:p>
-          <a:p>
-            <a:pPr marL="1200240" lvl="3" indent="-171360" defTabSz="685800">
-              <a:lnSpc>
-                <a:spcPct val="90000"/>
-              </a:lnSpc>
-              <a:spcBef>
-                <a:spcPts val="374"/>
-              </a:spcBef>
-              <a:buClr>
-                <a:srgbClr val="000000"/>
-              </a:buClr>
-              <a:buFont typeface="Arial"/>
-              <a:buChar char="•"/>
-            </a:pPr>
-            <a:r>
-              <a:rPr lang="de-DE" sz="1500" b="0" u="none" strike="noStrike">
-                <a:solidFill>
-                  <a:schemeClr val="dk1"/>
-                </a:solidFill>
-                <a:effectLst/>
-                <a:uFillTx/>
-                <a:latin typeface="Calibri"/>
-              </a:rPr>
-              <a:t>Vierte Ebene</a:t>
-            </a:r>
-            <a:endParaRPr lang="de-DE" sz="1500" b="0" u="none" strike="noStrike">
-              <a:solidFill>
-                <a:srgbClr val="000000"/>
-              </a:solidFill>
-              <a:effectLst/>
-              <a:uFillTx/>
-              <a:latin typeface="Arial"/>
-            </a:endParaRPr>
-          </a:p>
-          <a:p>
-            <a:pPr marL="1542960" lvl="4" indent="-171360" defTabSz="685800">
-              <a:lnSpc>
-                <a:spcPct val="90000"/>
-              </a:lnSpc>
-              <a:spcBef>
-                <a:spcPts val="374"/>
-              </a:spcBef>
-              <a:buClr>
-                <a:srgbClr val="000000"/>
-              </a:buClr>
-              <a:buFont typeface="Arial"/>
-              <a:buChar char="•"/>
-            </a:pPr>
-            <a:r>
-              <a:rPr lang="de-DE" sz="1500" b="0" u="none" strike="noStrike">
-                <a:solidFill>
-                  <a:schemeClr val="dk1"/>
-                </a:solidFill>
-                <a:effectLst/>
-                <a:uFillTx/>
-                <a:latin typeface="Calibri"/>
-              </a:rPr>
-              <a:t>Fünfte Ebene</a:t>
-            </a:r>
-            <a:endParaRPr lang="de-DE" sz="1500" b="0" u="none" strike="noStrike">
-              <a:solidFill>
-                <a:srgbClr val="000000"/>
-              </a:solidFill>
-              <a:effectLst/>
-              <a:uFillTx/>
-              <a:latin typeface="Arial"/>
-            </a:endParaRPr>
-          </a:p>
-        </p:txBody>
-      </p:sp>
-      <p:sp>
-        <p:nvSpPr>
-          <p:cNvPr id="56" name="PlaceHolder 3"/>
-          <p:cNvSpPr>
-            <a:spLocks noGrp="1"/>
-          </p:cNvSpPr>
-          <p:nvPr>
-            <p:ph type="body"/>
-          </p:nvPr>
-        </p:nvSpPr>
-        <p:spPr>
-          <a:xfrm>
-            <a:off x="472320" y="2971800"/>
-            <a:ext cx="2210040" cy="5503680"/>
-          </a:xfrm>
-          <a:prstGeom prst="rect">
-            <a:avLst/>
-          </a:prstGeom>
-          <a:noFill/>
-          <a:ln w="0">
-            <a:noFill/>
-          </a:ln>
-        </p:spPr>
-        <p:txBody>
-          <a:bodyPr lIns="91440" rIns="91440" tIns="45720" bIns="45720" anchor="t">
-            <a:noAutofit/>
-          </a:bodyPr>
-          <a:p>
-            <a:pPr indent="0" defTabSz="685800">
-              <a:lnSpc>
-                <a:spcPct val="90000"/>
-              </a:lnSpc>
-              <a:spcBef>
-                <a:spcPts val="751"/>
-              </a:spcBef>
-              <a:buNone/>
-              <a:tabLst>
-                <a:tab algn="l" pos="0"/>
-              </a:tabLst>
-            </a:pPr>
-            <a:r>
-              <a:rPr lang="de-DE" sz="1200" b="0" u="none" strike="noStrike">
-                <a:solidFill>
-                  <a:schemeClr val="dk1"/>
-                </a:solidFill>
-                <a:effectLst/>
-                <a:uFillTx/>
-                <a:latin typeface="Calibri"/>
-              </a:rPr>
-              <a:t>Mastertextformat bearbeiten</a:t>
-            </a:r>
-            <a:endParaRPr lang="de-DE" sz="1200" b="0" u="none" strike="noStrike">
-              <a:solidFill>
-                <a:srgbClr val="000000"/>
-              </a:solidFill>
-              <a:effectLst/>
-              <a:uFillTx/>
-              <a:latin typeface="Arial"/>
-            </a:endParaRPr>
-          </a:p>
-        </p:txBody>
-      </p:sp>
-      <p:sp>
-        <p:nvSpPr>
-          <p:cNvPr id="57" name="PlaceHolder 4"/>
-          <p:cNvSpPr>
-            <a:spLocks noGrp="1"/>
-          </p:cNvSpPr>
-          <p:nvPr>
-            <p:ph type="dt" idx="31"/>
-          </p:nvPr>
-        </p:nvSpPr>
-        <p:spPr>
-          <a:xfrm>
-            <a:off x="471600" y="9181440"/>
-            <a:ext cx="1541160" cy="525600"/>
-          </a:xfrm>
-          <a:prstGeom prst="rect">
-            <a:avLst/>
-          </a:prstGeom>
-          <a:noFill/>
-          <a:ln w="0">
-            <a:noFill/>
-          </a:ln>
-        </p:spPr>
-        <p:txBody>
-          <a:bodyPr lIns="91440" rIns="91440" tIns="45720" bIns="45720" anchor="ctr">
-            <a:noAutofit/>
-          </a:bodyPr>
-          <a:lstStyle>
-            <a:lvl1pPr indent="0" defTabSz="457200">
-              <a:lnSpc>
-                <a:spcPct val="100000"/>
-              </a:lnSpc>
-              <a:buNone/>
-              <a:tabLst>
-                <a:tab algn="l" pos="0"/>
-              </a:tabLst>
-              <a:defRPr lang="de-DE" sz="900" b="0" u="none" strike="noStrike">
-                <a:solidFill>
-                  <a:schemeClr val="dk1">
-                    <a:tint val="75000"/>
-                  </a:schemeClr>
-                </a:solidFill>
-                <a:effectLst/>
-                <a:uFillTx/>
-                <a:latin typeface="Calibri"/>
-              </a:defRPr>
-            </a:lvl1pPr>
-          </a:lstStyle>
-          <a:p>
-            <a:pPr indent="0" defTabSz="457200">
-              <a:lnSpc>
-                <a:spcPct val="100000"/>
-              </a:lnSpc>
-              <a:buNone/>
-              <a:tabLst>
-                <a:tab algn="l" pos="0"/>
-              </a:tabLst>
-            </a:pPr>
-            <a:r>
-              <a:rPr lang="de-DE" sz="900" b="0" u="none" strike="noStrike">
-                <a:solidFill>
-                  <a:schemeClr val="dk1">
-                    <a:tint val="75000"/>
-                  </a:schemeClr>
-                </a:solidFill>
-                <a:effectLst/>
-                <a:uFillTx/>
-                <a:latin typeface="Calibri"/>
-              </a:rPr>
-              <a:t>&lt;Datum/Uhrzeit&gt;</a:t>
-            </a:r>
-            <a:endParaRPr lang="de-DE" sz="900" b="0" u="none" strike="noStrike">
-              <a:solidFill>
-                <a:srgbClr val="000000"/>
-              </a:solidFill>
-              <a:effectLst/>
-              <a:uFillTx/>
-              <a:latin typeface="Times New Roman"/>
-            </a:endParaRPr>
-          </a:p>
-        </p:txBody>
-      </p:sp>
-      <p:sp>
-        <p:nvSpPr>
-          <p:cNvPr id="58" name="PlaceHolder 5"/>
-          <p:cNvSpPr>
-            <a:spLocks noGrp="1"/>
-          </p:cNvSpPr>
-          <p:nvPr>
-            <p:ph type="ftr" idx="32"/>
-          </p:nvPr>
-        </p:nvSpPr>
-        <p:spPr>
-          <a:xfrm>
-            <a:off x="2271600" y="9181440"/>
-            <a:ext cx="2312640" cy="525600"/>
-          </a:xfrm>
-          <a:prstGeom prst="rect">
-            <a:avLst/>
-          </a:prstGeom>
-          <a:noFill/>
-          <a:ln w="0">
-            <a:noFill/>
-          </a:ln>
-        </p:spPr>
-        <p:txBody>
-          <a:bodyPr lIns="91440" rIns="91440" tIns="45720" bIns="45720" anchor="ctr">
-            <a:noAutofit/>
-          </a:bodyPr>
-          <a:lstStyle>
-            <a:lvl1pPr indent="0" algn="ctr">
-              <a:lnSpc>
-                <a:spcPct val="100000"/>
-              </a:lnSpc>
-              <a:buNone/>
-              <a:tabLst>
-                <a:tab algn="l" pos="0"/>
-              </a:tabLst>
-              <a:defRPr lang="de-DE" sz="1400" b="0" u="none" strike="noStrike">
-                <a:solidFill>
-                  <a:srgbClr val="000000"/>
-                </a:solidFill>
-                <a:effectLst/>
-                <a:uFillTx/>
-                <a:latin typeface="Times New Roman"/>
-              </a:defRPr>
-            </a:lvl1pPr>
-          </a:lstStyle>
-          <a:p>
-            <a:pPr indent="0" algn="ctr">
-              <a:lnSpc>
-                <a:spcPct val="100000"/>
-              </a:lnSpc>
-              <a:buNone/>
-              <a:tabLst>
-                <a:tab algn="l" pos="0"/>
-              </a:tabLst>
-            </a:pPr>
-            <a:r>
-              <a:rPr lang="de-DE" sz="1400" b="0" u="none" strike="noStrike">
-                <a:solidFill>
-                  <a:srgbClr val="000000"/>
-                </a:solidFill>
-                <a:effectLst/>
-                <a:uFillTx/>
-                <a:latin typeface="Times New Roman"/>
-              </a:rPr>
-              <a:t>&lt;Fußzeile&gt;</a:t>
-            </a:r>
-            <a:endParaRPr lang="de-DE" sz="1400" b="0" u="none" strike="noStrike">
-              <a:solidFill>
-                <a:srgbClr val="000000"/>
-              </a:solidFill>
-              <a:effectLst/>
-              <a:uFillTx/>
-              <a:latin typeface="Times New Roman"/>
-            </a:endParaRPr>
-          </a:p>
-        </p:txBody>
-      </p:sp>
-      <p:sp>
-        <p:nvSpPr>
-          <p:cNvPr id="59" name="PlaceHolder 6"/>
-          <p:cNvSpPr>
-            <a:spLocks noGrp="1"/>
-          </p:cNvSpPr>
-          <p:nvPr>
-            <p:ph type="sldNum" idx="33"/>
-          </p:nvPr>
-        </p:nvSpPr>
-        <p:spPr>
-          <a:xfrm>
-            <a:off x="4843440" y="9181440"/>
-            <a:ext cx="1541160" cy="525600"/>
-          </a:xfrm>
-          <a:prstGeom prst="rect">
-            <a:avLst/>
-          </a:prstGeom>
-          <a:noFill/>
-          <a:ln w="0">
-            <a:noFill/>
-          </a:ln>
-        </p:spPr>
-        <p:txBody>
-          <a:bodyPr lIns="91440" rIns="91440" tIns="45720" bIns="45720" anchor="ctr">
-            <a:noAutofit/>
-          </a:bodyPr>
-          <a:lstStyle>
-            <a:lvl1pPr indent="0" algn="r" defTabSz="457200">
-              <a:lnSpc>
-                <a:spcPct val="100000"/>
-              </a:lnSpc>
-              <a:buNone/>
-              <a:tabLst>
-                <a:tab algn="l" pos="0"/>
-              </a:tabLst>
-              <a:defRPr lang="de-DE" sz="900" b="0" u="none" strike="noStrike">
-                <a:solidFill>
-                  <a:schemeClr val="dk1">
-                    <a:tint val="75000"/>
-                  </a:schemeClr>
-                </a:solidFill>
-                <a:effectLst/>
-                <a:uFillTx/>
-                <a:latin typeface="Calibri"/>
-              </a:defRPr>
-            </a:lvl1pPr>
-          </a:lstStyle>
-          <a:p>
-            <a:pPr indent="0" algn="r" defTabSz="457200">
-              <a:lnSpc>
-                <a:spcPct val="100000"/>
-              </a:lnSpc>
-              <a:buNone/>
-              <a:tabLst>
-                <a:tab algn="l" pos="0"/>
-              </a:tabLst>
-            </a:pPr>
-            <a:fld id="{219E7501-F317-46B5-8E8E-A724AA008CBE}" type="slidenum">
-              <a:rPr lang="de-DE" sz="900" b="0" u="none" strike="noStrike">
-                <a:solidFill>
-                  <a:schemeClr val="dk1">
-                    <a:tint val="75000"/>
-                  </a:schemeClr>
-                </a:solidFill>
-                <a:effectLst/>
-                <a:uFillTx/>
-                <a:latin typeface="Calibri"/>
-              </a:rPr>
-              <a:t>&lt;Foliennummer&gt;</a:t>
-            </a:fld>
-            <a:endParaRPr lang="de-DE" sz="900" b="0" u="none" strike="noStrike">
-              <a:solidFill>
-                <a:srgbClr val="000000"/>
-              </a:solidFill>
-              <a:effectLst/>
-              <a:uFillTx/>
-              <a:latin typeface="Times New Roman"/>
-            </a:endParaRPr>
-          </a:p>
-        </p:txBody>
-      </p:sp>
-    </p:spTree>
-  </p:cSld>
-</p:sldLayout>
-</file>
-
-<file path=ppt/slideLayouts/slideLayout2.xml><?xml version="1.0" encoding="utf-8"?>
+<file path=ppt/slideLayouts/slideLayout5.xml><?xml version="1.0" encoding="utf-8"?>
 <p:sldLayout xmlns:a="http://schemas.openxmlformats.org/drawingml/2006/main" xmlns:p="http://schemas.openxmlformats.org/presentationml/2006/main" xmlns:r="http://schemas.openxmlformats.org/officeDocument/2006/relationships" xmlns:p14="http://schemas.microsoft.com/office/powerpoint/2010/main" xmlns:p15="http://schemas.microsoft.com/office/powerpoint/2012/main" xmlns:mc="http://schemas.openxmlformats.org/markup-compatibility/2006" type="title" preserve="1">
   <p:cSld name="Titelfolie">
     <p:bg>
@@ -1352,7 +3262,7 @@
       </p:grpSpPr>
       <p:sp>
         <p:nvSpPr>
-          <p:cNvPr id="8" name="PlaceHolder 1"/>
+          <p:cNvPr id="21" name="PlaceHolder 1"/>
           <p:cNvSpPr>
             <a:spLocks noGrp="1"/>
           </p:cNvSpPr>
@@ -1363,7 +3273,7 @@
         <p:spPr>
           <a:xfrm>
             <a:off x="514440" y="1621080"/>
-            <a:ext cx="5827680" cy="3447000"/>
+            <a:ext cx="5827320" cy="3446640"/>
           </a:xfrm>
           <a:prstGeom prst="rect">
             <a:avLst/>
@@ -1411,18 +3321,18 @@
       </p:sp>
       <p:sp>
         <p:nvSpPr>
-          <p:cNvPr id="9" name="PlaceHolder 2"/>
+          <p:cNvPr id="22" name="PlaceHolder 2"/>
           <p:cNvSpPr>
             <a:spLocks noGrp="1"/>
           </p:cNvSpPr>
           <p:nvPr>
-            <p:ph type="dt" idx="4"/>
+            <p:ph type="dt" idx="13"/>
           </p:nvPr>
         </p:nvSpPr>
         <p:spPr>
           <a:xfrm>
             <a:off x="471600" y="9181440"/>
-            <a:ext cx="1541160" cy="525600"/>
+            <a:ext cx="1540800" cy="525240"/>
           </a:xfrm>
           <a:prstGeom prst="rect">
             <a:avLst/>
@@ -1493,18 +3403,18 @@
       </p:sp>
       <p:sp>
         <p:nvSpPr>
-          <p:cNvPr id="10" name="PlaceHolder 3"/>
+          <p:cNvPr id="23" name="PlaceHolder 3"/>
           <p:cNvSpPr>
             <a:spLocks noGrp="1"/>
           </p:cNvSpPr>
           <p:nvPr>
-            <p:ph type="ftr" idx="5"/>
+            <p:ph type="ftr" idx="14"/>
           </p:nvPr>
         </p:nvSpPr>
         <p:spPr>
           <a:xfrm>
             <a:off x="2271600" y="9181440"/>
-            <a:ext cx="2312640" cy="525600"/>
+            <a:ext cx="2312280" cy="525240"/>
           </a:xfrm>
           <a:prstGeom prst="rect">
             <a:avLst/>
@@ -1571,18 +3481,18 @@
       </p:sp>
       <p:sp>
         <p:nvSpPr>
-          <p:cNvPr id="11" name="PlaceHolder 4"/>
+          <p:cNvPr id="24" name="PlaceHolder 4"/>
           <p:cNvSpPr>
             <a:spLocks noGrp="1"/>
           </p:cNvSpPr>
           <p:nvPr>
-            <p:ph type="sldNum" idx="6"/>
+            <p:ph type="sldNum" idx="15"/>
           </p:nvPr>
         </p:nvSpPr>
         <p:spPr>
           <a:xfrm>
             <a:off x="4843440" y="9181440"/>
-            <a:ext cx="1541160" cy="525600"/>
+            <a:ext cx="1540800" cy="525240"/>
           </a:xfrm>
           <a:prstGeom prst="rect">
             <a:avLst/>
@@ -1627,7 +3537,7 @@
                 <a:tab algn="l" pos="0"/>
               </a:tabLst>
             </a:pPr>
-            <a:fld id="{556600C4-58E8-4AB2-9716-1C5EBD32EDD3}" type="slidenum">
+            <a:fld id="{4E57C8C1-C588-424D-8650-F49808089835}" type="slidenum">
               <a:rPr lang="de-DE" sz="900" b="0" u="none" strike="noStrike">
                 <a:solidFill>
                   <a:schemeClr val="dk1">
@@ -1653,7 +3563,7 @@
       </p:sp>
       <p:sp>
         <p:nvSpPr>
-          <p:cNvPr id="12" name="PlaceHolder 5"/>
+          <p:cNvPr id="25" name="PlaceHolder 5"/>
           <p:cNvSpPr>
             <a:spLocks noGrp="1"/>
           </p:cNvSpPr>
@@ -1664,7 +3574,7 @@
         <p:spPr>
           <a:xfrm>
             <a:off x="342720" y="2317680"/>
-            <a:ext cx="6170400" cy="5743440"/>
+            <a:ext cx="6170040" cy="5743080"/>
           </a:xfrm>
           <a:prstGeom prst="rect">
             <a:avLst/>
@@ -1930,7 +3840,7 @@
 </p:sldLayout>
 </file>
 
-<file path=ppt/slideLayouts/slideLayout3.xml><?xml version="1.0" encoding="utf-8"?>
+<file path=ppt/slideLayouts/slideLayout6.xml><?xml version="1.0" encoding="utf-8"?>
 <p:sldLayout xmlns:a="http://schemas.openxmlformats.org/drawingml/2006/main" xmlns:p="http://schemas.openxmlformats.org/presentationml/2006/main" xmlns:r="http://schemas.openxmlformats.org/officeDocument/2006/relationships" xmlns:p14="http://schemas.microsoft.com/office/powerpoint/2010/main" xmlns:p15="http://schemas.microsoft.com/office/powerpoint/2012/main" xmlns:mc="http://schemas.openxmlformats.org/markup-compatibility/2006" type="vertTx" preserve="1">
   <p:cSld name="Titel und vertikaler Text">
     <p:bg>
@@ -1956,7 +3866,7 @@
       </p:grpSpPr>
       <p:sp>
         <p:nvSpPr>
-          <p:cNvPr id="13" name="PlaceHolder 1"/>
+          <p:cNvPr id="26" name="PlaceHolder 1"/>
           <p:cNvSpPr>
             <a:spLocks noGrp="1"/>
           </p:cNvSpPr>
@@ -1967,7 +3877,7 @@
         <p:spPr>
           <a:xfrm>
             <a:off x="471600" y="527400"/>
-            <a:ext cx="5913360" cy="1913040"/>
+            <a:ext cx="5913000" cy="1912680"/>
           </a:xfrm>
           <a:prstGeom prst="rect">
             <a:avLst/>
@@ -2015,7 +3925,7 @@
       </p:sp>
       <p:sp>
         <p:nvSpPr>
-          <p:cNvPr id="14" name="PlaceHolder 2"/>
+          <p:cNvPr id="27" name="PlaceHolder 2"/>
           <p:cNvSpPr>
             <a:spLocks noGrp="1"/>
           </p:cNvSpPr>
@@ -2026,7 +3936,7 @@
         <p:spPr>
           <a:xfrm>
             <a:off x="471600" y="2637000"/>
-            <a:ext cx="5913360" cy="6283440"/>
+            <a:ext cx="5913000" cy="6283080"/>
           </a:xfrm>
           <a:prstGeom prst="rect">
             <a:avLst/>
@@ -2214,18 +4124,18 @@
       </p:sp>
       <p:sp>
         <p:nvSpPr>
-          <p:cNvPr id="15" name="PlaceHolder 3"/>
+          <p:cNvPr id="28" name="PlaceHolder 3"/>
           <p:cNvSpPr>
             <a:spLocks noGrp="1"/>
           </p:cNvSpPr>
           <p:nvPr>
-            <p:ph type="dt" idx="7"/>
+            <p:ph type="dt" idx="16"/>
           </p:nvPr>
         </p:nvSpPr>
         <p:spPr>
           <a:xfrm>
             <a:off x="471600" y="9181440"/>
-            <a:ext cx="1541160" cy="525600"/>
+            <a:ext cx="1540800" cy="525240"/>
           </a:xfrm>
           <a:prstGeom prst="rect">
             <a:avLst/>
@@ -2296,18 +4206,18 @@
       </p:sp>
       <p:sp>
         <p:nvSpPr>
-          <p:cNvPr id="16" name="PlaceHolder 4"/>
+          <p:cNvPr id="29" name="PlaceHolder 4"/>
           <p:cNvSpPr>
             <a:spLocks noGrp="1"/>
           </p:cNvSpPr>
           <p:nvPr>
-            <p:ph type="ftr" idx="8"/>
+            <p:ph type="ftr" idx="17"/>
           </p:nvPr>
         </p:nvSpPr>
         <p:spPr>
           <a:xfrm>
             <a:off x="2271600" y="9181440"/>
-            <a:ext cx="2312640" cy="525600"/>
+            <a:ext cx="2312280" cy="525240"/>
           </a:xfrm>
           <a:prstGeom prst="rect">
             <a:avLst/>
@@ -2374,18 +4284,18 @@
       </p:sp>
       <p:sp>
         <p:nvSpPr>
-          <p:cNvPr id="17" name="PlaceHolder 5"/>
+          <p:cNvPr id="30" name="PlaceHolder 5"/>
           <p:cNvSpPr>
             <a:spLocks noGrp="1"/>
           </p:cNvSpPr>
           <p:nvPr>
-            <p:ph type="sldNum" idx="9"/>
+            <p:ph type="sldNum" idx="18"/>
           </p:nvPr>
         </p:nvSpPr>
         <p:spPr>
           <a:xfrm>
             <a:off x="4843440" y="9181440"/>
-            <a:ext cx="1541160" cy="525600"/>
+            <a:ext cx="1540800" cy="525240"/>
           </a:xfrm>
           <a:prstGeom prst="rect">
             <a:avLst/>
@@ -2430,7 +4340,7 @@
                 <a:tab algn="l" pos="0"/>
               </a:tabLst>
             </a:pPr>
-            <a:fld id="{A9BC3CDA-A4F7-488A-972E-9E34376A6C11}" type="slidenum">
+            <a:fld id="{535C9C9E-6DA4-47C1-BBC1-C9B23404D628}" type="slidenum">
               <a:rPr lang="de-DE" sz="900" b="0" u="none" strike="noStrike">
                 <a:solidFill>
                   <a:schemeClr val="dk1">
@@ -2459,7 +4369,7 @@
 </p:sldLayout>
 </file>
 
-<file path=ppt/slideLayouts/slideLayout4.xml><?xml version="1.0" encoding="utf-8"?>
+<file path=ppt/slideLayouts/slideLayout7.xml><?xml version="1.0" encoding="utf-8"?>
 <p:sldLayout xmlns:a="http://schemas.openxmlformats.org/drawingml/2006/main" xmlns:p="http://schemas.openxmlformats.org/presentationml/2006/main" xmlns:r="http://schemas.openxmlformats.org/officeDocument/2006/relationships" xmlns:p14="http://schemas.microsoft.com/office/powerpoint/2010/main" xmlns:p15="http://schemas.microsoft.com/office/powerpoint/2012/main" xmlns:mc="http://schemas.openxmlformats.org/markup-compatibility/2006" type="vertTitleAndTx" preserve="1">
   <p:cSld name="Vertikaler Titel und Text">
     <p:bg>
@@ -2485,7 +4395,7 @@
       </p:grpSpPr>
       <p:sp>
         <p:nvSpPr>
-          <p:cNvPr id="18" name="PlaceHolder 1"/>
+          <p:cNvPr id="31" name="PlaceHolder 1"/>
           <p:cNvSpPr>
             <a:spLocks noGrp="1"/>
           </p:cNvSpPr>
@@ -2496,7 +4406,7 @@
         <p:spPr>
           <a:xfrm>
             <a:off x="4907880" y="527400"/>
-            <a:ext cx="1477080" cy="8393040"/>
+            <a:ext cx="1476720" cy="8392680"/>
           </a:xfrm>
           <a:prstGeom prst="rect">
             <a:avLst/>
@@ -2544,7 +4454,7 @@
       </p:sp>
       <p:sp>
         <p:nvSpPr>
-          <p:cNvPr id="19" name="PlaceHolder 2"/>
+          <p:cNvPr id="32" name="PlaceHolder 2"/>
           <p:cNvSpPr>
             <a:spLocks noGrp="1"/>
           </p:cNvSpPr>
@@ -2555,7 +4465,7 @@
         <p:spPr>
           <a:xfrm>
             <a:off x="471600" y="527400"/>
-            <a:ext cx="4348800" cy="8393040"/>
+            <a:ext cx="4348440" cy="8392680"/>
           </a:xfrm>
           <a:prstGeom prst="rect">
             <a:avLst/>
@@ -2743,18 +4653,18 @@
       </p:sp>
       <p:sp>
         <p:nvSpPr>
-          <p:cNvPr id="20" name="PlaceHolder 3"/>
+          <p:cNvPr id="33" name="PlaceHolder 3"/>
           <p:cNvSpPr>
             <a:spLocks noGrp="1"/>
           </p:cNvSpPr>
           <p:nvPr>
-            <p:ph type="dt" idx="10"/>
+            <p:ph type="dt" idx="19"/>
           </p:nvPr>
         </p:nvSpPr>
         <p:spPr>
           <a:xfrm>
             <a:off x="471600" y="9181440"/>
-            <a:ext cx="1541160" cy="525600"/>
+            <a:ext cx="1540800" cy="525240"/>
           </a:xfrm>
           <a:prstGeom prst="rect">
             <a:avLst/>
@@ -2825,18 +4735,18 @@
       </p:sp>
       <p:sp>
         <p:nvSpPr>
-          <p:cNvPr id="21" name="PlaceHolder 4"/>
+          <p:cNvPr id="34" name="PlaceHolder 4"/>
           <p:cNvSpPr>
             <a:spLocks noGrp="1"/>
           </p:cNvSpPr>
           <p:nvPr>
-            <p:ph type="ftr" idx="11"/>
+            <p:ph type="ftr" idx="20"/>
           </p:nvPr>
         </p:nvSpPr>
         <p:spPr>
           <a:xfrm>
             <a:off x="2271600" y="9181440"/>
-            <a:ext cx="2312640" cy="525600"/>
+            <a:ext cx="2312280" cy="525240"/>
           </a:xfrm>
           <a:prstGeom prst="rect">
             <a:avLst/>
@@ -2903,18 +4813,18 @@
       </p:sp>
       <p:sp>
         <p:nvSpPr>
-          <p:cNvPr id="22" name="PlaceHolder 5"/>
+          <p:cNvPr id="35" name="PlaceHolder 5"/>
           <p:cNvSpPr>
             <a:spLocks noGrp="1"/>
           </p:cNvSpPr>
           <p:nvPr>
-            <p:ph type="sldNum" idx="12"/>
+            <p:ph type="sldNum" idx="21"/>
           </p:nvPr>
         </p:nvSpPr>
         <p:spPr>
           <a:xfrm>
             <a:off x="4843440" y="9181440"/>
-            <a:ext cx="1541160" cy="525600"/>
+            <a:ext cx="1540800" cy="525240"/>
           </a:xfrm>
           <a:prstGeom prst="rect">
             <a:avLst/>
@@ -2959,7 +4869,7 @@
                 <a:tab algn="l" pos="0"/>
               </a:tabLst>
             </a:pPr>
-            <a:fld id="{282038C2-ABCD-464F-BB63-7919FF755BD8}" type="slidenum">
+            <a:fld id="{69806A7B-12BC-41F7-B93D-86BDB60F6856}" type="slidenum">
               <a:rPr lang="de-DE" sz="900" b="0" u="none" strike="noStrike">
                 <a:solidFill>
                   <a:schemeClr val="dk1">
@@ -2988,7 +4898,7 @@
 </p:sldLayout>
 </file>
 
-<file path=ppt/slideLayouts/slideLayout5.xml><?xml version="1.0" encoding="utf-8"?>
+<file path=ppt/slideLayouts/slideLayout8.xml><?xml version="1.0" encoding="utf-8"?>
 <p:sldLayout xmlns:a="http://schemas.openxmlformats.org/drawingml/2006/main" xmlns:p="http://schemas.openxmlformats.org/presentationml/2006/main" xmlns:r="http://schemas.openxmlformats.org/officeDocument/2006/relationships" xmlns:p14="http://schemas.microsoft.com/office/powerpoint/2010/main" xmlns:p15="http://schemas.microsoft.com/office/powerpoint/2012/main" xmlns:mc="http://schemas.openxmlformats.org/markup-compatibility/2006" type="obj" preserve="1">
   <p:cSld name="Titel und Inhalt">
     <p:bg>
@@ -3014,7 +4924,7 @@
       </p:grpSpPr>
       <p:sp>
         <p:nvSpPr>
-          <p:cNvPr id="23" name="PlaceHolder 1"/>
+          <p:cNvPr id="36" name="PlaceHolder 1"/>
           <p:cNvSpPr>
             <a:spLocks noGrp="1"/>
           </p:cNvSpPr>
@@ -3025,7 +4935,7 @@
         <p:spPr>
           <a:xfrm>
             <a:off x="471600" y="527400"/>
-            <a:ext cx="5913360" cy="1913040"/>
+            <a:ext cx="5913000" cy="1912680"/>
           </a:xfrm>
           <a:prstGeom prst="rect">
             <a:avLst/>
@@ -3073,7 +4983,7 @@
       </p:sp>
       <p:sp>
         <p:nvSpPr>
-          <p:cNvPr id="24" name="PlaceHolder 2"/>
+          <p:cNvPr id="37" name="PlaceHolder 2"/>
           <p:cNvSpPr>
             <a:spLocks noGrp="1"/>
           </p:cNvSpPr>
@@ -3084,7 +4994,7 @@
         <p:spPr>
           <a:xfrm>
             <a:off x="471600" y="2637000"/>
-            <a:ext cx="5913360" cy="6283440"/>
+            <a:ext cx="5913000" cy="6283080"/>
           </a:xfrm>
           <a:prstGeom prst="rect">
             <a:avLst/>
@@ -3272,18 +5182,18 @@
       </p:sp>
       <p:sp>
         <p:nvSpPr>
-          <p:cNvPr id="25" name="PlaceHolder 3"/>
+          <p:cNvPr id="38" name="PlaceHolder 3"/>
           <p:cNvSpPr>
             <a:spLocks noGrp="1"/>
           </p:cNvSpPr>
           <p:nvPr>
-            <p:ph type="dt" idx="13"/>
+            <p:ph type="dt" idx="22"/>
           </p:nvPr>
         </p:nvSpPr>
         <p:spPr>
           <a:xfrm>
             <a:off x="471600" y="9181440"/>
-            <a:ext cx="1541160" cy="525600"/>
+            <a:ext cx="1540800" cy="525240"/>
           </a:xfrm>
           <a:prstGeom prst="rect">
             <a:avLst/>
@@ -3354,18 +5264,18 @@
       </p:sp>
       <p:sp>
         <p:nvSpPr>
-          <p:cNvPr id="26" name="PlaceHolder 4"/>
+          <p:cNvPr id="39" name="PlaceHolder 4"/>
           <p:cNvSpPr>
             <a:spLocks noGrp="1"/>
           </p:cNvSpPr>
           <p:nvPr>
-            <p:ph type="ftr" idx="14"/>
+            <p:ph type="ftr" idx="23"/>
           </p:nvPr>
         </p:nvSpPr>
         <p:spPr>
           <a:xfrm>
             <a:off x="2271600" y="9181440"/>
-            <a:ext cx="2312640" cy="525600"/>
+            <a:ext cx="2312280" cy="525240"/>
           </a:xfrm>
           <a:prstGeom prst="rect">
             <a:avLst/>
@@ -3432,18 +5342,18 @@
       </p:sp>
       <p:sp>
         <p:nvSpPr>
-          <p:cNvPr id="27" name="PlaceHolder 5"/>
+          <p:cNvPr id="40" name="PlaceHolder 5"/>
           <p:cNvSpPr>
             <a:spLocks noGrp="1"/>
           </p:cNvSpPr>
           <p:nvPr>
-            <p:ph type="sldNum" idx="15"/>
+            <p:ph type="sldNum" idx="24"/>
           </p:nvPr>
         </p:nvSpPr>
         <p:spPr>
           <a:xfrm>
             <a:off x="4843440" y="9181440"/>
-            <a:ext cx="1541160" cy="525600"/>
+            <a:ext cx="1540800" cy="525240"/>
           </a:xfrm>
           <a:prstGeom prst="rect">
             <a:avLst/>
@@ -3488,7 +5398,7 @@
                 <a:tab algn="l" pos="0"/>
               </a:tabLst>
             </a:pPr>
-            <a:fld id="{598B408C-A6FB-425C-B94A-C2CE68A50510}" type="slidenum">
+            <a:fld id="{7433FC4C-F327-4E73-8D87-9CBC812CA798}" type="slidenum">
               <a:rPr lang="de-DE" sz="900" b="0" u="none" strike="noStrike">
                 <a:solidFill>
                   <a:schemeClr val="dk1">
@@ -3517,7 +5427,7 @@
 </p:sldLayout>
 </file>
 
-<file path=ppt/slideLayouts/slideLayout6.xml><?xml version="1.0" encoding="utf-8"?>
+<file path=ppt/slideLayouts/slideLayout9.xml><?xml version="1.0" encoding="utf-8"?>
 <p:sldLayout xmlns:a="http://schemas.openxmlformats.org/drawingml/2006/main" xmlns:p="http://schemas.openxmlformats.org/presentationml/2006/main" xmlns:r="http://schemas.openxmlformats.org/officeDocument/2006/relationships" xmlns:p14="http://schemas.microsoft.com/office/powerpoint/2010/main" xmlns:p15="http://schemas.microsoft.com/office/powerpoint/2012/main" xmlns:mc="http://schemas.openxmlformats.org/markup-compatibility/2006" type="blank" preserve="1">
   <p:cSld name="Abschnitts-&#10;überschrift">
     <p:bg>
@@ -3543,7 +5453,7 @@
       </p:grpSpPr>
       <p:sp>
         <p:nvSpPr>
-          <p:cNvPr id="28" name="PlaceHolder 1"/>
+          <p:cNvPr id="41" name="PlaceHolder 1"/>
           <p:cNvSpPr>
             <a:spLocks noGrp="1"/>
           </p:cNvSpPr>
@@ -3554,7 +5464,7 @@
         <p:spPr>
           <a:xfrm>
             <a:off x="468000" y="2469600"/>
-            <a:ext cx="5913360" cy="4118760"/>
+            <a:ext cx="5913000" cy="4118400"/>
           </a:xfrm>
           <a:prstGeom prst="rect">
             <a:avLst/>
@@ -3602,7 +5512,7 @@
       </p:sp>
       <p:sp>
         <p:nvSpPr>
-          <p:cNvPr id="29" name="PlaceHolder 2"/>
+          <p:cNvPr id="42" name="PlaceHolder 2"/>
           <p:cNvSpPr>
             <a:spLocks noGrp="1"/>
           </p:cNvSpPr>
@@ -3613,7 +5523,7 @@
         <p:spPr>
           <a:xfrm>
             <a:off x="468000" y="6629400"/>
-            <a:ext cx="5913360" cy="2165040"/>
+            <a:ext cx="5913000" cy="2164680"/>
           </a:xfrm>
           <a:prstGeom prst="rect">
             <a:avLst/>
@@ -3664,1917 +5574,7 @@
       </p:sp>
       <p:sp>
         <p:nvSpPr>
-          <p:cNvPr id="30" name="PlaceHolder 3"/>
-          <p:cNvSpPr>
-            <a:spLocks noGrp="1"/>
-          </p:cNvSpPr>
-          <p:nvPr>
-            <p:ph type="dt" idx="16"/>
-          </p:nvPr>
-        </p:nvSpPr>
-        <p:spPr>
-          <a:xfrm>
-            <a:off x="471600" y="9181440"/>
-            <a:ext cx="1541160" cy="525600"/>
-          </a:xfrm>
-          <a:prstGeom prst="rect">
-            <a:avLst/>
-          </a:prstGeom>
-          <a:noFill/>
-          <a:ln w="0">
-            <a:noFill/>
-          </a:ln>
-        </p:spPr>
-        <p:txBody>
-          <a:bodyPr lIns="91440" rIns="91440" tIns="45720" bIns="45720" anchor="ctr">
-            <a:noAutofit/>
-          </a:bodyPr>
-          <a:lstStyle>
-            <a:lvl1pPr indent="0" defTabSz="457200">
-              <a:lnSpc>
-                <a:spcPct val="100000"/>
-              </a:lnSpc>
-              <a:buNone/>
-              <a:tabLst>
-                <a:tab algn="l" pos="0"/>
-              </a:tabLst>
-              <a:defRPr lang="de-DE" sz="900" b="0" u="none" strike="noStrike">
-                <a:solidFill>
-                  <a:schemeClr val="dk1">
-                    <a:tint val="75000"/>
-                  </a:schemeClr>
-                </a:solidFill>
-                <a:effectLst/>
-                <a:uFillTx/>
-                <a:latin typeface="Calibri"/>
-              </a:defRPr>
-            </a:lvl1pPr>
-          </a:lstStyle>
-          <a:p>
-            <a:pPr indent="0" defTabSz="457200">
-              <a:lnSpc>
-                <a:spcPct val="100000"/>
-              </a:lnSpc>
-              <a:buNone/>
-              <a:tabLst>
-                <a:tab algn="l" pos="0"/>
-              </a:tabLst>
-            </a:pPr>
-            <a:r>
-              <a:rPr lang="de-DE" sz="900" b="0" u="none" strike="noStrike">
-                <a:solidFill>
-                  <a:schemeClr val="dk1">
-                    <a:tint val="75000"/>
-                  </a:schemeClr>
-                </a:solidFill>
-                <a:effectLst/>
-                <a:uFillTx/>
-                <a:latin typeface="Calibri"/>
-              </a:rPr>
-              <a:t>&lt;Datum/Uhrzeit&gt;</a:t>
-            </a:r>
-            <a:endParaRPr lang="de-DE" sz="900" b="0" u="none" strike="noStrike">
-              <a:solidFill>
-                <a:srgbClr val="000000"/>
-              </a:solidFill>
-              <a:effectLst/>
-              <a:uFillTx/>
-              <a:latin typeface="Times New Roman"/>
-            </a:endParaRPr>
-          </a:p>
-        </p:txBody>
-      </p:sp>
-      <p:sp>
-        <p:nvSpPr>
-          <p:cNvPr id="31" name="PlaceHolder 4"/>
-          <p:cNvSpPr>
-            <a:spLocks noGrp="1"/>
-          </p:cNvSpPr>
-          <p:nvPr>
-            <p:ph type="ftr" idx="17"/>
-          </p:nvPr>
-        </p:nvSpPr>
-        <p:spPr>
-          <a:xfrm>
-            <a:off x="2271600" y="9181440"/>
-            <a:ext cx="2312640" cy="525600"/>
-          </a:xfrm>
-          <a:prstGeom prst="rect">
-            <a:avLst/>
-          </a:prstGeom>
-          <a:noFill/>
-          <a:ln w="0">
-            <a:noFill/>
-          </a:ln>
-        </p:spPr>
-        <p:txBody>
-          <a:bodyPr lIns="91440" rIns="91440" tIns="45720" bIns="45720" anchor="ctr">
-            <a:noAutofit/>
-          </a:bodyPr>
-          <a:lstStyle>
-            <a:lvl1pPr indent="0" algn="ctr">
-              <a:lnSpc>
-                <a:spcPct val="100000"/>
-              </a:lnSpc>
-              <a:buNone/>
-              <a:tabLst>
-                <a:tab algn="l" pos="0"/>
-              </a:tabLst>
-              <a:defRPr lang="de-DE" sz="1400" b="0" u="none" strike="noStrike">
-                <a:solidFill>
-                  <a:srgbClr val="000000"/>
-                </a:solidFill>
-                <a:effectLst/>
-                <a:uFillTx/>
-                <a:latin typeface="Times New Roman"/>
-              </a:defRPr>
-            </a:lvl1pPr>
-          </a:lstStyle>
-          <a:p>
-            <a:pPr indent="0" algn="ctr">
-              <a:lnSpc>
-                <a:spcPct val="100000"/>
-              </a:lnSpc>
-              <a:buNone/>
-              <a:tabLst>
-                <a:tab algn="l" pos="0"/>
-              </a:tabLst>
-            </a:pPr>
-            <a:r>
-              <a:rPr lang="de-DE" sz="1400" b="0" u="none" strike="noStrike">
-                <a:solidFill>
-                  <a:srgbClr val="000000"/>
-                </a:solidFill>
-                <a:effectLst/>
-                <a:uFillTx/>
-                <a:latin typeface="Times New Roman"/>
-              </a:rPr>
-              <a:t>&lt;Fußzeile&gt;</a:t>
-            </a:r>
-            <a:endParaRPr lang="de-DE" sz="1400" b="0" u="none" strike="noStrike">
-              <a:solidFill>
-                <a:srgbClr val="000000"/>
-              </a:solidFill>
-              <a:effectLst/>
-              <a:uFillTx/>
-              <a:latin typeface="Times New Roman"/>
-            </a:endParaRPr>
-          </a:p>
-        </p:txBody>
-      </p:sp>
-      <p:sp>
-        <p:nvSpPr>
-          <p:cNvPr id="32" name="PlaceHolder 5"/>
-          <p:cNvSpPr>
-            <a:spLocks noGrp="1"/>
-          </p:cNvSpPr>
-          <p:nvPr>
-            <p:ph type="sldNum" idx="18"/>
-          </p:nvPr>
-        </p:nvSpPr>
-        <p:spPr>
-          <a:xfrm>
-            <a:off x="4843440" y="9181440"/>
-            <a:ext cx="1541160" cy="525600"/>
-          </a:xfrm>
-          <a:prstGeom prst="rect">
-            <a:avLst/>
-          </a:prstGeom>
-          <a:noFill/>
-          <a:ln w="0">
-            <a:noFill/>
-          </a:ln>
-        </p:spPr>
-        <p:txBody>
-          <a:bodyPr lIns="91440" rIns="91440" tIns="45720" bIns="45720" anchor="ctr">
-            <a:noAutofit/>
-          </a:bodyPr>
-          <a:lstStyle>
-            <a:lvl1pPr indent="0" algn="r" defTabSz="457200">
-              <a:lnSpc>
-                <a:spcPct val="100000"/>
-              </a:lnSpc>
-              <a:buNone/>
-              <a:tabLst>
-                <a:tab algn="l" pos="0"/>
-              </a:tabLst>
-              <a:defRPr lang="de-DE" sz="900" b="0" u="none" strike="noStrike">
-                <a:solidFill>
-                  <a:schemeClr val="dk1">
-                    <a:tint val="75000"/>
-                  </a:schemeClr>
-                </a:solidFill>
-                <a:effectLst/>
-                <a:uFillTx/>
-                <a:latin typeface="Calibri"/>
-              </a:defRPr>
-            </a:lvl1pPr>
-          </a:lstStyle>
-          <a:p>
-            <a:pPr indent="0" algn="r" defTabSz="457200">
-              <a:lnSpc>
-                <a:spcPct val="100000"/>
-              </a:lnSpc>
-              <a:buNone/>
-              <a:tabLst>
-                <a:tab algn="l" pos="0"/>
-              </a:tabLst>
-            </a:pPr>
-            <a:fld id="{A981B37C-7135-46E3-BC62-710F08C65252}" type="slidenum">
-              <a:rPr lang="de-DE" sz="900" b="0" u="none" strike="noStrike">
-                <a:solidFill>
-                  <a:schemeClr val="dk1">
-                    <a:tint val="75000"/>
-                  </a:schemeClr>
-                </a:solidFill>
-                <a:effectLst/>
-                <a:uFillTx/>
-                <a:latin typeface="Calibri"/>
-              </a:rPr>
-              <a:t>&lt;Foliennummer&gt;</a:t>
-            </a:fld>
-            <a:endParaRPr lang="de-DE" sz="900" b="0" u="none" strike="noStrike">
-              <a:solidFill>
-                <a:srgbClr val="000000"/>
-              </a:solidFill>
-              <a:effectLst/>
-              <a:uFillTx/>
-              <a:latin typeface="Times New Roman"/>
-            </a:endParaRPr>
-          </a:p>
-        </p:txBody>
-      </p:sp>
-    </p:spTree>
-  </p:cSld>
-</p:sldLayout>
-</file>
-
-<file path=ppt/slideLayouts/slideLayout7.xml><?xml version="1.0" encoding="utf-8"?>
-<p:sldLayout xmlns:a="http://schemas.openxmlformats.org/drawingml/2006/main" xmlns:p="http://schemas.openxmlformats.org/presentationml/2006/main" xmlns:r="http://schemas.openxmlformats.org/officeDocument/2006/relationships" xmlns:p14="http://schemas.microsoft.com/office/powerpoint/2010/main" xmlns:p15="http://schemas.microsoft.com/office/powerpoint/2012/main" xmlns:mc="http://schemas.openxmlformats.org/markup-compatibility/2006" type="twoObj" preserve="1">
-  <p:cSld name="Zwei Inhalte">
-    <p:bg>
-      <p:bgPr>
-        <a:solidFill>
-          <a:srgbClr val="ffffff"/>
-        </a:solidFill>
-      </p:bgPr>
-    </p:bg>
-    <p:spTree>
-      <p:nvGrpSpPr>
-        <p:cNvPr id="1" name=""/>
-        <p:cNvGrpSpPr/>
-        <p:nvPr/>
-      </p:nvGrpSpPr>
-      <p:grpSpPr>
-        <a:xfrm>
-          <a:off x="0" y="0"/>
-          <a:ext cx="0" cy="0"/>
-          <a:chOff x="0" y="0"/>
-          <a:chExt cx="0" cy="0"/>
-        </a:xfrm>
-      </p:grpSpPr>
-      <p:sp>
-        <p:nvSpPr>
-          <p:cNvPr id="33" name="PlaceHolder 1"/>
-          <p:cNvSpPr>
-            <a:spLocks noGrp="1"/>
-          </p:cNvSpPr>
-          <p:nvPr>
-            <p:ph type="title"/>
-          </p:nvPr>
-        </p:nvSpPr>
-        <p:spPr>
-          <a:xfrm>
-            <a:off x="471600" y="527400"/>
-            <a:ext cx="5913360" cy="1913040"/>
-          </a:xfrm>
-          <a:prstGeom prst="rect">
-            <a:avLst/>
-          </a:prstGeom>
-          <a:noFill/>
-          <a:ln w="0">
-            <a:noFill/>
-          </a:ln>
-        </p:spPr>
-        <p:txBody>
-          <a:bodyPr lIns="91440" rIns="91440" tIns="45720" bIns="45720" anchor="ctr">
-            <a:noAutofit/>
-          </a:bodyPr>
-          <a:p>
-            <a:pPr indent="0" defTabSz="685800">
-              <a:lnSpc>
-                <a:spcPct val="90000"/>
-              </a:lnSpc>
-              <a:buNone/>
-              <a:tabLst>
-                <a:tab algn="l" pos="0"/>
-              </a:tabLst>
-            </a:pPr>
-            <a:r>
-              <a:rPr lang="de-DE" sz="3300" b="0" u="none" strike="noStrike">
-                <a:solidFill>
-                  <a:schemeClr val="dk1"/>
-                </a:solidFill>
-                <a:effectLst/>
-                <a:uFillTx/>
-                <a:latin typeface="Calibri Light"/>
-              </a:rPr>
-              <a:t>Mastertitelformat bearbeiten</a:t>
-            </a:r>
-            <a:endParaRPr lang="de-DE" sz="3300" b="0" u="none" strike="noStrike">
-              <a:solidFill>
-                <a:srgbClr val="000000"/>
-              </a:solidFill>
-              <a:effectLst/>
-              <a:uFillTx/>
-              <a:latin typeface="Arial"/>
-            </a:endParaRPr>
-          </a:p>
-        </p:txBody>
-      </p:sp>
-      <p:sp>
-        <p:nvSpPr>
-          <p:cNvPr id="34" name="PlaceHolder 2"/>
-          <p:cNvSpPr>
-            <a:spLocks noGrp="1"/>
-          </p:cNvSpPr>
-          <p:nvPr>
-            <p:ph type="body"/>
-          </p:nvPr>
-        </p:nvSpPr>
-        <p:spPr>
-          <a:xfrm>
-            <a:off x="471600" y="2637000"/>
-            <a:ext cx="2912760" cy="6283440"/>
-          </a:xfrm>
-          <a:prstGeom prst="rect">
-            <a:avLst/>
-          </a:prstGeom>
-          <a:noFill/>
-          <a:ln w="0">
-            <a:noFill/>
-          </a:ln>
-        </p:spPr>
-        <p:txBody>
-          <a:bodyPr lIns="91440" rIns="91440" tIns="45720" bIns="45720" anchor="t">
-            <a:noAutofit/>
-          </a:bodyPr>
-          <a:p>
-            <a:pPr marL="171360" indent="-171360" defTabSz="685800">
-              <a:lnSpc>
-                <a:spcPct val="90000"/>
-              </a:lnSpc>
-              <a:spcBef>
-                <a:spcPts val="751"/>
-              </a:spcBef>
-              <a:buClr>
-                <a:srgbClr val="000000"/>
-              </a:buClr>
-              <a:buFont typeface="Arial"/>
-              <a:buChar char="•"/>
-            </a:pPr>
-            <a:r>
-              <a:rPr lang="de-DE" sz="2100" b="0" u="none" strike="noStrike">
-                <a:solidFill>
-                  <a:schemeClr val="dk1"/>
-                </a:solidFill>
-                <a:effectLst/>
-                <a:uFillTx/>
-                <a:latin typeface="Calibri"/>
-              </a:rPr>
-              <a:t>Mastertextformat bearbeiten</a:t>
-            </a:r>
-            <a:endParaRPr lang="de-DE" sz="2100" b="0" u="none" strike="noStrike">
-              <a:solidFill>
-                <a:srgbClr val="000000"/>
-              </a:solidFill>
-              <a:effectLst/>
-              <a:uFillTx/>
-              <a:latin typeface="Arial"/>
-            </a:endParaRPr>
-          </a:p>
-          <a:p>
-            <a:pPr marL="514440" lvl="1" indent="-171360" defTabSz="685800">
-              <a:lnSpc>
-                <a:spcPct val="90000"/>
-              </a:lnSpc>
-              <a:spcBef>
-                <a:spcPts val="374"/>
-              </a:spcBef>
-              <a:buClr>
-                <a:srgbClr val="000000"/>
-              </a:buClr>
-              <a:buFont typeface="Arial"/>
-              <a:buChar char="•"/>
-            </a:pPr>
-            <a:r>
-              <a:rPr lang="de-DE" sz="1800" b="0" u="none" strike="noStrike">
-                <a:solidFill>
-                  <a:schemeClr val="dk1"/>
-                </a:solidFill>
-                <a:effectLst/>
-                <a:uFillTx/>
-                <a:latin typeface="Calibri"/>
-              </a:rPr>
-              <a:t>Zweite Ebene</a:t>
-            </a:r>
-            <a:endParaRPr lang="de-DE" sz="1800" b="0" u="none" strike="noStrike">
-              <a:solidFill>
-                <a:srgbClr val="000000"/>
-              </a:solidFill>
-              <a:effectLst/>
-              <a:uFillTx/>
-              <a:latin typeface="Arial"/>
-            </a:endParaRPr>
-          </a:p>
-          <a:p>
-            <a:pPr marL="857160" lvl="2" indent="-171360" defTabSz="685800">
-              <a:lnSpc>
-                <a:spcPct val="90000"/>
-              </a:lnSpc>
-              <a:spcBef>
-                <a:spcPts val="374"/>
-              </a:spcBef>
-              <a:buClr>
-                <a:srgbClr val="000000"/>
-              </a:buClr>
-              <a:buFont typeface="Arial"/>
-              <a:buChar char="•"/>
-            </a:pPr>
-            <a:r>
-              <a:rPr lang="de-DE" sz="1500" b="0" u="none" strike="noStrike">
-                <a:solidFill>
-                  <a:schemeClr val="dk1"/>
-                </a:solidFill>
-                <a:effectLst/>
-                <a:uFillTx/>
-                <a:latin typeface="Calibri"/>
-              </a:rPr>
-              <a:t>Dritte Ebene</a:t>
-            </a:r>
-            <a:endParaRPr lang="de-DE" sz="1500" b="0" u="none" strike="noStrike">
-              <a:solidFill>
-                <a:srgbClr val="000000"/>
-              </a:solidFill>
-              <a:effectLst/>
-              <a:uFillTx/>
-              <a:latin typeface="Arial"/>
-            </a:endParaRPr>
-          </a:p>
-          <a:p>
-            <a:pPr marL="1200240" lvl="3" indent="-171360" defTabSz="685800">
-              <a:lnSpc>
-                <a:spcPct val="90000"/>
-              </a:lnSpc>
-              <a:spcBef>
-                <a:spcPts val="374"/>
-              </a:spcBef>
-              <a:buClr>
-                <a:srgbClr val="000000"/>
-              </a:buClr>
-              <a:buFont typeface="Arial"/>
-              <a:buChar char="•"/>
-            </a:pPr>
-            <a:r>
-              <a:rPr lang="de-DE" sz="1350" b="0" u="none" strike="noStrike">
-                <a:solidFill>
-                  <a:schemeClr val="dk1"/>
-                </a:solidFill>
-                <a:effectLst/>
-                <a:uFillTx/>
-                <a:latin typeface="Calibri"/>
-              </a:rPr>
-              <a:t>Vierte Ebene</a:t>
-            </a:r>
-            <a:endParaRPr lang="de-DE" sz="1350" b="0" u="none" strike="noStrike">
-              <a:solidFill>
-                <a:srgbClr val="000000"/>
-              </a:solidFill>
-              <a:effectLst/>
-              <a:uFillTx/>
-              <a:latin typeface="Arial"/>
-            </a:endParaRPr>
-          </a:p>
-          <a:p>
-            <a:pPr marL="1542960" lvl="4" indent="-171360" defTabSz="685800">
-              <a:lnSpc>
-                <a:spcPct val="90000"/>
-              </a:lnSpc>
-              <a:spcBef>
-                <a:spcPts val="374"/>
-              </a:spcBef>
-              <a:buClr>
-                <a:srgbClr val="000000"/>
-              </a:buClr>
-              <a:buFont typeface="Arial"/>
-              <a:buChar char="•"/>
-            </a:pPr>
-            <a:r>
-              <a:rPr lang="de-DE" sz="1350" b="0" u="none" strike="noStrike">
-                <a:solidFill>
-                  <a:schemeClr val="dk1"/>
-                </a:solidFill>
-                <a:effectLst/>
-                <a:uFillTx/>
-                <a:latin typeface="Calibri"/>
-              </a:rPr>
-              <a:t>Fünfte Ebene</a:t>
-            </a:r>
-            <a:endParaRPr lang="de-DE" sz="1350" b="0" u="none" strike="noStrike">
-              <a:solidFill>
-                <a:srgbClr val="000000"/>
-              </a:solidFill>
-              <a:effectLst/>
-              <a:uFillTx/>
-              <a:latin typeface="Arial"/>
-            </a:endParaRPr>
-          </a:p>
-        </p:txBody>
-      </p:sp>
-      <p:sp>
-        <p:nvSpPr>
-          <p:cNvPr id="35" name="PlaceHolder 3"/>
-          <p:cNvSpPr>
-            <a:spLocks noGrp="1"/>
-          </p:cNvSpPr>
-          <p:nvPr>
-            <p:ph type="body"/>
-          </p:nvPr>
-        </p:nvSpPr>
-        <p:spPr>
-          <a:xfrm>
-            <a:off x="3471840" y="2637000"/>
-            <a:ext cx="2912760" cy="6283440"/>
-          </a:xfrm>
-          <a:prstGeom prst="rect">
-            <a:avLst/>
-          </a:prstGeom>
-          <a:noFill/>
-          <a:ln w="0">
-            <a:noFill/>
-          </a:ln>
-        </p:spPr>
-        <p:txBody>
-          <a:bodyPr lIns="91440" rIns="91440" tIns="45720" bIns="45720" anchor="t">
-            <a:noAutofit/>
-          </a:bodyPr>
-          <a:p>
-            <a:pPr marL="171360" indent="-171360" defTabSz="685800">
-              <a:lnSpc>
-                <a:spcPct val="90000"/>
-              </a:lnSpc>
-              <a:spcBef>
-                <a:spcPts val="751"/>
-              </a:spcBef>
-              <a:buClr>
-                <a:srgbClr val="000000"/>
-              </a:buClr>
-              <a:buFont typeface="Arial"/>
-              <a:buChar char="•"/>
-            </a:pPr>
-            <a:r>
-              <a:rPr lang="de-DE" sz="2100" b="0" u="none" strike="noStrike">
-                <a:solidFill>
-                  <a:schemeClr val="dk1"/>
-                </a:solidFill>
-                <a:effectLst/>
-                <a:uFillTx/>
-                <a:latin typeface="Calibri"/>
-              </a:rPr>
-              <a:t>Mastertextformat bearbeiten</a:t>
-            </a:r>
-            <a:endParaRPr lang="de-DE" sz="2100" b="0" u="none" strike="noStrike">
-              <a:solidFill>
-                <a:srgbClr val="000000"/>
-              </a:solidFill>
-              <a:effectLst/>
-              <a:uFillTx/>
-              <a:latin typeface="Arial"/>
-            </a:endParaRPr>
-          </a:p>
-          <a:p>
-            <a:pPr marL="514440" lvl="1" indent="-171360" defTabSz="685800">
-              <a:lnSpc>
-                <a:spcPct val="90000"/>
-              </a:lnSpc>
-              <a:spcBef>
-                <a:spcPts val="374"/>
-              </a:spcBef>
-              <a:buClr>
-                <a:srgbClr val="000000"/>
-              </a:buClr>
-              <a:buFont typeface="Arial"/>
-              <a:buChar char="•"/>
-            </a:pPr>
-            <a:r>
-              <a:rPr lang="de-DE" sz="1800" b="0" u="none" strike="noStrike">
-                <a:solidFill>
-                  <a:schemeClr val="dk1"/>
-                </a:solidFill>
-                <a:effectLst/>
-                <a:uFillTx/>
-                <a:latin typeface="Calibri"/>
-              </a:rPr>
-              <a:t>Zweite Ebene</a:t>
-            </a:r>
-            <a:endParaRPr lang="de-DE" sz="1800" b="0" u="none" strike="noStrike">
-              <a:solidFill>
-                <a:srgbClr val="000000"/>
-              </a:solidFill>
-              <a:effectLst/>
-              <a:uFillTx/>
-              <a:latin typeface="Arial"/>
-            </a:endParaRPr>
-          </a:p>
-          <a:p>
-            <a:pPr marL="857160" lvl="2" indent="-171360" defTabSz="685800">
-              <a:lnSpc>
-                <a:spcPct val="90000"/>
-              </a:lnSpc>
-              <a:spcBef>
-                <a:spcPts val="374"/>
-              </a:spcBef>
-              <a:buClr>
-                <a:srgbClr val="000000"/>
-              </a:buClr>
-              <a:buFont typeface="Arial"/>
-              <a:buChar char="•"/>
-            </a:pPr>
-            <a:r>
-              <a:rPr lang="de-DE" sz="1500" b="0" u="none" strike="noStrike">
-                <a:solidFill>
-                  <a:schemeClr val="dk1"/>
-                </a:solidFill>
-                <a:effectLst/>
-                <a:uFillTx/>
-                <a:latin typeface="Calibri"/>
-              </a:rPr>
-              <a:t>Dritte Ebene</a:t>
-            </a:r>
-            <a:endParaRPr lang="de-DE" sz="1500" b="0" u="none" strike="noStrike">
-              <a:solidFill>
-                <a:srgbClr val="000000"/>
-              </a:solidFill>
-              <a:effectLst/>
-              <a:uFillTx/>
-              <a:latin typeface="Arial"/>
-            </a:endParaRPr>
-          </a:p>
-          <a:p>
-            <a:pPr marL="1200240" lvl="3" indent="-171360" defTabSz="685800">
-              <a:lnSpc>
-                <a:spcPct val="90000"/>
-              </a:lnSpc>
-              <a:spcBef>
-                <a:spcPts val="374"/>
-              </a:spcBef>
-              <a:buClr>
-                <a:srgbClr val="000000"/>
-              </a:buClr>
-              <a:buFont typeface="Arial"/>
-              <a:buChar char="•"/>
-            </a:pPr>
-            <a:r>
-              <a:rPr lang="de-DE" sz="1350" b="0" u="none" strike="noStrike">
-                <a:solidFill>
-                  <a:schemeClr val="dk1"/>
-                </a:solidFill>
-                <a:effectLst/>
-                <a:uFillTx/>
-                <a:latin typeface="Calibri"/>
-              </a:rPr>
-              <a:t>Vierte Ebene</a:t>
-            </a:r>
-            <a:endParaRPr lang="de-DE" sz="1350" b="0" u="none" strike="noStrike">
-              <a:solidFill>
-                <a:srgbClr val="000000"/>
-              </a:solidFill>
-              <a:effectLst/>
-              <a:uFillTx/>
-              <a:latin typeface="Arial"/>
-            </a:endParaRPr>
-          </a:p>
-          <a:p>
-            <a:pPr marL="1542960" lvl="4" indent="-171360" defTabSz="685800">
-              <a:lnSpc>
-                <a:spcPct val="90000"/>
-              </a:lnSpc>
-              <a:spcBef>
-                <a:spcPts val="374"/>
-              </a:spcBef>
-              <a:buClr>
-                <a:srgbClr val="000000"/>
-              </a:buClr>
-              <a:buFont typeface="Arial"/>
-              <a:buChar char="•"/>
-            </a:pPr>
-            <a:r>
-              <a:rPr lang="de-DE" sz="1350" b="0" u="none" strike="noStrike">
-                <a:solidFill>
-                  <a:schemeClr val="dk1"/>
-                </a:solidFill>
-                <a:effectLst/>
-                <a:uFillTx/>
-                <a:latin typeface="Calibri"/>
-              </a:rPr>
-              <a:t>Fünfte Ebene</a:t>
-            </a:r>
-            <a:endParaRPr lang="de-DE" sz="1350" b="0" u="none" strike="noStrike">
-              <a:solidFill>
-                <a:srgbClr val="000000"/>
-              </a:solidFill>
-              <a:effectLst/>
-              <a:uFillTx/>
-              <a:latin typeface="Arial"/>
-            </a:endParaRPr>
-          </a:p>
-        </p:txBody>
-      </p:sp>
-      <p:sp>
-        <p:nvSpPr>
-          <p:cNvPr id="36" name="PlaceHolder 4"/>
-          <p:cNvSpPr>
-            <a:spLocks noGrp="1"/>
-          </p:cNvSpPr>
-          <p:nvPr>
-            <p:ph type="dt" idx="19"/>
-          </p:nvPr>
-        </p:nvSpPr>
-        <p:spPr>
-          <a:xfrm>
-            <a:off x="471600" y="9181440"/>
-            <a:ext cx="1541160" cy="525600"/>
-          </a:xfrm>
-          <a:prstGeom prst="rect">
-            <a:avLst/>
-          </a:prstGeom>
-          <a:noFill/>
-          <a:ln w="0">
-            <a:noFill/>
-          </a:ln>
-        </p:spPr>
-        <p:txBody>
-          <a:bodyPr lIns="91440" rIns="91440" tIns="45720" bIns="45720" anchor="ctr">
-            <a:noAutofit/>
-          </a:bodyPr>
-          <a:lstStyle>
-            <a:lvl1pPr indent="0" defTabSz="457200">
-              <a:lnSpc>
-                <a:spcPct val="100000"/>
-              </a:lnSpc>
-              <a:buNone/>
-              <a:tabLst>
-                <a:tab algn="l" pos="0"/>
-              </a:tabLst>
-              <a:defRPr lang="de-DE" sz="900" b="0" u="none" strike="noStrike">
-                <a:solidFill>
-                  <a:schemeClr val="dk1">
-                    <a:tint val="75000"/>
-                  </a:schemeClr>
-                </a:solidFill>
-                <a:effectLst/>
-                <a:uFillTx/>
-                <a:latin typeface="Calibri"/>
-              </a:defRPr>
-            </a:lvl1pPr>
-          </a:lstStyle>
-          <a:p>
-            <a:pPr indent="0" defTabSz="457200">
-              <a:lnSpc>
-                <a:spcPct val="100000"/>
-              </a:lnSpc>
-              <a:buNone/>
-              <a:tabLst>
-                <a:tab algn="l" pos="0"/>
-              </a:tabLst>
-            </a:pPr>
-            <a:r>
-              <a:rPr lang="de-DE" sz="900" b="0" u="none" strike="noStrike">
-                <a:solidFill>
-                  <a:schemeClr val="dk1">
-                    <a:tint val="75000"/>
-                  </a:schemeClr>
-                </a:solidFill>
-                <a:effectLst/>
-                <a:uFillTx/>
-                <a:latin typeface="Calibri"/>
-              </a:rPr>
-              <a:t>&lt;Datum/Uhrzeit&gt;</a:t>
-            </a:r>
-            <a:endParaRPr lang="de-DE" sz="900" b="0" u="none" strike="noStrike">
-              <a:solidFill>
-                <a:srgbClr val="000000"/>
-              </a:solidFill>
-              <a:effectLst/>
-              <a:uFillTx/>
-              <a:latin typeface="Times New Roman"/>
-            </a:endParaRPr>
-          </a:p>
-        </p:txBody>
-      </p:sp>
-      <p:sp>
-        <p:nvSpPr>
-          <p:cNvPr id="37" name="PlaceHolder 5"/>
-          <p:cNvSpPr>
-            <a:spLocks noGrp="1"/>
-          </p:cNvSpPr>
-          <p:nvPr>
-            <p:ph type="ftr" idx="20"/>
-          </p:nvPr>
-        </p:nvSpPr>
-        <p:spPr>
-          <a:xfrm>
-            <a:off x="2271600" y="9181440"/>
-            <a:ext cx="2312640" cy="525600"/>
-          </a:xfrm>
-          <a:prstGeom prst="rect">
-            <a:avLst/>
-          </a:prstGeom>
-          <a:noFill/>
-          <a:ln w="0">
-            <a:noFill/>
-          </a:ln>
-        </p:spPr>
-        <p:txBody>
-          <a:bodyPr lIns="91440" rIns="91440" tIns="45720" bIns="45720" anchor="ctr">
-            <a:noAutofit/>
-          </a:bodyPr>
-          <a:lstStyle>
-            <a:lvl1pPr indent="0" algn="ctr">
-              <a:lnSpc>
-                <a:spcPct val="100000"/>
-              </a:lnSpc>
-              <a:buNone/>
-              <a:tabLst>
-                <a:tab algn="l" pos="0"/>
-              </a:tabLst>
-              <a:defRPr lang="de-DE" sz="1400" b="0" u="none" strike="noStrike">
-                <a:solidFill>
-                  <a:srgbClr val="000000"/>
-                </a:solidFill>
-                <a:effectLst/>
-                <a:uFillTx/>
-                <a:latin typeface="Times New Roman"/>
-              </a:defRPr>
-            </a:lvl1pPr>
-          </a:lstStyle>
-          <a:p>
-            <a:pPr indent="0" algn="ctr">
-              <a:lnSpc>
-                <a:spcPct val="100000"/>
-              </a:lnSpc>
-              <a:buNone/>
-              <a:tabLst>
-                <a:tab algn="l" pos="0"/>
-              </a:tabLst>
-            </a:pPr>
-            <a:r>
-              <a:rPr lang="de-DE" sz="1400" b="0" u="none" strike="noStrike">
-                <a:solidFill>
-                  <a:srgbClr val="000000"/>
-                </a:solidFill>
-                <a:effectLst/>
-                <a:uFillTx/>
-                <a:latin typeface="Times New Roman"/>
-              </a:rPr>
-              <a:t>&lt;Fußzeile&gt;</a:t>
-            </a:r>
-            <a:endParaRPr lang="de-DE" sz="1400" b="0" u="none" strike="noStrike">
-              <a:solidFill>
-                <a:srgbClr val="000000"/>
-              </a:solidFill>
-              <a:effectLst/>
-              <a:uFillTx/>
-              <a:latin typeface="Times New Roman"/>
-            </a:endParaRPr>
-          </a:p>
-        </p:txBody>
-      </p:sp>
-      <p:sp>
-        <p:nvSpPr>
-          <p:cNvPr id="38" name="PlaceHolder 6"/>
-          <p:cNvSpPr>
-            <a:spLocks noGrp="1"/>
-          </p:cNvSpPr>
-          <p:nvPr>
-            <p:ph type="sldNum" idx="21"/>
-          </p:nvPr>
-        </p:nvSpPr>
-        <p:spPr>
-          <a:xfrm>
-            <a:off x="4843440" y="9181440"/>
-            <a:ext cx="1541160" cy="525600"/>
-          </a:xfrm>
-          <a:prstGeom prst="rect">
-            <a:avLst/>
-          </a:prstGeom>
-          <a:noFill/>
-          <a:ln w="0">
-            <a:noFill/>
-          </a:ln>
-        </p:spPr>
-        <p:txBody>
-          <a:bodyPr lIns="91440" rIns="91440" tIns="45720" bIns="45720" anchor="ctr">
-            <a:noAutofit/>
-          </a:bodyPr>
-          <a:lstStyle>
-            <a:lvl1pPr indent="0" algn="r" defTabSz="457200">
-              <a:lnSpc>
-                <a:spcPct val="100000"/>
-              </a:lnSpc>
-              <a:buNone/>
-              <a:tabLst>
-                <a:tab algn="l" pos="0"/>
-              </a:tabLst>
-              <a:defRPr lang="de-DE" sz="900" b="0" u="none" strike="noStrike">
-                <a:solidFill>
-                  <a:schemeClr val="dk1">
-                    <a:tint val="75000"/>
-                  </a:schemeClr>
-                </a:solidFill>
-                <a:effectLst/>
-                <a:uFillTx/>
-                <a:latin typeface="Calibri"/>
-              </a:defRPr>
-            </a:lvl1pPr>
-          </a:lstStyle>
-          <a:p>
-            <a:pPr indent="0" algn="r" defTabSz="457200">
-              <a:lnSpc>
-                <a:spcPct val="100000"/>
-              </a:lnSpc>
-              <a:buNone/>
-              <a:tabLst>
-                <a:tab algn="l" pos="0"/>
-              </a:tabLst>
-            </a:pPr>
-            <a:fld id="{0418E993-1C7A-43C6-B9B6-5DB07121FD9C}" type="slidenum">
-              <a:rPr lang="de-DE" sz="900" b="0" u="none" strike="noStrike">
-                <a:solidFill>
-                  <a:schemeClr val="dk1">
-                    <a:tint val="75000"/>
-                  </a:schemeClr>
-                </a:solidFill>
-                <a:effectLst/>
-                <a:uFillTx/>
-                <a:latin typeface="Calibri"/>
-              </a:rPr>
-              <a:t>&lt;Foliennummer&gt;</a:t>
-            </a:fld>
-            <a:endParaRPr lang="de-DE" sz="900" b="0" u="none" strike="noStrike">
-              <a:solidFill>
-                <a:srgbClr val="000000"/>
-              </a:solidFill>
-              <a:effectLst/>
-              <a:uFillTx/>
-              <a:latin typeface="Times New Roman"/>
-            </a:endParaRPr>
-          </a:p>
-        </p:txBody>
-      </p:sp>
-    </p:spTree>
-  </p:cSld>
-</p:sldLayout>
-</file>
-
-<file path=ppt/slideLayouts/slideLayout8.xml><?xml version="1.0" encoding="utf-8"?>
-<p:sldLayout xmlns:a="http://schemas.openxmlformats.org/drawingml/2006/main" xmlns:p="http://schemas.openxmlformats.org/presentationml/2006/main" xmlns:r="http://schemas.openxmlformats.org/officeDocument/2006/relationships" xmlns:p14="http://schemas.microsoft.com/office/powerpoint/2010/main" xmlns:p15="http://schemas.microsoft.com/office/powerpoint/2012/main" xmlns:mc="http://schemas.openxmlformats.org/markup-compatibility/2006" type="blank" preserve="1">
-  <p:cSld name="Vergleich">
-    <p:bg>
-      <p:bgPr>
-        <a:solidFill>
-          <a:srgbClr val="ffffff"/>
-        </a:solidFill>
-      </p:bgPr>
-    </p:bg>
-    <p:spTree>
-      <p:nvGrpSpPr>
-        <p:cNvPr id="1" name=""/>
-        <p:cNvGrpSpPr/>
-        <p:nvPr/>
-      </p:nvGrpSpPr>
-      <p:grpSpPr>
-        <a:xfrm>
-          <a:off x="0" y="0"/>
-          <a:ext cx="0" cy="0"/>
-          <a:chOff x="0" y="0"/>
-          <a:chExt cx="0" cy="0"/>
-        </a:xfrm>
-      </p:grpSpPr>
-      <p:sp>
-        <p:nvSpPr>
-          <p:cNvPr id="39" name="PlaceHolder 1"/>
-          <p:cNvSpPr>
-            <a:spLocks noGrp="1"/>
-          </p:cNvSpPr>
-          <p:nvPr>
-            <p:ph type="title"/>
-          </p:nvPr>
-        </p:nvSpPr>
-        <p:spPr>
-          <a:xfrm>
-            <a:off x="472320" y="527400"/>
-            <a:ext cx="5913360" cy="1913040"/>
-          </a:xfrm>
-          <a:prstGeom prst="rect">
-            <a:avLst/>
-          </a:prstGeom>
-          <a:noFill/>
-          <a:ln w="0">
-            <a:noFill/>
-          </a:ln>
-        </p:spPr>
-        <p:txBody>
-          <a:bodyPr lIns="91440" rIns="91440" tIns="45720" bIns="45720" anchor="ctr">
-            <a:noAutofit/>
-          </a:bodyPr>
-          <a:p>
-            <a:pPr indent="0" defTabSz="685800">
-              <a:lnSpc>
-                <a:spcPct val="90000"/>
-              </a:lnSpc>
-              <a:buNone/>
-              <a:tabLst>
-                <a:tab algn="l" pos="0"/>
-              </a:tabLst>
-            </a:pPr>
-            <a:r>
-              <a:rPr lang="de-DE" sz="3300" b="0" u="none" strike="noStrike">
-                <a:solidFill>
-                  <a:schemeClr val="dk1"/>
-                </a:solidFill>
-                <a:effectLst/>
-                <a:uFillTx/>
-                <a:latin typeface="Calibri Light"/>
-              </a:rPr>
-              <a:t>Mastertitelformat bearbeiten</a:t>
-            </a:r>
-            <a:endParaRPr lang="de-DE" sz="3300" b="0" u="none" strike="noStrike">
-              <a:solidFill>
-                <a:srgbClr val="000000"/>
-              </a:solidFill>
-              <a:effectLst/>
-              <a:uFillTx/>
-              <a:latin typeface="Arial"/>
-            </a:endParaRPr>
-          </a:p>
-        </p:txBody>
-      </p:sp>
-      <p:sp>
-        <p:nvSpPr>
-          <p:cNvPr id="40" name="PlaceHolder 2"/>
-          <p:cNvSpPr>
-            <a:spLocks noGrp="1"/>
-          </p:cNvSpPr>
-          <p:nvPr>
-            <p:ph type="body"/>
-          </p:nvPr>
-        </p:nvSpPr>
-        <p:spPr>
-          <a:xfrm>
-            <a:off x="472320" y="2428200"/>
-            <a:ext cx="2899440" cy="1188360"/>
-          </a:xfrm>
-          <a:prstGeom prst="rect">
-            <a:avLst/>
-          </a:prstGeom>
-          <a:noFill/>
-          <a:ln w="0">
-            <a:noFill/>
-          </a:ln>
-        </p:spPr>
-        <p:txBody>
-          <a:bodyPr lIns="91440" rIns="91440" tIns="45720" bIns="45720" anchor="b">
-            <a:noAutofit/>
-          </a:bodyPr>
-          <a:p>
-            <a:pPr indent="0" defTabSz="685800">
-              <a:lnSpc>
-                <a:spcPct val="90000"/>
-              </a:lnSpc>
-              <a:spcBef>
-                <a:spcPts val="751"/>
-              </a:spcBef>
-              <a:buNone/>
-              <a:tabLst>
-                <a:tab algn="l" pos="0"/>
-              </a:tabLst>
-            </a:pPr>
-            <a:r>
-              <a:rPr lang="de-DE" sz="1800" b="1" u="none" strike="noStrike">
-                <a:solidFill>
-                  <a:schemeClr val="dk1"/>
-                </a:solidFill>
-                <a:effectLst/>
-                <a:uFillTx/>
-                <a:latin typeface="Calibri"/>
-              </a:rPr>
-              <a:t>Mastertextformat bearbeiten</a:t>
-            </a:r>
-            <a:endParaRPr lang="de-DE" sz="1800" b="0" u="none" strike="noStrike">
-              <a:solidFill>
-                <a:srgbClr val="000000"/>
-              </a:solidFill>
-              <a:effectLst/>
-              <a:uFillTx/>
-              <a:latin typeface="Arial"/>
-            </a:endParaRPr>
-          </a:p>
-        </p:txBody>
-      </p:sp>
-      <p:sp>
-        <p:nvSpPr>
-          <p:cNvPr id="41" name="PlaceHolder 3"/>
-          <p:cNvSpPr>
-            <a:spLocks noGrp="1"/>
-          </p:cNvSpPr>
-          <p:nvPr>
-            <p:ph type="body"/>
-          </p:nvPr>
-        </p:nvSpPr>
-        <p:spPr>
-          <a:xfrm>
-            <a:off x="472320" y="3618360"/>
-            <a:ext cx="2899440" cy="5320440"/>
-          </a:xfrm>
-          <a:prstGeom prst="rect">
-            <a:avLst/>
-          </a:prstGeom>
-          <a:noFill/>
-          <a:ln w="0">
-            <a:noFill/>
-          </a:ln>
-        </p:spPr>
-        <p:txBody>
-          <a:bodyPr lIns="91440" rIns="91440" tIns="45720" bIns="45720" anchor="t">
-            <a:noAutofit/>
-          </a:bodyPr>
-          <a:p>
-            <a:pPr marL="171360" indent="-171360" defTabSz="685800">
-              <a:lnSpc>
-                <a:spcPct val="90000"/>
-              </a:lnSpc>
-              <a:spcBef>
-                <a:spcPts val="751"/>
-              </a:spcBef>
-              <a:buClr>
-                <a:srgbClr val="000000"/>
-              </a:buClr>
-              <a:buFont typeface="Arial"/>
-              <a:buChar char="•"/>
-            </a:pPr>
-            <a:r>
-              <a:rPr lang="de-DE" sz="2100" b="0" u="none" strike="noStrike">
-                <a:solidFill>
-                  <a:schemeClr val="dk1"/>
-                </a:solidFill>
-                <a:effectLst/>
-                <a:uFillTx/>
-                <a:latin typeface="Calibri"/>
-              </a:rPr>
-              <a:t>Mastertextformat bearbeiten</a:t>
-            </a:r>
-            <a:endParaRPr lang="de-DE" sz="2100" b="0" u="none" strike="noStrike">
-              <a:solidFill>
-                <a:srgbClr val="000000"/>
-              </a:solidFill>
-              <a:effectLst/>
-              <a:uFillTx/>
-              <a:latin typeface="Arial"/>
-            </a:endParaRPr>
-          </a:p>
-          <a:p>
-            <a:pPr marL="514440" lvl="1" indent="-171360" defTabSz="685800">
-              <a:lnSpc>
-                <a:spcPct val="90000"/>
-              </a:lnSpc>
-              <a:spcBef>
-                <a:spcPts val="374"/>
-              </a:spcBef>
-              <a:buClr>
-                <a:srgbClr val="000000"/>
-              </a:buClr>
-              <a:buFont typeface="Arial"/>
-              <a:buChar char="•"/>
-            </a:pPr>
-            <a:r>
-              <a:rPr lang="de-DE" sz="1800" b="0" u="none" strike="noStrike">
-                <a:solidFill>
-                  <a:schemeClr val="dk1"/>
-                </a:solidFill>
-                <a:effectLst/>
-                <a:uFillTx/>
-                <a:latin typeface="Calibri"/>
-              </a:rPr>
-              <a:t>Zweite Ebene</a:t>
-            </a:r>
-            <a:endParaRPr lang="de-DE" sz="1800" b="0" u="none" strike="noStrike">
-              <a:solidFill>
-                <a:srgbClr val="000000"/>
-              </a:solidFill>
-              <a:effectLst/>
-              <a:uFillTx/>
-              <a:latin typeface="Arial"/>
-            </a:endParaRPr>
-          </a:p>
-          <a:p>
-            <a:pPr marL="857160" lvl="2" indent="-171360" defTabSz="685800">
-              <a:lnSpc>
-                <a:spcPct val="90000"/>
-              </a:lnSpc>
-              <a:spcBef>
-                <a:spcPts val="374"/>
-              </a:spcBef>
-              <a:buClr>
-                <a:srgbClr val="000000"/>
-              </a:buClr>
-              <a:buFont typeface="Arial"/>
-              <a:buChar char="•"/>
-            </a:pPr>
-            <a:r>
-              <a:rPr lang="de-DE" sz="1500" b="0" u="none" strike="noStrike">
-                <a:solidFill>
-                  <a:schemeClr val="dk1"/>
-                </a:solidFill>
-                <a:effectLst/>
-                <a:uFillTx/>
-                <a:latin typeface="Calibri"/>
-              </a:rPr>
-              <a:t>Dritte Ebene</a:t>
-            </a:r>
-            <a:endParaRPr lang="de-DE" sz="1500" b="0" u="none" strike="noStrike">
-              <a:solidFill>
-                <a:srgbClr val="000000"/>
-              </a:solidFill>
-              <a:effectLst/>
-              <a:uFillTx/>
-              <a:latin typeface="Arial"/>
-            </a:endParaRPr>
-          </a:p>
-          <a:p>
-            <a:pPr marL="1200240" lvl="3" indent="-171360" defTabSz="685800">
-              <a:lnSpc>
-                <a:spcPct val="90000"/>
-              </a:lnSpc>
-              <a:spcBef>
-                <a:spcPts val="374"/>
-              </a:spcBef>
-              <a:buClr>
-                <a:srgbClr val="000000"/>
-              </a:buClr>
-              <a:buFont typeface="Arial"/>
-              <a:buChar char="•"/>
-            </a:pPr>
-            <a:r>
-              <a:rPr lang="de-DE" sz="1350" b="0" u="none" strike="noStrike">
-                <a:solidFill>
-                  <a:schemeClr val="dk1"/>
-                </a:solidFill>
-                <a:effectLst/>
-                <a:uFillTx/>
-                <a:latin typeface="Calibri"/>
-              </a:rPr>
-              <a:t>Vierte Ebene</a:t>
-            </a:r>
-            <a:endParaRPr lang="de-DE" sz="1350" b="0" u="none" strike="noStrike">
-              <a:solidFill>
-                <a:srgbClr val="000000"/>
-              </a:solidFill>
-              <a:effectLst/>
-              <a:uFillTx/>
-              <a:latin typeface="Arial"/>
-            </a:endParaRPr>
-          </a:p>
-          <a:p>
-            <a:pPr marL="1542960" lvl="4" indent="-171360" defTabSz="685800">
-              <a:lnSpc>
-                <a:spcPct val="90000"/>
-              </a:lnSpc>
-              <a:spcBef>
-                <a:spcPts val="374"/>
-              </a:spcBef>
-              <a:buClr>
-                <a:srgbClr val="000000"/>
-              </a:buClr>
-              <a:buFont typeface="Arial"/>
-              <a:buChar char="•"/>
-            </a:pPr>
-            <a:r>
-              <a:rPr lang="de-DE" sz="1350" b="0" u="none" strike="noStrike">
-                <a:solidFill>
-                  <a:schemeClr val="dk1"/>
-                </a:solidFill>
-                <a:effectLst/>
-                <a:uFillTx/>
-                <a:latin typeface="Calibri"/>
-              </a:rPr>
-              <a:t>Fünfte Ebene</a:t>
-            </a:r>
-            <a:endParaRPr lang="de-DE" sz="1350" b="0" u="none" strike="noStrike">
-              <a:solidFill>
-                <a:srgbClr val="000000"/>
-              </a:solidFill>
-              <a:effectLst/>
-              <a:uFillTx/>
-              <a:latin typeface="Arial"/>
-            </a:endParaRPr>
-          </a:p>
-        </p:txBody>
-      </p:sp>
-      <p:sp>
-        <p:nvSpPr>
-          <p:cNvPr id="42" name="PlaceHolder 4"/>
-          <p:cNvSpPr>
-            <a:spLocks noGrp="1"/>
-          </p:cNvSpPr>
-          <p:nvPr>
-            <p:ph type="body"/>
-          </p:nvPr>
-        </p:nvSpPr>
-        <p:spPr>
-          <a:xfrm>
-            <a:off x="3471840" y="2428200"/>
-            <a:ext cx="2913840" cy="1188360"/>
-          </a:xfrm>
-          <a:prstGeom prst="rect">
-            <a:avLst/>
-          </a:prstGeom>
-          <a:noFill/>
-          <a:ln w="0">
-            <a:noFill/>
-          </a:ln>
-        </p:spPr>
-        <p:txBody>
-          <a:bodyPr lIns="91440" rIns="91440" tIns="45720" bIns="45720" anchor="b">
-            <a:noAutofit/>
-          </a:bodyPr>
-          <a:p>
-            <a:pPr indent="0" defTabSz="685800">
-              <a:lnSpc>
-                <a:spcPct val="90000"/>
-              </a:lnSpc>
-              <a:spcBef>
-                <a:spcPts val="751"/>
-              </a:spcBef>
-              <a:buNone/>
-              <a:tabLst>
-                <a:tab algn="l" pos="0"/>
-              </a:tabLst>
-            </a:pPr>
-            <a:r>
-              <a:rPr lang="de-DE" sz="1800" b="1" u="none" strike="noStrike">
-                <a:solidFill>
-                  <a:schemeClr val="dk1"/>
-                </a:solidFill>
-                <a:effectLst/>
-                <a:uFillTx/>
-                <a:latin typeface="Calibri"/>
-              </a:rPr>
-              <a:t>Mastertextformat bearbeiten</a:t>
-            </a:r>
-            <a:endParaRPr lang="de-DE" sz="1800" b="0" u="none" strike="noStrike">
-              <a:solidFill>
-                <a:srgbClr val="000000"/>
-              </a:solidFill>
-              <a:effectLst/>
-              <a:uFillTx/>
-              <a:latin typeface="Arial"/>
-            </a:endParaRPr>
-          </a:p>
-        </p:txBody>
-      </p:sp>
-      <p:sp>
-        <p:nvSpPr>
-          <p:cNvPr id="43" name="PlaceHolder 5"/>
-          <p:cNvSpPr>
-            <a:spLocks noGrp="1"/>
-          </p:cNvSpPr>
-          <p:nvPr>
-            <p:ph type="body"/>
-          </p:nvPr>
-        </p:nvSpPr>
-        <p:spPr>
-          <a:xfrm>
-            <a:off x="3471840" y="3618360"/>
-            <a:ext cx="2913840" cy="5320440"/>
-          </a:xfrm>
-          <a:prstGeom prst="rect">
-            <a:avLst/>
-          </a:prstGeom>
-          <a:noFill/>
-          <a:ln w="0">
-            <a:noFill/>
-          </a:ln>
-        </p:spPr>
-        <p:txBody>
-          <a:bodyPr lIns="91440" rIns="91440" tIns="45720" bIns="45720" anchor="t">
-            <a:noAutofit/>
-          </a:bodyPr>
-          <a:p>
-            <a:pPr marL="171360" indent="-171360" defTabSz="685800">
-              <a:lnSpc>
-                <a:spcPct val="90000"/>
-              </a:lnSpc>
-              <a:spcBef>
-                <a:spcPts val="751"/>
-              </a:spcBef>
-              <a:buClr>
-                <a:srgbClr val="000000"/>
-              </a:buClr>
-              <a:buFont typeface="Arial"/>
-              <a:buChar char="•"/>
-            </a:pPr>
-            <a:r>
-              <a:rPr lang="de-DE" sz="2100" b="0" u="none" strike="noStrike">
-                <a:solidFill>
-                  <a:schemeClr val="dk1"/>
-                </a:solidFill>
-                <a:effectLst/>
-                <a:uFillTx/>
-                <a:latin typeface="Calibri"/>
-              </a:rPr>
-              <a:t>Mastertextformat bearbeiten</a:t>
-            </a:r>
-            <a:endParaRPr lang="de-DE" sz="2100" b="0" u="none" strike="noStrike">
-              <a:solidFill>
-                <a:srgbClr val="000000"/>
-              </a:solidFill>
-              <a:effectLst/>
-              <a:uFillTx/>
-              <a:latin typeface="Arial"/>
-            </a:endParaRPr>
-          </a:p>
-          <a:p>
-            <a:pPr marL="514440" lvl="1" indent="-171360" defTabSz="685800">
-              <a:lnSpc>
-                <a:spcPct val="90000"/>
-              </a:lnSpc>
-              <a:spcBef>
-                <a:spcPts val="374"/>
-              </a:spcBef>
-              <a:buClr>
-                <a:srgbClr val="000000"/>
-              </a:buClr>
-              <a:buFont typeface="Arial"/>
-              <a:buChar char="•"/>
-            </a:pPr>
-            <a:r>
-              <a:rPr lang="de-DE" sz="1800" b="0" u="none" strike="noStrike">
-                <a:solidFill>
-                  <a:schemeClr val="dk1"/>
-                </a:solidFill>
-                <a:effectLst/>
-                <a:uFillTx/>
-                <a:latin typeface="Calibri"/>
-              </a:rPr>
-              <a:t>Zweite Ebene</a:t>
-            </a:r>
-            <a:endParaRPr lang="de-DE" sz="1800" b="0" u="none" strike="noStrike">
-              <a:solidFill>
-                <a:srgbClr val="000000"/>
-              </a:solidFill>
-              <a:effectLst/>
-              <a:uFillTx/>
-              <a:latin typeface="Arial"/>
-            </a:endParaRPr>
-          </a:p>
-          <a:p>
-            <a:pPr marL="857160" lvl="2" indent="-171360" defTabSz="685800">
-              <a:lnSpc>
-                <a:spcPct val="90000"/>
-              </a:lnSpc>
-              <a:spcBef>
-                <a:spcPts val="374"/>
-              </a:spcBef>
-              <a:buClr>
-                <a:srgbClr val="000000"/>
-              </a:buClr>
-              <a:buFont typeface="Arial"/>
-              <a:buChar char="•"/>
-            </a:pPr>
-            <a:r>
-              <a:rPr lang="de-DE" sz="1500" b="0" u="none" strike="noStrike">
-                <a:solidFill>
-                  <a:schemeClr val="dk1"/>
-                </a:solidFill>
-                <a:effectLst/>
-                <a:uFillTx/>
-                <a:latin typeface="Calibri"/>
-              </a:rPr>
-              <a:t>Dritte Ebene</a:t>
-            </a:r>
-            <a:endParaRPr lang="de-DE" sz="1500" b="0" u="none" strike="noStrike">
-              <a:solidFill>
-                <a:srgbClr val="000000"/>
-              </a:solidFill>
-              <a:effectLst/>
-              <a:uFillTx/>
-              <a:latin typeface="Arial"/>
-            </a:endParaRPr>
-          </a:p>
-          <a:p>
-            <a:pPr marL="1200240" lvl="3" indent="-171360" defTabSz="685800">
-              <a:lnSpc>
-                <a:spcPct val="90000"/>
-              </a:lnSpc>
-              <a:spcBef>
-                <a:spcPts val="374"/>
-              </a:spcBef>
-              <a:buClr>
-                <a:srgbClr val="000000"/>
-              </a:buClr>
-              <a:buFont typeface="Arial"/>
-              <a:buChar char="•"/>
-            </a:pPr>
-            <a:r>
-              <a:rPr lang="de-DE" sz="1350" b="0" u="none" strike="noStrike">
-                <a:solidFill>
-                  <a:schemeClr val="dk1"/>
-                </a:solidFill>
-                <a:effectLst/>
-                <a:uFillTx/>
-                <a:latin typeface="Calibri"/>
-              </a:rPr>
-              <a:t>Vierte Ebene</a:t>
-            </a:r>
-            <a:endParaRPr lang="de-DE" sz="1350" b="0" u="none" strike="noStrike">
-              <a:solidFill>
-                <a:srgbClr val="000000"/>
-              </a:solidFill>
-              <a:effectLst/>
-              <a:uFillTx/>
-              <a:latin typeface="Arial"/>
-            </a:endParaRPr>
-          </a:p>
-          <a:p>
-            <a:pPr marL="1542960" lvl="4" indent="-171360" defTabSz="685800">
-              <a:lnSpc>
-                <a:spcPct val="90000"/>
-              </a:lnSpc>
-              <a:spcBef>
-                <a:spcPts val="374"/>
-              </a:spcBef>
-              <a:buClr>
-                <a:srgbClr val="000000"/>
-              </a:buClr>
-              <a:buFont typeface="Arial"/>
-              <a:buChar char="•"/>
-            </a:pPr>
-            <a:r>
-              <a:rPr lang="de-DE" sz="1350" b="0" u="none" strike="noStrike">
-                <a:solidFill>
-                  <a:schemeClr val="dk1"/>
-                </a:solidFill>
-                <a:effectLst/>
-                <a:uFillTx/>
-                <a:latin typeface="Calibri"/>
-              </a:rPr>
-              <a:t>Fünfte Ebene</a:t>
-            </a:r>
-            <a:endParaRPr lang="de-DE" sz="1350" b="0" u="none" strike="noStrike">
-              <a:solidFill>
-                <a:srgbClr val="000000"/>
-              </a:solidFill>
-              <a:effectLst/>
-              <a:uFillTx/>
-              <a:latin typeface="Arial"/>
-            </a:endParaRPr>
-          </a:p>
-        </p:txBody>
-      </p:sp>
-      <p:sp>
-        <p:nvSpPr>
-          <p:cNvPr id="44" name="PlaceHolder 6"/>
-          <p:cNvSpPr>
-            <a:spLocks noGrp="1"/>
-          </p:cNvSpPr>
-          <p:nvPr>
-            <p:ph type="dt" idx="22"/>
-          </p:nvPr>
-        </p:nvSpPr>
-        <p:spPr>
-          <a:xfrm>
-            <a:off x="471600" y="9181440"/>
-            <a:ext cx="1541160" cy="525600"/>
-          </a:xfrm>
-          <a:prstGeom prst="rect">
-            <a:avLst/>
-          </a:prstGeom>
-          <a:noFill/>
-          <a:ln w="0">
-            <a:noFill/>
-          </a:ln>
-        </p:spPr>
-        <p:txBody>
-          <a:bodyPr lIns="91440" rIns="91440" tIns="45720" bIns="45720" anchor="ctr">
-            <a:noAutofit/>
-          </a:bodyPr>
-          <a:lstStyle>
-            <a:lvl1pPr indent="0" defTabSz="457200">
-              <a:lnSpc>
-                <a:spcPct val="100000"/>
-              </a:lnSpc>
-              <a:buNone/>
-              <a:tabLst>
-                <a:tab algn="l" pos="0"/>
-              </a:tabLst>
-              <a:defRPr lang="de-DE" sz="900" b="0" u="none" strike="noStrike">
-                <a:solidFill>
-                  <a:schemeClr val="dk1">
-                    <a:tint val="75000"/>
-                  </a:schemeClr>
-                </a:solidFill>
-                <a:effectLst/>
-                <a:uFillTx/>
-                <a:latin typeface="Calibri"/>
-              </a:defRPr>
-            </a:lvl1pPr>
-          </a:lstStyle>
-          <a:p>
-            <a:pPr indent="0" defTabSz="457200">
-              <a:lnSpc>
-                <a:spcPct val="100000"/>
-              </a:lnSpc>
-              <a:buNone/>
-              <a:tabLst>
-                <a:tab algn="l" pos="0"/>
-              </a:tabLst>
-            </a:pPr>
-            <a:r>
-              <a:rPr lang="de-DE" sz="900" b="0" u="none" strike="noStrike">
-                <a:solidFill>
-                  <a:schemeClr val="dk1">
-                    <a:tint val="75000"/>
-                  </a:schemeClr>
-                </a:solidFill>
-                <a:effectLst/>
-                <a:uFillTx/>
-                <a:latin typeface="Calibri"/>
-              </a:rPr>
-              <a:t>&lt;Datum/Uhrzeit&gt;</a:t>
-            </a:r>
-            <a:endParaRPr lang="de-DE" sz="900" b="0" u="none" strike="noStrike">
-              <a:solidFill>
-                <a:srgbClr val="000000"/>
-              </a:solidFill>
-              <a:effectLst/>
-              <a:uFillTx/>
-              <a:latin typeface="Times New Roman"/>
-            </a:endParaRPr>
-          </a:p>
-        </p:txBody>
-      </p:sp>
-      <p:sp>
-        <p:nvSpPr>
-          <p:cNvPr id="45" name="PlaceHolder 7"/>
-          <p:cNvSpPr>
-            <a:spLocks noGrp="1"/>
-          </p:cNvSpPr>
-          <p:nvPr>
-            <p:ph type="ftr" idx="23"/>
-          </p:nvPr>
-        </p:nvSpPr>
-        <p:spPr>
-          <a:xfrm>
-            <a:off x="2271600" y="9181440"/>
-            <a:ext cx="2312640" cy="525600"/>
-          </a:xfrm>
-          <a:prstGeom prst="rect">
-            <a:avLst/>
-          </a:prstGeom>
-          <a:noFill/>
-          <a:ln w="0">
-            <a:noFill/>
-          </a:ln>
-        </p:spPr>
-        <p:txBody>
-          <a:bodyPr lIns="91440" rIns="91440" tIns="45720" bIns="45720" anchor="ctr">
-            <a:noAutofit/>
-          </a:bodyPr>
-          <a:lstStyle>
-            <a:lvl1pPr indent="0" algn="ctr">
-              <a:lnSpc>
-                <a:spcPct val="100000"/>
-              </a:lnSpc>
-              <a:buNone/>
-              <a:tabLst>
-                <a:tab algn="l" pos="0"/>
-              </a:tabLst>
-              <a:defRPr lang="de-DE" sz="1400" b="0" u="none" strike="noStrike">
-                <a:solidFill>
-                  <a:srgbClr val="000000"/>
-                </a:solidFill>
-                <a:effectLst/>
-                <a:uFillTx/>
-                <a:latin typeface="Times New Roman"/>
-              </a:defRPr>
-            </a:lvl1pPr>
-          </a:lstStyle>
-          <a:p>
-            <a:pPr indent="0" algn="ctr">
-              <a:lnSpc>
-                <a:spcPct val="100000"/>
-              </a:lnSpc>
-              <a:buNone/>
-              <a:tabLst>
-                <a:tab algn="l" pos="0"/>
-              </a:tabLst>
-            </a:pPr>
-            <a:r>
-              <a:rPr lang="de-DE" sz="1400" b="0" u="none" strike="noStrike">
-                <a:solidFill>
-                  <a:srgbClr val="000000"/>
-                </a:solidFill>
-                <a:effectLst/>
-                <a:uFillTx/>
-                <a:latin typeface="Times New Roman"/>
-              </a:rPr>
-              <a:t>&lt;Fußzeile&gt;</a:t>
-            </a:r>
-            <a:endParaRPr lang="de-DE" sz="1400" b="0" u="none" strike="noStrike">
-              <a:solidFill>
-                <a:srgbClr val="000000"/>
-              </a:solidFill>
-              <a:effectLst/>
-              <a:uFillTx/>
-              <a:latin typeface="Times New Roman"/>
-            </a:endParaRPr>
-          </a:p>
-        </p:txBody>
-      </p:sp>
-      <p:sp>
-        <p:nvSpPr>
-          <p:cNvPr id="46" name="PlaceHolder 8"/>
-          <p:cNvSpPr>
-            <a:spLocks noGrp="1"/>
-          </p:cNvSpPr>
-          <p:nvPr>
-            <p:ph type="sldNum" idx="24"/>
-          </p:nvPr>
-        </p:nvSpPr>
-        <p:spPr>
-          <a:xfrm>
-            <a:off x="4843440" y="9181440"/>
-            <a:ext cx="1541160" cy="525600"/>
-          </a:xfrm>
-          <a:prstGeom prst="rect">
-            <a:avLst/>
-          </a:prstGeom>
-          <a:noFill/>
-          <a:ln w="0">
-            <a:noFill/>
-          </a:ln>
-        </p:spPr>
-        <p:txBody>
-          <a:bodyPr lIns="91440" rIns="91440" tIns="45720" bIns="45720" anchor="ctr">
-            <a:noAutofit/>
-          </a:bodyPr>
-          <a:lstStyle>
-            <a:lvl1pPr indent="0" algn="r" defTabSz="457200">
-              <a:lnSpc>
-                <a:spcPct val="100000"/>
-              </a:lnSpc>
-              <a:buNone/>
-              <a:tabLst>
-                <a:tab algn="l" pos="0"/>
-              </a:tabLst>
-              <a:defRPr lang="de-DE" sz="900" b="0" u="none" strike="noStrike">
-                <a:solidFill>
-                  <a:schemeClr val="dk1">
-                    <a:tint val="75000"/>
-                  </a:schemeClr>
-                </a:solidFill>
-                <a:effectLst/>
-                <a:uFillTx/>
-                <a:latin typeface="Calibri"/>
-              </a:defRPr>
-            </a:lvl1pPr>
-          </a:lstStyle>
-          <a:p>
-            <a:pPr indent="0" algn="r" defTabSz="457200">
-              <a:lnSpc>
-                <a:spcPct val="100000"/>
-              </a:lnSpc>
-              <a:buNone/>
-              <a:tabLst>
-                <a:tab algn="l" pos="0"/>
-              </a:tabLst>
-            </a:pPr>
-            <a:fld id="{3095D816-ECB6-45C1-80E7-F874756930EB}" type="slidenum">
-              <a:rPr lang="de-DE" sz="900" b="0" u="none" strike="noStrike">
-                <a:solidFill>
-                  <a:schemeClr val="dk1">
-                    <a:tint val="75000"/>
-                  </a:schemeClr>
-                </a:solidFill>
-                <a:effectLst/>
-                <a:uFillTx/>
-                <a:latin typeface="Calibri"/>
-              </a:rPr>
-              <a:t>&lt;Foliennummer&gt;</a:t>
-            </a:fld>
-            <a:endParaRPr lang="de-DE" sz="900" b="0" u="none" strike="noStrike">
-              <a:solidFill>
-                <a:srgbClr val="000000"/>
-              </a:solidFill>
-              <a:effectLst/>
-              <a:uFillTx/>
-              <a:latin typeface="Times New Roman"/>
-            </a:endParaRPr>
-          </a:p>
-        </p:txBody>
-      </p:sp>
-    </p:spTree>
-  </p:cSld>
-</p:sldLayout>
-</file>
-
-<file path=ppt/slideLayouts/slideLayout9.xml><?xml version="1.0" encoding="utf-8"?>
-<p:sldLayout xmlns:a="http://schemas.openxmlformats.org/drawingml/2006/main" xmlns:p="http://schemas.openxmlformats.org/presentationml/2006/main" xmlns:r="http://schemas.openxmlformats.org/officeDocument/2006/relationships" xmlns:p14="http://schemas.microsoft.com/office/powerpoint/2010/main" xmlns:p15="http://schemas.microsoft.com/office/powerpoint/2012/main" xmlns:mc="http://schemas.openxmlformats.org/markup-compatibility/2006" type="titleOnly" preserve="1">
-  <p:cSld name="Nur Titel">
-    <p:bg>
-      <p:bgPr>
-        <a:solidFill>
-          <a:srgbClr val="ffffff"/>
-        </a:solidFill>
-      </p:bgPr>
-    </p:bg>
-    <p:spTree>
-      <p:nvGrpSpPr>
-        <p:cNvPr id="1" name=""/>
-        <p:cNvGrpSpPr/>
-        <p:nvPr/>
-      </p:nvGrpSpPr>
-      <p:grpSpPr>
-        <a:xfrm>
-          <a:off x="0" y="0"/>
-          <a:ext cx="0" cy="0"/>
-          <a:chOff x="0" y="0"/>
-          <a:chExt cx="0" cy="0"/>
-        </a:xfrm>
-      </p:grpSpPr>
-      <p:sp>
-        <p:nvSpPr>
-          <p:cNvPr id="47" name="PlaceHolder 1"/>
-          <p:cNvSpPr>
-            <a:spLocks noGrp="1"/>
-          </p:cNvSpPr>
-          <p:nvPr>
-            <p:ph type="title"/>
-          </p:nvPr>
-        </p:nvSpPr>
-        <p:spPr>
-          <a:xfrm>
-            <a:off x="471600" y="527400"/>
-            <a:ext cx="5913360" cy="1913040"/>
-          </a:xfrm>
-          <a:prstGeom prst="rect">
-            <a:avLst/>
-          </a:prstGeom>
-          <a:noFill/>
-          <a:ln w="0">
-            <a:noFill/>
-          </a:ln>
-        </p:spPr>
-        <p:txBody>
-          <a:bodyPr lIns="91440" rIns="91440" tIns="45720" bIns="45720" anchor="ctr">
-            <a:noAutofit/>
-          </a:bodyPr>
-          <a:p>
-            <a:pPr indent="0" defTabSz="685800">
-              <a:lnSpc>
-                <a:spcPct val="90000"/>
-              </a:lnSpc>
-              <a:buNone/>
-              <a:tabLst>
-                <a:tab algn="l" pos="0"/>
-              </a:tabLst>
-            </a:pPr>
-            <a:r>
-              <a:rPr lang="de-DE" sz="3300" b="0" u="none" strike="noStrike">
-                <a:solidFill>
-                  <a:schemeClr val="dk1"/>
-                </a:solidFill>
-                <a:effectLst/>
-                <a:uFillTx/>
-                <a:latin typeface="Calibri Light"/>
-              </a:rPr>
-              <a:t>Mastertitelformat bearbeiten</a:t>
-            </a:r>
-            <a:endParaRPr lang="de-DE" sz="3300" b="0" u="none" strike="noStrike">
-              <a:solidFill>
-                <a:srgbClr val="000000"/>
-              </a:solidFill>
-              <a:effectLst/>
-              <a:uFillTx/>
-              <a:latin typeface="Arial"/>
-            </a:endParaRPr>
-          </a:p>
-        </p:txBody>
-      </p:sp>
-      <p:sp>
-        <p:nvSpPr>
-          <p:cNvPr id="48" name="PlaceHolder 2"/>
+          <p:cNvPr id="43" name="PlaceHolder 3"/>
           <p:cNvSpPr>
             <a:spLocks noGrp="1"/>
           </p:cNvSpPr>
@@ -5585,7 +5585,7 @@
         <p:spPr>
           <a:xfrm>
             <a:off x="471600" y="9181440"/>
-            <a:ext cx="1541160" cy="525600"/>
+            <a:ext cx="1540800" cy="525240"/>
           </a:xfrm>
           <a:prstGeom prst="rect">
             <a:avLst/>
@@ -5656,7 +5656,7 @@
       </p:sp>
       <p:sp>
         <p:nvSpPr>
-          <p:cNvPr id="49" name="PlaceHolder 3"/>
+          <p:cNvPr id="44" name="PlaceHolder 4"/>
           <p:cNvSpPr>
             <a:spLocks noGrp="1"/>
           </p:cNvSpPr>
@@ -5667,7 +5667,7 @@
         <p:spPr>
           <a:xfrm>
             <a:off x="2271600" y="9181440"/>
-            <a:ext cx="2312640" cy="525600"/>
+            <a:ext cx="2312280" cy="525240"/>
           </a:xfrm>
           <a:prstGeom prst="rect">
             <a:avLst/>
@@ -5734,7 +5734,7 @@
       </p:sp>
       <p:sp>
         <p:nvSpPr>
-          <p:cNvPr id="50" name="PlaceHolder 4"/>
+          <p:cNvPr id="45" name="PlaceHolder 5"/>
           <p:cNvSpPr>
             <a:spLocks noGrp="1"/>
           </p:cNvSpPr>
@@ -5745,7 +5745,7 @@
         <p:spPr>
           <a:xfrm>
             <a:off x="4843440" y="9181440"/>
-            <a:ext cx="1541160" cy="525600"/>
+            <a:ext cx="1540800" cy="525240"/>
           </a:xfrm>
           <a:prstGeom prst="rect">
             <a:avLst/>
@@ -5790,7 +5790,7 @@
                 <a:tab algn="l" pos="0"/>
               </a:tabLst>
             </a:pPr>
-            <a:fld id="{841E211C-A2B2-4971-B1E4-7FF142285C97}" type="slidenum">
+            <a:fld id="{3534D701-5183-4624-859D-94C48F9F8B39}" type="slidenum">
               <a:rPr lang="de-DE" sz="900" b="0" u="none" strike="noStrike">
                 <a:solidFill>
                   <a:schemeClr val="dk1">
@@ -5881,7 +5881,7 @@
         <p:spPr>
           <a:xfrm>
             <a:off x="2269080" y="153360"/>
-            <a:ext cx="3414600" cy="730080"/>
+            <a:ext cx="3414240" cy="730080"/>
           </a:xfrm>
           <a:prstGeom prst="rect">
             <a:avLst/>
@@ -5966,7 +5966,7 @@
         <p:spPr>
           <a:xfrm>
             <a:off x="2251440" y="1010880"/>
-            <a:ext cx="4188600" cy="1013760"/>
+            <a:ext cx="4188240" cy="1013400"/>
           </a:xfrm>
           <a:prstGeom prst="rect">
             <a:avLst/>
@@ -6192,7 +6192,7 @@
         <p:spPr>
           <a:xfrm>
             <a:off x="355320" y="2082600"/>
-            <a:ext cx="5958360" cy="1800"/>
+            <a:ext cx="5958720" cy="2160"/>
           </a:xfrm>
           <a:prstGeom prst="straightConnector1">
             <a:avLst/>
@@ -6213,7 +6213,7 @@
         <p:spPr>
           <a:xfrm>
             <a:off x="374760" y="2228760"/>
-            <a:ext cx="1433160" cy="306000"/>
+            <a:ext cx="1432800" cy="305640"/>
           </a:xfrm>
           <a:prstGeom prst="rect">
             <a:avLst/>
@@ -6270,8 +6270,8 @@
         </p:nvSpPr>
         <p:spPr>
           <a:xfrm>
-            <a:off x="736560" y="2530800"/>
-            <a:ext cx="5743080" cy="272520"/>
+            <a:off x="628560" y="2530800"/>
+            <a:ext cx="5742720" cy="272520"/>
           </a:xfrm>
           <a:prstGeom prst="rect">
             <a:avLst/>
@@ -6329,7 +6329,7 @@
         <p:spPr>
           <a:xfrm>
             <a:off x="2724120" y="3614760"/>
-            <a:ext cx="2408040" cy="306000"/>
+            <a:ext cx="2407680" cy="305640"/>
           </a:xfrm>
           <a:prstGeom prst="rect">
             <a:avLst/>
@@ -6387,7 +6387,7 @@
         <p:spPr>
           <a:xfrm>
             <a:off x="1202040" y="3932640"/>
-            <a:ext cx="5457240" cy="5606280"/>
+            <a:ext cx="5456880" cy="5606280"/>
           </a:xfrm>
           <a:prstGeom prst="rect">
             <a:avLst/>
@@ -6979,7 +6979,7 @@
         <p:spPr>
           <a:xfrm>
             <a:off x="291960" y="126720"/>
-            <a:ext cx="6008760" cy="1800"/>
+            <a:ext cx="6009120" cy="2160"/>
           </a:xfrm>
           <a:prstGeom prst="straightConnector1">
             <a:avLst/>
@@ -7000,7 +7000,7 @@
         <p:spPr>
           <a:xfrm>
             <a:off x="3208320" y="9675000"/>
-            <a:ext cx="963000" cy="228960"/>
+            <a:ext cx="962640" cy="228600"/>
           </a:xfrm>
           <a:prstGeom prst="rect">
             <a:avLst/>
@@ -7057,13 +7057,13 @@
         </p:nvPicPr>
         <p:blipFill>
           <a:blip r:embed="rId3"/>
-          <a:srcRect l="17058" t="10276" r="8874" b="25742"/>
+          <a:srcRect l="17056" t="10276" r="8874" b="25739"/>
           <a:stretch/>
         </p:blipFill>
         <p:spPr>
           <a:xfrm>
             <a:off x="495360" y="213480"/>
-            <a:ext cx="1560240" cy="1798200"/>
+            <a:ext cx="1559880" cy="1797840"/>
           </a:xfrm>
           <a:prstGeom prst="rect">
             <a:avLst/>
@@ -7083,7 +7083,7 @@
         <p:spPr>
           <a:xfrm>
             <a:off x="-44640" y="5111640"/>
-            <a:ext cx="1344240" cy="821160"/>
+            <a:ext cx="1343880" cy="821160"/>
           </a:xfrm>
           <a:prstGeom prst="rect">
             <a:avLst/>
@@ -7168,7 +7168,7 @@
         <p:spPr>
           <a:xfrm flipH="1">
             <a:off x="1149120" y="3860640"/>
-            <a:ext cx="20160" cy="5855760"/>
+            <a:ext cx="20520" cy="5856120"/>
           </a:xfrm>
           <a:prstGeom prst="straightConnector1">
             <a:avLst/>
@@ -7189,7 +7189,7 @@
         <p:spPr>
           <a:xfrm>
             <a:off x="-36000" y="7053120"/>
-            <a:ext cx="1344240" cy="821160"/>
+            <a:ext cx="1343880" cy="821160"/>
           </a:xfrm>
           <a:prstGeom prst="rect">
             <a:avLst/>
@@ -7274,7 +7274,7 @@
         <p:spPr>
           <a:xfrm>
             <a:off x="-36000" y="8545320"/>
-            <a:ext cx="1344240" cy="821160"/>
+            <a:ext cx="1343880" cy="821160"/>
           </a:xfrm>
           <a:prstGeom prst="rect">
             <a:avLst/>
@@ -7332,7 +7332,7 @@
         <p:spPr>
           <a:xfrm>
             <a:off x="42840" y="3972960"/>
-            <a:ext cx="1158480" cy="458280"/>
+            <a:ext cx="1158120" cy="457920"/>
           </a:xfrm>
           <a:prstGeom prst="rect">
             <a:avLst/>
@@ -7420,7 +7420,7 @@
         <p:spPr>
           <a:xfrm>
             <a:off x="2426040" y="188280"/>
-            <a:ext cx="2452320" cy="306000"/>
+            <a:ext cx="2451960" cy="305640"/>
           </a:xfrm>
           <a:prstGeom prst="rect">
             <a:avLst/>
@@ -7478,7 +7478,7 @@
         <p:spPr>
           <a:xfrm>
             <a:off x="1346040" y="540000"/>
-            <a:ext cx="5510160" cy="3841560"/>
+            <a:ext cx="5509800" cy="3841560"/>
           </a:xfrm>
           <a:prstGeom prst="rect">
             <a:avLst/>
@@ -7884,7 +7884,7 @@
         <p:spPr>
           <a:xfrm>
             <a:off x="2700000" y="4860000"/>
-            <a:ext cx="2106360" cy="306000"/>
+            <a:ext cx="2106000" cy="305640"/>
           </a:xfrm>
           <a:prstGeom prst="rect">
             <a:avLst/>
@@ -7942,7 +7942,7 @@
         <p:spPr>
           <a:xfrm>
             <a:off x="1356120" y="5220000"/>
-            <a:ext cx="5510160" cy="275040"/>
+            <a:ext cx="5509800" cy="274680"/>
           </a:xfrm>
           <a:prstGeom prst="rect">
             <a:avLst/>
@@ -8000,7 +8000,7 @@
         <p:spPr>
           <a:xfrm>
             <a:off x="1346040" y="5829840"/>
-            <a:ext cx="5611680" cy="829080"/>
+            <a:ext cx="5611320" cy="828720"/>
           </a:xfrm>
           <a:prstGeom prst="rect">
             <a:avLst/>
@@ -8117,7 +8117,7 @@
         <p:spPr>
           <a:xfrm>
             <a:off x="3208320" y="9675000"/>
-            <a:ext cx="963000" cy="228960"/>
+            <a:ext cx="962640" cy="228600"/>
           </a:xfrm>
           <a:prstGeom prst="rect">
             <a:avLst/>
@@ -8175,7 +8175,7 @@
         <p:spPr>
           <a:xfrm>
             <a:off x="2994120" y="6597360"/>
-            <a:ext cx="1306440" cy="306000"/>
+            <a:ext cx="1306080" cy="305640"/>
           </a:xfrm>
           <a:prstGeom prst="rect">
             <a:avLst/>
@@ -8233,7 +8233,7 @@
         <p:spPr>
           <a:xfrm>
             <a:off x="324000" y="6904440"/>
-            <a:ext cx="5789520" cy="1383120"/>
+            <a:ext cx="5789160" cy="1382760"/>
           </a:xfrm>
           <a:prstGeom prst="rect">
             <a:avLst/>
@@ -8681,7 +8681,7 @@
         <p:spPr>
           <a:xfrm>
             <a:off x="601200" y="8413920"/>
-            <a:ext cx="2130840" cy="1013760"/>
+            <a:ext cx="2130480" cy="1013400"/>
           </a:xfrm>
           <a:prstGeom prst="rect">
             <a:avLst/>
@@ -8838,7 +8838,7 @@
         <p:spPr>
           <a:xfrm>
             <a:off x="3510000" y="8442000"/>
-            <a:ext cx="2450880" cy="1013760"/>
+            <a:ext cx="2450520" cy="1013400"/>
           </a:xfrm>
           <a:prstGeom prst="rect">
             <a:avLst/>
@@ -8995,7 +8995,7 @@
         <p:spPr>
           <a:xfrm>
             <a:off x="1658160" y="7365240"/>
-            <a:ext cx="95040" cy="93960"/>
+            <a:ext cx="94680" cy="93600"/>
           </a:xfrm>
           <a:prstGeom prst="ellipse">
             <a:avLst/>
@@ -9053,7 +9053,7 @@
         <p:spPr>
           <a:xfrm>
             <a:off x="1803960" y="7360920"/>
-            <a:ext cx="95040" cy="93960"/>
+            <a:ext cx="94680" cy="93600"/>
           </a:xfrm>
           <a:prstGeom prst="ellipse">
             <a:avLst/>
@@ -9111,7 +9111,7 @@
         <p:spPr>
           <a:xfrm>
             <a:off x="1940400" y="7360920"/>
-            <a:ext cx="95040" cy="93960"/>
+            <a:ext cx="94680" cy="93600"/>
           </a:xfrm>
           <a:prstGeom prst="ellipse">
             <a:avLst/>
@@ -9169,7 +9169,7 @@
         <p:spPr>
           <a:xfrm>
             <a:off x="2076840" y="7360920"/>
-            <a:ext cx="95040" cy="93960"/>
+            <a:ext cx="94680" cy="93600"/>
           </a:xfrm>
           <a:prstGeom prst="ellipse">
             <a:avLst/>
@@ -9227,7 +9227,7 @@
         <p:spPr>
           <a:xfrm>
             <a:off x="2213280" y="7360920"/>
-            <a:ext cx="95040" cy="93960"/>
+            <a:ext cx="94680" cy="93600"/>
           </a:xfrm>
           <a:prstGeom prst="ellipse">
             <a:avLst/>
@@ -9285,7 +9285,7 @@
         <p:spPr>
           <a:xfrm>
             <a:off x="1663920" y="8066520"/>
-            <a:ext cx="95040" cy="93960"/>
+            <a:ext cx="94680" cy="93600"/>
           </a:xfrm>
           <a:prstGeom prst="ellipse">
             <a:avLst/>
@@ -9343,7 +9343,7 @@
         <p:spPr>
           <a:xfrm>
             <a:off x="1809360" y="8061840"/>
-            <a:ext cx="95040" cy="93960"/>
+            <a:ext cx="94680" cy="93600"/>
           </a:xfrm>
           <a:prstGeom prst="ellipse">
             <a:avLst/>
@@ -9401,7 +9401,7 @@
         <p:spPr>
           <a:xfrm>
             <a:off x="1945800" y="8061840"/>
-            <a:ext cx="95040" cy="93960"/>
+            <a:ext cx="94680" cy="93600"/>
           </a:xfrm>
           <a:prstGeom prst="ellipse">
             <a:avLst/>
@@ -9459,7 +9459,7 @@
         <p:spPr>
           <a:xfrm>
             <a:off x="2082240" y="8061840"/>
-            <a:ext cx="95040" cy="93960"/>
+            <a:ext cx="94680" cy="93600"/>
           </a:xfrm>
           <a:prstGeom prst="ellipse">
             <a:avLst/>
@@ -9515,7 +9515,7 @@
         <p:spPr>
           <a:xfrm>
             <a:off x="2218680" y="8061840"/>
-            <a:ext cx="95040" cy="93960"/>
+            <a:ext cx="94680" cy="93600"/>
           </a:xfrm>
           <a:prstGeom prst="ellipse">
             <a:avLst/>
@@ -9571,7 +9571,7 @@
         <p:spPr>
           <a:xfrm>
             <a:off x="3279600" y="8094600"/>
-            <a:ext cx="95040" cy="93960"/>
+            <a:ext cx="94680" cy="93600"/>
           </a:xfrm>
           <a:prstGeom prst="ellipse">
             <a:avLst/>
@@ -9629,7 +9629,7 @@
         <p:spPr>
           <a:xfrm>
             <a:off x="3425040" y="8089920"/>
-            <a:ext cx="95040" cy="93960"/>
+            <a:ext cx="94680" cy="93600"/>
           </a:xfrm>
           <a:prstGeom prst="ellipse">
             <a:avLst/>
@@ -9687,7 +9687,7 @@
         <p:spPr>
           <a:xfrm>
             <a:off x="3561480" y="8089920"/>
-            <a:ext cx="95040" cy="93960"/>
+            <a:ext cx="94680" cy="93600"/>
           </a:xfrm>
           <a:prstGeom prst="ellipse">
             <a:avLst/>
@@ -9745,7 +9745,7 @@
         <p:spPr>
           <a:xfrm>
             <a:off x="3697920" y="8089920"/>
-            <a:ext cx="95040" cy="93960"/>
+            <a:ext cx="94680" cy="93600"/>
           </a:xfrm>
           <a:prstGeom prst="ellipse">
             <a:avLst/>
@@ -9801,7 +9801,7 @@
         <p:spPr>
           <a:xfrm>
             <a:off x="3834360" y="8089920"/>
-            <a:ext cx="95040" cy="93960"/>
+            <a:ext cx="94680" cy="93600"/>
           </a:xfrm>
           <a:prstGeom prst="ellipse">
             <a:avLst/>
@@ -9857,7 +9857,7 @@
         <p:spPr>
           <a:xfrm>
             <a:off x="1658160" y="7707600"/>
-            <a:ext cx="95040" cy="93960"/>
+            <a:ext cx="94680" cy="93600"/>
           </a:xfrm>
           <a:prstGeom prst="ellipse">
             <a:avLst/>
@@ -9915,7 +9915,7 @@
         <p:spPr>
           <a:xfrm>
             <a:off x="1803960" y="7702920"/>
-            <a:ext cx="95040" cy="93960"/>
+            <a:ext cx="94680" cy="93600"/>
           </a:xfrm>
           <a:prstGeom prst="ellipse">
             <a:avLst/>
@@ -9973,7 +9973,7 @@
         <p:spPr>
           <a:xfrm>
             <a:off x="1940400" y="7702920"/>
-            <a:ext cx="95040" cy="93960"/>
+            <a:ext cx="94680" cy="93600"/>
           </a:xfrm>
           <a:prstGeom prst="ellipse">
             <a:avLst/>
@@ -10031,7 +10031,7 @@
         <p:spPr>
           <a:xfrm>
             <a:off x="2076840" y="7702920"/>
-            <a:ext cx="95040" cy="93960"/>
+            <a:ext cx="94680" cy="93600"/>
           </a:xfrm>
           <a:prstGeom prst="ellipse">
             <a:avLst/>
@@ -10089,7 +10089,7 @@
         <p:spPr>
           <a:xfrm>
             <a:off x="2213280" y="7702920"/>
-            <a:ext cx="95040" cy="93960"/>
+            <a:ext cx="94680" cy="93600"/>
           </a:xfrm>
           <a:prstGeom prst="ellipse">
             <a:avLst/>
@@ -10145,7 +10145,7 @@
         <p:spPr>
           <a:xfrm>
             <a:off x="3268080" y="7735680"/>
-            <a:ext cx="95040" cy="93960"/>
+            <a:ext cx="94680" cy="93600"/>
           </a:xfrm>
           <a:prstGeom prst="ellipse">
             <a:avLst/>
@@ -10203,7 +10203,7 @@
         <p:spPr>
           <a:xfrm>
             <a:off x="3413880" y="7731000"/>
-            <a:ext cx="95040" cy="93960"/>
+            <a:ext cx="94680" cy="93600"/>
           </a:xfrm>
           <a:prstGeom prst="ellipse">
             <a:avLst/>
@@ -10261,7 +10261,7 @@
         <p:spPr>
           <a:xfrm>
             <a:off x="3550320" y="7731000"/>
-            <a:ext cx="95040" cy="93960"/>
+            <a:ext cx="94680" cy="93600"/>
           </a:xfrm>
           <a:prstGeom prst="ellipse">
             <a:avLst/>
@@ -10319,7 +10319,7 @@
         <p:spPr>
           <a:xfrm>
             <a:off x="3686760" y="7731000"/>
-            <a:ext cx="95040" cy="93960"/>
+            <a:ext cx="94680" cy="93600"/>
           </a:xfrm>
           <a:prstGeom prst="ellipse">
             <a:avLst/>
@@ -10377,7 +10377,7 @@
         <p:spPr>
           <a:xfrm>
             <a:off x="3823200" y="7731000"/>
-            <a:ext cx="95040" cy="93960"/>
+            <a:ext cx="94680" cy="93600"/>
           </a:xfrm>
           <a:prstGeom prst="ellipse">
             <a:avLst/>
@@ -10433,7 +10433,7 @@
         <p:spPr>
           <a:xfrm>
             <a:off x="3279600" y="7365240"/>
-            <a:ext cx="95040" cy="93960"/>
+            <a:ext cx="94680" cy="93600"/>
           </a:xfrm>
           <a:prstGeom prst="ellipse">
             <a:avLst/>
@@ -10491,7 +10491,7 @@
         <p:spPr>
           <a:xfrm>
             <a:off x="3425040" y="7360920"/>
-            <a:ext cx="95040" cy="93960"/>
+            <a:ext cx="94680" cy="93600"/>
           </a:xfrm>
           <a:prstGeom prst="ellipse">
             <a:avLst/>
@@ -10549,7 +10549,7 @@
         <p:spPr>
           <a:xfrm>
             <a:off x="3561480" y="7360920"/>
-            <a:ext cx="95040" cy="93960"/>
+            <a:ext cx="94680" cy="93600"/>
           </a:xfrm>
           <a:prstGeom prst="ellipse">
             <a:avLst/>
@@ -10607,7 +10607,7 @@
         <p:spPr>
           <a:xfrm>
             <a:off x="3697920" y="7360920"/>
-            <a:ext cx="95040" cy="93960"/>
+            <a:ext cx="94680" cy="93600"/>
           </a:xfrm>
           <a:prstGeom prst="ellipse">
             <a:avLst/>
@@ -10665,7 +10665,7 @@
         <p:spPr>
           <a:xfrm>
             <a:off x="3834360" y="7360920"/>
-            <a:ext cx="95040" cy="93960"/>
+            <a:ext cx="94680" cy="93600"/>
           </a:xfrm>
           <a:prstGeom prst="ellipse">
             <a:avLst/>
@@ -10721,7 +10721,7 @@
         <p:spPr>
           <a:xfrm>
             <a:off x="5243040" y="7364520"/>
-            <a:ext cx="95040" cy="93960"/>
+            <a:ext cx="94680" cy="93600"/>
           </a:xfrm>
           <a:prstGeom prst="ellipse">
             <a:avLst/>
@@ -10779,7 +10779,7 @@
         <p:spPr>
           <a:xfrm>
             <a:off x="5388480" y="7359840"/>
-            <a:ext cx="95040" cy="93960"/>
+            <a:ext cx="94680" cy="93600"/>
           </a:xfrm>
           <a:prstGeom prst="ellipse">
             <a:avLst/>
@@ -10837,7 +10837,7 @@
         <p:spPr>
           <a:xfrm>
             <a:off x="5524920" y="7359840"/>
-            <a:ext cx="95040" cy="93960"/>
+            <a:ext cx="94680" cy="93600"/>
           </a:xfrm>
           <a:prstGeom prst="ellipse">
             <a:avLst/>
@@ -10895,7 +10895,7 @@
         <p:spPr>
           <a:xfrm>
             <a:off x="5661360" y="7359840"/>
-            <a:ext cx="95040" cy="93960"/>
+            <a:ext cx="94680" cy="93600"/>
           </a:xfrm>
           <a:prstGeom prst="ellipse">
             <a:avLst/>
@@ -10951,7 +10951,7 @@
         <p:spPr>
           <a:xfrm>
             <a:off x="5797800" y="7359840"/>
-            <a:ext cx="95040" cy="93960"/>
+            <a:ext cx="94680" cy="93600"/>
           </a:xfrm>
           <a:prstGeom prst="ellipse">
             <a:avLst/>
@@ -11007,7 +11007,7 @@
         <p:spPr>
           <a:xfrm>
             <a:off x="5243040" y="7707600"/>
-            <a:ext cx="95040" cy="93960"/>
+            <a:ext cx="94680" cy="93600"/>
           </a:xfrm>
           <a:prstGeom prst="ellipse">
             <a:avLst/>
@@ -11065,7 +11065,7 @@
         <p:spPr>
           <a:xfrm>
             <a:off x="5388480" y="7702920"/>
-            <a:ext cx="95040" cy="93960"/>
+            <a:ext cx="94680" cy="93600"/>
           </a:xfrm>
           <a:prstGeom prst="ellipse">
             <a:avLst/>
@@ -11123,7 +11123,7 @@
         <p:spPr>
           <a:xfrm>
             <a:off x="5524920" y="7702920"/>
-            <a:ext cx="95040" cy="93960"/>
+            <a:ext cx="94680" cy="93600"/>
           </a:xfrm>
           <a:prstGeom prst="ellipse">
             <a:avLst/>
@@ -11181,7 +11181,7 @@
         <p:spPr>
           <a:xfrm>
             <a:off x="5661360" y="7702920"/>
-            <a:ext cx="95040" cy="93960"/>
+            <a:ext cx="94680" cy="93600"/>
           </a:xfrm>
           <a:prstGeom prst="ellipse">
             <a:avLst/>
@@ -11239,7 +11239,7 @@
         <p:spPr>
           <a:xfrm>
             <a:off x="5797800" y="7702920"/>
-            <a:ext cx="95040" cy="93960"/>
+            <a:ext cx="94680" cy="93600"/>
           </a:xfrm>
           <a:prstGeom prst="ellipse">
             <a:avLst/>
@@ -11295,7 +11295,7 @@
         <p:spPr>
           <a:xfrm>
             <a:off x="5246280" y="8061840"/>
-            <a:ext cx="95040" cy="93960"/>
+            <a:ext cx="94680" cy="93600"/>
           </a:xfrm>
           <a:prstGeom prst="ellipse">
             <a:avLst/>
@@ -11353,7 +11353,7 @@
         <p:spPr>
           <a:xfrm>
             <a:off x="5392080" y="8057520"/>
-            <a:ext cx="95040" cy="93960"/>
+            <a:ext cx="94680" cy="93600"/>
           </a:xfrm>
           <a:prstGeom prst="ellipse">
             <a:avLst/>
@@ -11411,7 +11411,7 @@
         <p:spPr>
           <a:xfrm>
             <a:off x="5528520" y="8057520"/>
-            <a:ext cx="95040" cy="93960"/>
+            <a:ext cx="94680" cy="93600"/>
           </a:xfrm>
           <a:prstGeom prst="ellipse">
             <a:avLst/>
@@ -11469,7 +11469,7 @@
         <p:spPr>
           <a:xfrm>
             <a:off x="5664960" y="8057520"/>
-            <a:ext cx="95040" cy="93960"/>
+            <a:ext cx="94680" cy="93600"/>
           </a:xfrm>
           <a:prstGeom prst="ellipse">
             <a:avLst/>
@@ -11527,7 +11527,7 @@
         <p:spPr>
           <a:xfrm>
             <a:off x="5801400" y="8057520"/>
-            <a:ext cx="95040" cy="93960"/>
+            <a:ext cx="94680" cy="93600"/>
           </a:xfrm>
           <a:prstGeom prst="ellipse">
             <a:avLst/>
@@ -11583,7 +11583,7 @@
         <p:spPr>
           <a:xfrm>
             <a:off x="720" y="540000"/>
-            <a:ext cx="1344240" cy="455400"/>
+            <a:ext cx="1343880" cy="455400"/>
           </a:xfrm>
           <a:prstGeom prst="rect">
             <a:avLst/>
@@ -11641,7 +11641,7 @@
         <p:spPr>
           <a:xfrm>
             <a:off x="1282680" y="444240"/>
-            <a:ext cx="1800" cy="5894640"/>
+            <a:ext cx="2160" cy="5895000"/>
           </a:xfrm>
           <a:prstGeom prst="straightConnector1">
             <a:avLst/>
@@ -11662,7 +11662,7 @@
         <p:spPr>
           <a:xfrm>
             <a:off x="720" y="1518840"/>
-            <a:ext cx="1344240" cy="821160"/>
+            <a:ext cx="1343880" cy="821160"/>
           </a:xfrm>
           <a:prstGeom prst="rect">
             <a:avLst/>
@@ -11720,7 +11720,7 @@
         <p:spPr>
           <a:xfrm>
             <a:off x="0" y="3600000"/>
-            <a:ext cx="1344240" cy="638280"/>
+            <a:ext cx="1343880" cy="638280"/>
           </a:xfrm>
           <a:prstGeom prst="rect">
             <a:avLst/>
@@ -11778,7 +11778,7 @@
         <p:spPr>
           <a:xfrm>
             <a:off x="720" y="5114520"/>
-            <a:ext cx="1344240" cy="644400"/>
+            <a:ext cx="1343880" cy="644040"/>
           </a:xfrm>
           <a:prstGeom prst="rect">
             <a:avLst/>
@@ -11863,7 +11863,7 @@
         <p:spPr>
           <a:xfrm>
             <a:off x="720" y="5829840"/>
-            <a:ext cx="1344240" cy="644400"/>
+            <a:ext cx="1343880" cy="644040"/>
           </a:xfrm>
           <a:prstGeom prst="rect">
             <a:avLst/>
